--- a/cours/Module TIC/Département Français/Master 1 - Langue et Culture/Cours_TIC_06_Microsoft_PowerPoint_FR.pptx
+++ b/cours/Module TIC/Département Français/Master 1 - Langue et Culture/Cours_TIC_06_Microsoft_PowerPoint_FR.pptx
@@ -4,9 +4,6 @@
   <p:sldMasterIdLst>
     <p:sldMasterId id="2147483648" r:id="rId1"/>
   </p:sldMasterIdLst>
-  <p:notesMasterIdLst>
-    <p:notesMasterId r:id="rId33"/>
-  </p:notesMasterIdLst>
   <p:sldIdLst>
     <p:sldId id="256" r:id="rId7"/>
     <p:sldId id="257" r:id="rId8"/>
@@ -18,6 +15,11 @@
     <p:sldId id="263" r:id="rId14"/>
     <p:sldId id="264" r:id="rId15"/>
     <p:sldId id="265" r:id="rId16"/>
+    <p:sldId id="266" r:id="rId17"/>
+    <p:sldId id="267" r:id="rId18"/>
+    <p:sldId id="268" r:id="rId19"/>
+    <p:sldId id="269" r:id="rId20"/>
+    <p:sldId id="270" r:id="rId21"/>
   </p:sldIdLst>
   <p:sldSz cx="9144000" cy="6858000" type="screen4x3"/>
   <p:notesSz cx="6858000" cy="9144000"/>
@@ -116,372 +118,7 @@
       </a:defRPr>
     </a:lvl9pPr>
   </p:defaultTextStyle>
-  <p:extLst>
-    <p:ext uri="{EFAFB233-063F-42B5-8137-9DF3F51BA10A}">
-      <p15:sldGuideLst xmlns:p15="http://schemas.microsoft.com/office/powerpoint/2012/main">
-        <p15:guide id="1" orient="horz" pos="2160">
-          <p15:clr>
-            <a:srgbClr val="A4A3A4"/>
-          </p15:clr>
-        </p15:guide>
-        <p15:guide id="2" pos="2880">
-          <p15:clr>
-            <a:srgbClr val="A4A3A4"/>
-          </p15:clr>
-        </p15:guide>
-      </p15:sldGuideLst>
-    </p:ext>
-  </p:extLst>
 </p:presentation>
-</file>
-
-<file path=ppt/notesMasters/notesMaster1.xml><?xml version="1.0" encoding="utf-8"?>
-<p:notesMaster xmlns:a="http://schemas.openxmlformats.org/drawingml/2006/main" xmlns:r="http://schemas.openxmlformats.org/officeDocument/2006/relationships" xmlns:p="http://schemas.openxmlformats.org/presentationml/2006/main">
-  <p:cSld>
-    <p:bg>
-      <p:bgRef idx="1001">
-        <a:schemeClr val="bg1"/>
-      </p:bgRef>
-    </p:bg>
-    <p:spTree>
-      <p:nvGrpSpPr>
-        <p:cNvPr id="1" name=""/>
-        <p:cNvGrpSpPr/>
-        <p:nvPr/>
-      </p:nvGrpSpPr>
-      <p:grpSpPr>
-        <a:xfrm>
-          <a:off x="0" y="0"/>
-          <a:ext cx="0" cy="0"/>
-          <a:chOff x="0" y="0"/>
-          <a:chExt cx="0" cy="0"/>
-        </a:xfrm>
-      </p:grpSpPr>
-      <p:sp>
-        <p:nvSpPr>
-          <p:cNvPr id="2" name="Espace réservé de l'en-tête 1"/>
-          <p:cNvSpPr>
-            <a:spLocks noGrp="1"/>
-          </p:cNvSpPr>
-          <p:nvPr>
-            <p:ph type="hdr" sz="quarter"/>
-          </p:nvPr>
-        </p:nvSpPr>
-        <p:spPr>
-          <a:xfrm>
-            <a:off x="0" y="0"/>
-            <a:ext cx="2971800" cy="458788"/>
-          </a:xfrm>
-          <a:prstGeom prst="rect">
-            <a:avLst/>
-          </a:prstGeom>
-        </p:spPr>
-        <p:txBody>
-          <a:bodyPr vert="horz" lIns="91440" tIns="45720" rIns="91440" bIns="45720" rtlCol="0"/>
-          <a:lstStyle>
-            <a:lvl1pPr algn="l">
-              <a:defRPr sz="1200"/>
-            </a:lvl1pPr>
-          </a:lstStyle>
-          <a:p>
-            <a:endParaRPr lang="fr-FR"/>
-          </a:p>
-        </p:txBody>
-      </p:sp>
-      <p:sp>
-        <p:nvSpPr>
-          <p:cNvPr id="3" name="Espace réservé de la date 2"/>
-          <p:cNvSpPr>
-            <a:spLocks noGrp="1"/>
-          </p:cNvSpPr>
-          <p:nvPr>
-            <p:ph type="dt" idx="1"/>
-          </p:nvPr>
-        </p:nvSpPr>
-        <p:spPr>
-          <a:xfrm>
-            <a:off x="3884613" y="0"/>
-            <a:ext cx="2971800" cy="458788"/>
-          </a:xfrm>
-          <a:prstGeom prst="rect">
-            <a:avLst/>
-          </a:prstGeom>
-        </p:spPr>
-        <p:txBody>
-          <a:bodyPr vert="horz" lIns="91440" tIns="45720" rIns="91440" bIns="45720" rtlCol="0"/>
-          <a:lstStyle>
-            <a:lvl1pPr algn="r">
-              <a:defRPr sz="1200"/>
-            </a:lvl1pPr>
-          </a:lstStyle>
-          <a:p>
-            <a:fld id="{B8F0B2C1-4194-45A7-9834-731A4F36BABD}" type="datetimeFigureOut">
-              <a:rPr lang="fr-FR" smtClean="0"/>
-              <a:t>16/05/2026</a:t>
-            </a:fld>
-            <a:endParaRPr lang="fr-FR"/>
-          </a:p>
-        </p:txBody>
-      </p:sp>
-      <p:sp>
-        <p:nvSpPr>
-          <p:cNvPr id="4" name="Espace réservé de l'image des diapositives 3"/>
-          <p:cNvSpPr>
-            <a:spLocks noGrp="1" noRot="1" noChangeAspect="1"/>
-          </p:cNvSpPr>
-          <p:nvPr>
-            <p:ph type="sldImg" idx="2"/>
-          </p:nvPr>
-        </p:nvSpPr>
-        <p:spPr>
-          <a:xfrm>
-            <a:off x="1371600" y="1143000"/>
-            <a:ext cx="4114800" cy="3086100"/>
-          </a:xfrm>
-          <a:prstGeom prst="rect">
-            <a:avLst/>
-          </a:prstGeom>
-          <a:noFill/>
-          <a:ln w="12700">
-            <a:solidFill>
-              <a:prstClr val="black"/>
-            </a:solidFill>
-          </a:ln>
-        </p:spPr>
-        <p:txBody>
-          <a:bodyPr vert="horz" lIns="91440" tIns="45720" rIns="91440" bIns="45720" rtlCol="0" anchor="ctr"/>
-          <a:lstStyle/>
-          <a:p>
-            <a:endParaRPr lang="fr-FR"/>
-          </a:p>
-        </p:txBody>
-      </p:sp>
-      <p:sp>
-        <p:nvSpPr>
-          <p:cNvPr id="5" name="Espace réservé des notes 4"/>
-          <p:cNvSpPr>
-            <a:spLocks noGrp="1"/>
-          </p:cNvSpPr>
-          <p:nvPr>
-            <p:ph type="body" sz="quarter" idx="3"/>
-          </p:nvPr>
-        </p:nvSpPr>
-        <p:spPr>
-          <a:xfrm>
-            <a:off x="685800" y="4400550"/>
-            <a:ext cx="5486400" cy="3600450"/>
-          </a:xfrm>
-          <a:prstGeom prst="rect">
-            <a:avLst/>
-          </a:prstGeom>
-        </p:spPr>
-        <p:txBody>
-          <a:bodyPr vert="horz" lIns="91440" tIns="45720" rIns="91440" bIns="45720" rtlCol="0"/>
-          <a:lstStyle/>
-          <a:p>
-            <a:pPr lvl="0"/>
-            <a:r>
-              <a:rPr lang="fr-FR"/>
-              <a:t>Cliquez pour modifier les styles du texte du masque</a:t>
-            </a:r>
-          </a:p>
-          <a:p>
-            <a:pPr lvl="1"/>
-            <a:r>
-              <a:rPr lang="fr-FR"/>
-              <a:t>Deuxième niveau</a:t>
-            </a:r>
-          </a:p>
-          <a:p>
-            <a:pPr lvl="2"/>
-            <a:r>
-              <a:rPr lang="fr-FR"/>
-              <a:t>Troisième niveau</a:t>
-            </a:r>
-          </a:p>
-          <a:p>
-            <a:pPr lvl="3"/>
-            <a:r>
-              <a:rPr lang="fr-FR"/>
-              <a:t>Quatrième niveau</a:t>
-            </a:r>
-          </a:p>
-          <a:p>
-            <a:pPr lvl="4"/>
-            <a:r>
-              <a:rPr lang="fr-FR"/>
-              <a:t>Cinquième niveau</a:t>
-            </a:r>
-          </a:p>
-        </p:txBody>
-      </p:sp>
-      <p:sp>
-        <p:nvSpPr>
-          <p:cNvPr id="6" name="Espace réservé du pied de page 5"/>
-          <p:cNvSpPr>
-            <a:spLocks noGrp="1"/>
-          </p:cNvSpPr>
-          <p:nvPr>
-            <p:ph type="ftr" sz="quarter" idx="4"/>
-          </p:nvPr>
-        </p:nvSpPr>
-        <p:spPr>
-          <a:xfrm>
-            <a:off x="0" y="8685213"/>
-            <a:ext cx="2971800" cy="458787"/>
-          </a:xfrm>
-          <a:prstGeom prst="rect">
-            <a:avLst/>
-          </a:prstGeom>
-        </p:spPr>
-        <p:txBody>
-          <a:bodyPr vert="horz" lIns="91440" tIns="45720" rIns="91440" bIns="45720" rtlCol="0" anchor="b"/>
-          <a:lstStyle>
-            <a:lvl1pPr algn="l">
-              <a:defRPr sz="1200"/>
-            </a:lvl1pPr>
-          </a:lstStyle>
-          <a:p>
-            <a:endParaRPr lang="fr-FR"/>
-          </a:p>
-        </p:txBody>
-      </p:sp>
-      <p:sp>
-        <p:nvSpPr>
-          <p:cNvPr id="7" name="Espace réservé du numéro de diapositive 6"/>
-          <p:cNvSpPr>
-            <a:spLocks noGrp="1"/>
-          </p:cNvSpPr>
-          <p:nvPr>
-            <p:ph type="sldNum" sz="quarter" idx="5"/>
-          </p:nvPr>
-        </p:nvSpPr>
-        <p:spPr>
-          <a:xfrm>
-            <a:off x="3884613" y="8685213"/>
-            <a:ext cx="2971800" cy="458787"/>
-          </a:xfrm>
-          <a:prstGeom prst="rect">
-            <a:avLst/>
-          </a:prstGeom>
-        </p:spPr>
-        <p:txBody>
-          <a:bodyPr vert="horz" lIns="91440" tIns="45720" rIns="91440" bIns="45720" rtlCol="0" anchor="b"/>
-          <a:lstStyle>
-            <a:lvl1pPr algn="r">
-              <a:defRPr sz="1200"/>
-            </a:lvl1pPr>
-          </a:lstStyle>
-          <a:p>
-            <a:fld id="{EDB5666F-E79B-4A29-9A64-FA4855FAABBD}" type="slidenum">
-              <a:rPr lang="fr-FR" smtClean="0"/>
-              <a:t>‹N°›</a:t>
-            </a:fld>
-            <a:endParaRPr lang="fr-FR"/>
-          </a:p>
-        </p:txBody>
-      </p:sp>
-    </p:spTree>
-    <p:extLst>
-      <p:ext uri="{BB962C8B-B14F-4D97-AF65-F5344CB8AC3E}">
-        <p14:creationId xmlns:p14="http://schemas.microsoft.com/office/powerpoint/2010/main" val="4057233482"/>
-      </p:ext>
-    </p:extLst>
-  </p:cSld>
-  <p:clrMap bg1="lt1" tx1="dk1" bg2="lt2" tx2="dk2" accent1="accent1" accent2="accent2" accent3="accent3" accent4="accent4" accent5="accent5" accent6="accent6" hlink="hlink" folHlink="folHlink"/>
-  <p:notesStyle>
-    <a:lvl1pPr marL="0" algn="l" defTabSz="914400" rtl="0" eaLnBrk="1" latinLnBrk="0" hangingPunct="1">
-      <a:defRPr sz="1200" kern="1200">
-        <a:solidFill>
-          <a:schemeClr val="tx1"/>
-        </a:solidFill>
-        <a:latin typeface="+mn-lt"/>
-        <a:ea typeface="+mn-ea"/>
-        <a:cs typeface="+mn-cs"/>
-      </a:defRPr>
-    </a:lvl1pPr>
-    <a:lvl2pPr marL="457200" algn="l" defTabSz="914400" rtl="0" eaLnBrk="1" latinLnBrk="0" hangingPunct="1">
-      <a:defRPr sz="1200" kern="1200">
-        <a:solidFill>
-          <a:schemeClr val="tx1"/>
-        </a:solidFill>
-        <a:latin typeface="+mn-lt"/>
-        <a:ea typeface="+mn-ea"/>
-        <a:cs typeface="+mn-cs"/>
-      </a:defRPr>
-    </a:lvl2pPr>
-    <a:lvl3pPr marL="914400" algn="l" defTabSz="914400" rtl="0" eaLnBrk="1" latinLnBrk="0" hangingPunct="1">
-      <a:defRPr sz="1200" kern="1200">
-        <a:solidFill>
-          <a:schemeClr val="tx1"/>
-        </a:solidFill>
-        <a:latin typeface="+mn-lt"/>
-        <a:ea typeface="+mn-ea"/>
-        <a:cs typeface="+mn-cs"/>
-      </a:defRPr>
-    </a:lvl3pPr>
-    <a:lvl4pPr marL="1371600" algn="l" defTabSz="914400" rtl="0" eaLnBrk="1" latinLnBrk="0" hangingPunct="1">
-      <a:defRPr sz="1200" kern="1200">
-        <a:solidFill>
-          <a:schemeClr val="tx1"/>
-        </a:solidFill>
-        <a:latin typeface="+mn-lt"/>
-        <a:ea typeface="+mn-ea"/>
-        <a:cs typeface="+mn-cs"/>
-      </a:defRPr>
-    </a:lvl4pPr>
-    <a:lvl5pPr marL="1828800" algn="l" defTabSz="914400" rtl="0" eaLnBrk="1" latinLnBrk="0" hangingPunct="1">
-      <a:defRPr sz="1200" kern="1200">
-        <a:solidFill>
-          <a:schemeClr val="tx1"/>
-        </a:solidFill>
-        <a:latin typeface="+mn-lt"/>
-        <a:ea typeface="+mn-ea"/>
-        <a:cs typeface="+mn-cs"/>
-      </a:defRPr>
-    </a:lvl5pPr>
-    <a:lvl6pPr marL="2286000" algn="l" defTabSz="914400" rtl="0" eaLnBrk="1" latinLnBrk="0" hangingPunct="1">
-      <a:defRPr sz="1200" kern="1200">
-        <a:solidFill>
-          <a:schemeClr val="tx1"/>
-        </a:solidFill>
-        <a:latin typeface="+mn-lt"/>
-        <a:ea typeface="+mn-ea"/>
-        <a:cs typeface="+mn-cs"/>
-      </a:defRPr>
-    </a:lvl6pPr>
-    <a:lvl7pPr marL="2743200" algn="l" defTabSz="914400" rtl="0" eaLnBrk="1" latinLnBrk="0" hangingPunct="1">
-      <a:defRPr sz="1200" kern="1200">
-        <a:solidFill>
-          <a:schemeClr val="tx1"/>
-        </a:solidFill>
-        <a:latin typeface="+mn-lt"/>
-        <a:ea typeface="+mn-ea"/>
-        <a:cs typeface="+mn-cs"/>
-      </a:defRPr>
-    </a:lvl7pPr>
-    <a:lvl8pPr marL="3200400" algn="l" defTabSz="914400" rtl="0" eaLnBrk="1" latinLnBrk="0" hangingPunct="1">
-      <a:defRPr sz="1200" kern="1200">
-        <a:solidFill>
-          <a:schemeClr val="tx1"/>
-        </a:solidFill>
-        <a:latin typeface="+mn-lt"/>
-        <a:ea typeface="+mn-ea"/>
-        <a:cs typeface="+mn-cs"/>
-      </a:defRPr>
-    </a:lvl8pPr>
-    <a:lvl9pPr marL="3657600" algn="l" defTabSz="914400" rtl="0" eaLnBrk="1" latinLnBrk="0" hangingPunct="1">
-      <a:defRPr sz="1200" kern="1200">
-        <a:solidFill>
-          <a:schemeClr val="tx1"/>
-        </a:solidFill>
-        <a:latin typeface="+mn-lt"/>
-        <a:ea typeface="+mn-ea"/>
-        <a:cs typeface="+mn-cs"/>
-      </a:defRPr>
-    </a:lvl9pPr>
-  </p:notesStyle>
-</p:notesMaster>
 </file>
 
 <file path=ppt/slideLayouts/slideLayout1.xml><?xml version="1.0" encoding="utf-8"?>
@@ -522,9 +159,10 @@
           <a:lstStyle/>
           <a:p>
             <a:r>
-              <a:rPr lang="en-US"/>
+              <a:rPr lang="en-US" smtClean="0"/>
               <a:t>Click to edit Master title style</a:t>
             </a:r>
+            <a:endParaRPr lang="en-US"/>
           </a:p>
         </p:txBody>
       </p:sp>
@@ -640,9 +278,10 @@
           </a:lstStyle>
           <a:p>
             <a:r>
-              <a:rPr lang="en-US"/>
+              <a:rPr lang="en-US" smtClean="0"/>
               <a:t>Click to edit Master subtitle style</a:t>
             </a:r>
+            <a:endParaRPr lang="en-US"/>
           </a:p>
         </p:txBody>
       </p:sp>
@@ -663,7 +302,7 @@
           <a:p>
             <a:fld id="{5BCAD085-E8A6-8845-BD4E-CB4CCA059FC4}" type="datetimeFigureOut">
               <a:rPr lang="en-US" smtClean="0"/>
-              <a:t>5/16/2026</a:t>
+              <a:t>1/27/13</a:t>
             </a:fld>
             <a:endParaRPr lang="en-US"/>
           </a:p>
@@ -705,7 +344,7 @@
           <a:p>
             <a:fld id="{C1FF6DA9-008F-8B48-92A6-B652298478BF}" type="slidenum">
               <a:rPr lang="en-US" smtClean="0"/>
-              <a:t>‹N°›</a:t>
+              <a:t>‹#›</a:t>
             </a:fld>
             <a:endParaRPr lang="en-US"/>
           </a:p>
@@ -757,9 +396,10 @@
           <a:lstStyle/>
           <a:p>
             <a:r>
-              <a:rPr lang="en-US"/>
+              <a:rPr lang="en-US" smtClean="0"/>
               <a:t>Click to edit Master title style</a:t>
             </a:r>
+            <a:endParaRPr lang="en-US"/>
           </a:p>
         </p:txBody>
       </p:sp>
@@ -780,37 +420,38 @@
           <a:p>
             <a:pPr lvl="0"/>
             <a:r>
-              <a:rPr lang="en-US"/>
+              <a:rPr lang="en-US" smtClean="0"/>
               <a:t>Click to edit Master text styles</a:t>
             </a:r>
           </a:p>
           <a:p>
             <a:pPr lvl="1"/>
             <a:r>
-              <a:rPr lang="en-US"/>
+              <a:rPr lang="en-US" smtClean="0"/>
               <a:t>Second level</a:t>
             </a:r>
           </a:p>
           <a:p>
             <a:pPr lvl="2"/>
             <a:r>
-              <a:rPr lang="en-US"/>
+              <a:rPr lang="en-US" smtClean="0"/>
               <a:t>Third level</a:t>
             </a:r>
           </a:p>
           <a:p>
             <a:pPr lvl="3"/>
             <a:r>
-              <a:rPr lang="en-US"/>
+              <a:rPr lang="en-US" smtClean="0"/>
               <a:t>Fourth level</a:t>
             </a:r>
           </a:p>
           <a:p>
             <a:pPr lvl="4"/>
             <a:r>
-              <a:rPr lang="en-US"/>
+              <a:rPr lang="en-US" smtClean="0"/>
               <a:t>Fifth level</a:t>
             </a:r>
+            <a:endParaRPr lang="en-US"/>
           </a:p>
         </p:txBody>
       </p:sp>
@@ -831,7 +472,7 @@
           <a:p>
             <a:fld id="{5BCAD085-E8A6-8845-BD4E-CB4CCA059FC4}" type="datetimeFigureOut">
               <a:rPr lang="en-US" smtClean="0"/>
-              <a:t>5/16/2026</a:t>
+              <a:t>1/27/13</a:t>
             </a:fld>
             <a:endParaRPr lang="en-US"/>
           </a:p>
@@ -873,7 +514,7 @@
           <a:p>
             <a:fld id="{C1FF6DA9-008F-8B48-92A6-B652298478BF}" type="slidenum">
               <a:rPr lang="en-US" smtClean="0"/>
-              <a:t>‹N°›</a:t>
+              <a:t>‹#›</a:t>
             </a:fld>
             <a:endParaRPr lang="en-US"/>
           </a:p>
@@ -930,9 +571,10 @@
           <a:lstStyle/>
           <a:p>
             <a:r>
-              <a:rPr lang="en-US"/>
+              <a:rPr lang="en-US" smtClean="0"/>
               <a:t>Click to edit Master title style</a:t>
             </a:r>
+            <a:endParaRPr lang="en-US"/>
           </a:p>
         </p:txBody>
       </p:sp>
@@ -958,37 +600,38 @@
           <a:p>
             <a:pPr lvl="0"/>
             <a:r>
-              <a:rPr lang="en-US"/>
+              <a:rPr lang="en-US" smtClean="0"/>
               <a:t>Click to edit Master text styles</a:t>
             </a:r>
           </a:p>
           <a:p>
             <a:pPr lvl="1"/>
             <a:r>
-              <a:rPr lang="en-US"/>
+              <a:rPr lang="en-US" smtClean="0"/>
               <a:t>Second level</a:t>
             </a:r>
           </a:p>
           <a:p>
             <a:pPr lvl="2"/>
             <a:r>
-              <a:rPr lang="en-US"/>
+              <a:rPr lang="en-US" smtClean="0"/>
               <a:t>Third level</a:t>
             </a:r>
           </a:p>
           <a:p>
             <a:pPr lvl="3"/>
             <a:r>
-              <a:rPr lang="en-US"/>
+              <a:rPr lang="en-US" smtClean="0"/>
               <a:t>Fourth level</a:t>
             </a:r>
           </a:p>
           <a:p>
             <a:pPr lvl="4"/>
             <a:r>
-              <a:rPr lang="en-US"/>
+              <a:rPr lang="en-US" smtClean="0"/>
               <a:t>Fifth level</a:t>
             </a:r>
+            <a:endParaRPr lang="en-US"/>
           </a:p>
         </p:txBody>
       </p:sp>
@@ -1009,7 +652,7 @@
           <a:p>
             <a:fld id="{5BCAD085-E8A6-8845-BD4E-CB4CCA059FC4}" type="datetimeFigureOut">
               <a:rPr lang="en-US" smtClean="0"/>
-              <a:t>5/16/2026</a:t>
+              <a:t>1/27/13</a:t>
             </a:fld>
             <a:endParaRPr lang="en-US"/>
           </a:p>
@@ -1051,7 +694,7 @@
           <a:p>
             <a:fld id="{C1FF6DA9-008F-8B48-92A6-B652298478BF}" type="slidenum">
               <a:rPr lang="en-US" smtClean="0"/>
-              <a:t>‹N°›</a:t>
+              <a:t>‹#›</a:t>
             </a:fld>
             <a:endParaRPr lang="en-US"/>
           </a:p>
@@ -1103,9 +746,10 @@
           <a:lstStyle/>
           <a:p>
             <a:r>
-              <a:rPr lang="en-US"/>
+              <a:rPr lang="en-US" smtClean="0"/>
               <a:t>Click to edit Master title style</a:t>
             </a:r>
+            <a:endParaRPr lang="en-US"/>
           </a:p>
         </p:txBody>
       </p:sp>
@@ -1126,37 +770,38 @@
           <a:p>
             <a:pPr lvl="0"/>
             <a:r>
-              <a:rPr lang="en-US"/>
+              <a:rPr lang="en-US" smtClean="0"/>
               <a:t>Click to edit Master text styles</a:t>
             </a:r>
           </a:p>
           <a:p>
             <a:pPr lvl="1"/>
             <a:r>
-              <a:rPr lang="en-US"/>
+              <a:rPr lang="en-US" smtClean="0"/>
               <a:t>Second level</a:t>
             </a:r>
           </a:p>
           <a:p>
             <a:pPr lvl="2"/>
             <a:r>
-              <a:rPr lang="en-US"/>
+              <a:rPr lang="en-US" smtClean="0"/>
               <a:t>Third level</a:t>
             </a:r>
           </a:p>
           <a:p>
             <a:pPr lvl="3"/>
             <a:r>
-              <a:rPr lang="en-US"/>
+              <a:rPr lang="en-US" smtClean="0"/>
               <a:t>Fourth level</a:t>
             </a:r>
           </a:p>
           <a:p>
             <a:pPr lvl="4"/>
             <a:r>
-              <a:rPr lang="en-US"/>
+              <a:rPr lang="en-US" smtClean="0"/>
               <a:t>Fifth level</a:t>
             </a:r>
+            <a:endParaRPr lang="en-US"/>
           </a:p>
         </p:txBody>
       </p:sp>
@@ -1177,7 +822,7 @@
           <a:p>
             <a:fld id="{5BCAD085-E8A6-8845-BD4E-CB4CCA059FC4}" type="datetimeFigureOut">
               <a:rPr lang="en-US" smtClean="0"/>
-              <a:t>5/16/2026</a:t>
+              <a:t>1/27/13</a:t>
             </a:fld>
             <a:endParaRPr lang="en-US"/>
           </a:p>
@@ -1219,7 +864,7 @@
           <a:p>
             <a:fld id="{C1FF6DA9-008F-8B48-92A6-B652298478BF}" type="slidenum">
               <a:rPr lang="en-US" smtClean="0"/>
-              <a:t>‹N°›</a:t>
+              <a:t>‹#›</a:t>
             </a:fld>
             <a:endParaRPr lang="en-US"/>
           </a:p>
@@ -1280,9 +925,10 @@
           </a:lstStyle>
           <a:p>
             <a:r>
-              <a:rPr lang="en-US"/>
+              <a:rPr lang="en-US" smtClean="0"/>
               <a:t>Click to edit Master title style</a:t>
             </a:r>
+            <a:endParaRPr lang="en-US"/>
           </a:p>
         </p:txBody>
       </p:sp>
@@ -1399,7 +1045,7 @@
           <a:p>
             <a:pPr lvl="0"/>
             <a:r>
-              <a:rPr lang="en-US"/>
+              <a:rPr lang="en-US" smtClean="0"/>
               <a:t>Click to edit Master text styles</a:t>
             </a:r>
           </a:p>
@@ -1422,7 +1068,7 @@
           <a:p>
             <a:fld id="{5BCAD085-E8A6-8845-BD4E-CB4CCA059FC4}" type="datetimeFigureOut">
               <a:rPr lang="en-US" smtClean="0"/>
-              <a:t>5/16/2026</a:t>
+              <a:t>1/27/13</a:t>
             </a:fld>
             <a:endParaRPr lang="en-US"/>
           </a:p>
@@ -1464,7 +1110,7 @@
           <a:p>
             <a:fld id="{C1FF6DA9-008F-8B48-92A6-B652298478BF}" type="slidenum">
               <a:rPr lang="en-US" smtClean="0"/>
-              <a:t>‹N°›</a:t>
+              <a:t>‹#›</a:t>
             </a:fld>
             <a:endParaRPr lang="en-US"/>
           </a:p>
@@ -1516,9 +1162,10 @@
           <a:lstStyle/>
           <a:p>
             <a:r>
-              <a:rPr lang="en-US"/>
+              <a:rPr lang="en-US" smtClean="0"/>
               <a:t>Click to edit Master title style</a:t>
             </a:r>
+            <a:endParaRPr lang="en-US"/>
           </a:p>
         </p:txBody>
       </p:sp>
@@ -1572,37 +1219,38 @@
           <a:p>
             <a:pPr lvl="0"/>
             <a:r>
-              <a:rPr lang="en-US"/>
+              <a:rPr lang="en-US" smtClean="0"/>
               <a:t>Click to edit Master text styles</a:t>
             </a:r>
           </a:p>
           <a:p>
             <a:pPr lvl="1"/>
             <a:r>
-              <a:rPr lang="en-US"/>
+              <a:rPr lang="en-US" smtClean="0"/>
               <a:t>Second level</a:t>
             </a:r>
           </a:p>
           <a:p>
             <a:pPr lvl="2"/>
             <a:r>
-              <a:rPr lang="en-US"/>
+              <a:rPr lang="en-US" smtClean="0"/>
               <a:t>Third level</a:t>
             </a:r>
           </a:p>
           <a:p>
             <a:pPr lvl="3"/>
             <a:r>
-              <a:rPr lang="en-US"/>
+              <a:rPr lang="en-US" smtClean="0"/>
               <a:t>Fourth level</a:t>
             </a:r>
           </a:p>
           <a:p>
             <a:pPr lvl="4"/>
             <a:r>
-              <a:rPr lang="en-US"/>
+              <a:rPr lang="en-US" smtClean="0"/>
               <a:t>Fifth level</a:t>
             </a:r>
+            <a:endParaRPr lang="en-US"/>
           </a:p>
         </p:txBody>
       </p:sp>
@@ -1656,37 +1304,38 @@
           <a:p>
             <a:pPr lvl="0"/>
             <a:r>
-              <a:rPr lang="en-US"/>
+              <a:rPr lang="en-US" smtClean="0"/>
               <a:t>Click to edit Master text styles</a:t>
             </a:r>
           </a:p>
           <a:p>
             <a:pPr lvl="1"/>
             <a:r>
-              <a:rPr lang="en-US"/>
+              <a:rPr lang="en-US" smtClean="0"/>
               <a:t>Second level</a:t>
             </a:r>
           </a:p>
           <a:p>
             <a:pPr lvl="2"/>
             <a:r>
-              <a:rPr lang="en-US"/>
+              <a:rPr lang="en-US" smtClean="0"/>
               <a:t>Third level</a:t>
             </a:r>
           </a:p>
           <a:p>
             <a:pPr lvl="3"/>
             <a:r>
-              <a:rPr lang="en-US"/>
+              <a:rPr lang="en-US" smtClean="0"/>
               <a:t>Fourth level</a:t>
             </a:r>
           </a:p>
           <a:p>
             <a:pPr lvl="4"/>
             <a:r>
-              <a:rPr lang="en-US"/>
+              <a:rPr lang="en-US" smtClean="0"/>
               <a:t>Fifth level</a:t>
             </a:r>
+            <a:endParaRPr lang="en-US"/>
           </a:p>
         </p:txBody>
       </p:sp>
@@ -1707,7 +1356,7 @@
           <a:p>
             <a:fld id="{5BCAD085-E8A6-8845-BD4E-CB4CCA059FC4}" type="datetimeFigureOut">
               <a:rPr lang="en-US" smtClean="0"/>
-              <a:t>5/16/2026</a:t>
+              <a:t>1/27/13</a:t>
             </a:fld>
             <a:endParaRPr lang="en-US"/>
           </a:p>
@@ -1749,7 +1398,7 @@
           <a:p>
             <a:fld id="{C1FF6DA9-008F-8B48-92A6-B652298478BF}" type="slidenum">
               <a:rPr lang="en-US" smtClean="0"/>
-              <a:t>‹N°›</a:t>
+              <a:t>‹#›</a:t>
             </a:fld>
             <a:endParaRPr lang="en-US"/>
           </a:p>
@@ -1805,9 +1454,10 @@
           </a:lstStyle>
           <a:p>
             <a:r>
-              <a:rPr lang="en-US"/>
+              <a:rPr lang="en-US" smtClean="0"/>
               <a:t>Click to edit Master title style</a:t>
             </a:r>
+            <a:endParaRPr lang="en-US"/>
           </a:p>
         </p:txBody>
       </p:sp>
@@ -1870,7 +1520,7 @@
           <a:p>
             <a:pPr lvl="0"/>
             <a:r>
-              <a:rPr lang="en-US"/>
+              <a:rPr lang="en-US" smtClean="0"/>
               <a:t>Click to edit Master text styles</a:t>
             </a:r>
           </a:p>
@@ -1926,37 +1576,38 @@
           <a:p>
             <a:pPr lvl="0"/>
             <a:r>
-              <a:rPr lang="en-US"/>
+              <a:rPr lang="en-US" smtClean="0"/>
               <a:t>Click to edit Master text styles</a:t>
             </a:r>
           </a:p>
           <a:p>
             <a:pPr lvl="1"/>
             <a:r>
-              <a:rPr lang="en-US"/>
+              <a:rPr lang="en-US" smtClean="0"/>
               <a:t>Second level</a:t>
             </a:r>
           </a:p>
           <a:p>
             <a:pPr lvl="2"/>
             <a:r>
-              <a:rPr lang="en-US"/>
+              <a:rPr lang="en-US" smtClean="0"/>
               <a:t>Third level</a:t>
             </a:r>
           </a:p>
           <a:p>
             <a:pPr lvl="3"/>
             <a:r>
-              <a:rPr lang="en-US"/>
+              <a:rPr lang="en-US" smtClean="0"/>
               <a:t>Fourth level</a:t>
             </a:r>
           </a:p>
           <a:p>
             <a:pPr lvl="4"/>
             <a:r>
-              <a:rPr lang="en-US"/>
+              <a:rPr lang="en-US" smtClean="0"/>
               <a:t>Fifth level</a:t>
             </a:r>
+            <a:endParaRPr lang="en-US"/>
           </a:p>
         </p:txBody>
       </p:sp>
@@ -2019,7 +1670,7 @@
           <a:p>
             <a:pPr lvl="0"/>
             <a:r>
-              <a:rPr lang="en-US"/>
+              <a:rPr lang="en-US" smtClean="0"/>
               <a:t>Click to edit Master text styles</a:t>
             </a:r>
           </a:p>
@@ -2075,37 +1726,38 @@
           <a:p>
             <a:pPr lvl="0"/>
             <a:r>
-              <a:rPr lang="en-US"/>
+              <a:rPr lang="en-US" smtClean="0"/>
               <a:t>Click to edit Master text styles</a:t>
             </a:r>
           </a:p>
           <a:p>
             <a:pPr lvl="1"/>
             <a:r>
-              <a:rPr lang="en-US"/>
+              <a:rPr lang="en-US" smtClean="0"/>
               <a:t>Second level</a:t>
             </a:r>
           </a:p>
           <a:p>
             <a:pPr lvl="2"/>
             <a:r>
-              <a:rPr lang="en-US"/>
+              <a:rPr lang="en-US" smtClean="0"/>
               <a:t>Third level</a:t>
             </a:r>
           </a:p>
           <a:p>
             <a:pPr lvl="3"/>
             <a:r>
-              <a:rPr lang="en-US"/>
+              <a:rPr lang="en-US" smtClean="0"/>
               <a:t>Fourth level</a:t>
             </a:r>
           </a:p>
           <a:p>
             <a:pPr lvl="4"/>
             <a:r>
-              <a:rPr lang="en-US"/>
+              <a:rPr lang="en-US" smtClean="0"/>
               <a:t>Fifth level</a:t>
             </a:r>
+            <a:endParaRPr lang="en-US"/>
           </a:p>
         </p:txBody>
       </p:sp>
@@ -2126,7 +1778,7 @@
           <a:p>
             <a:fld id="{5BCAD085-E8A6-8845-BD4E-CB4CCA059FC4}" type="datetimeFigureOut">
               <a:rPr lang="en-US" smtClean="0"/>
-              <a:t>5/16/2026</a:t>
+              <a:t>1/27/13</a:t>
             </a:fld>
             <a:endParaRPr lang="en-US"/>
           </a:p>
@@ -2168,7 +1820,7 @@
           <a:p>
             <a:fld id="{C1FF6DA9-008F-8B48-92A6-B652298478BF}" type="slidenum">
               <a:rPr lang="en-US" smtClean="0"/>
-              <a:t>‹N°›</a:t>
+              <a:t>‹#›</a:t>
             </a:fld>
             <a:endParaRPr lang="en-US"/>
           </a:p>
@@ -2220,9 +1872,10 @@
           <a:lstStyle/>
           <a:p>
             <a:r>
-              <a:rPr lang="en-US"/>
+              <a:rPr lang="en-US" smtClean="0"/>
               <a:t>Click to edit Master title style</a:t>
             </a:r>
+            <a:endParaRPr lang="en-US"/>
           </a:p>
         </p:txBody>
       </p:sp>
@@ -2243,7 +1896,7 @@
           <a:p>
             <a:fld id="{5BCAD085-E8A6-8845-BD4E-CB4CCA059FC4}" type="datetimeFigureOut">
               <a:rPr lang="en-US" smtClean="0"/>
-              <a:t>5/16/2026</a:t>
+              <a:t>1/27/13</a:t>
             </a:fld>
             <a:endParaRPr lang="en-US"/>
           </a:p>
@@ -2285,7 +1938,7 @@
           <a:p>
             <a:fld id="{C1FF6DA9-008F-8B48-92A6-B652298478BF}" type="slidenum">
               <a:rPr lang="en-US" smtClean="0"/>
-              <a:t>‹N°›</a:t>
+              <a:t>‹#›</a:t>
             </a:fld>
             <a:endParaRPr lang="en-US"/>
           </a:p>
@@ -2338,7 +1991,7 @@
           <a:p>
             <a:fld id="{5BCAD085-E8A6-8845-BD4E-CB4CCA059FC4}" type="datetimeFigureOut">
               <a:rPr lang="en-US" smtClean="0"/>
-              <a:t>5/16/2026</a:t>
+              <a:t>1/27/13</a:t>
             </a:fld>
             <a:endParaRPr lang="en-US"/>
           </a:p>
@@ -2380,7 +2033,7 @@
           <a:p>
             <a:fld id="{C1FF6DA9-008F-8B48-92A6-B652298478BF}" type="slidenum">
               <a:rPr lang="en-US" smtClean="0"/>
-              <a:t>‹N°›</a:t>
+              <a:t>‹#›</a:t>
             </a:fld>
             <a:endParaRPr lang="en-US"/>
           </a:p>
@@ -2441,9 +2094,10 @@
           </a:lstStyle>
           <a:p>
             <a:r>
-              <a:rPr lang="en-US"/>
+              <a:rPr lang="en-US" smtClean="0"/>
               <a:t>Click to edit Master title style</a:t>
             </a:r>
+            <a:endParaRPr lang="en-US"/>
           </a:p>
         </p:txBody>
       </p:sp>
@@ -2497,37 +2151,38 @@
           <a:p>
             <a:pPr lvl="0"/>
             <a:r>
-              <a:rPr lang="en-US"/>
+              <a:rPr lang="en-US" smtClean="0"/>
               <a:t>Click to edit Master text styles</a:t>
             </a:r>
           </a:p>
           <a:p>
             <a:pPr lvl="1"/>
             <a:r>
-              <a:rPr lang="en-US"/>
+              <a:rPr lang="en-US" smtClean="0"/>
               <a:t>Second level</a:t>
             </a:r>
           </a:p>
           <a:p>
             <a:pPr lvl="2"/>
             <a:r>
-              <a:rPr lang="en-US"/>
+              <a:rPr lang="en-US" smtClean="0"/>
               <a:t>Third level</a:t>
             </a:r>
           </a:p>
           <a:p>
             <a:pPr lvl="3"/>
             <a:r>
-              <a:rPr lang="en-US"/>
+              <a:rPr lang="en-US" smtClean="0"/>
               <a:t>Fourth level</a:t>
             </a:r>
           </a:p>
           <a:p>
             <a:pPr lvl="4"/>
             <a:r>
-              <a:rPr lang="en-US"/>
+              <a:rPr lang="en-US" smtClean="0"/>
               <a:t>Fifth level</a:t>
             </a:r>
+            <a:endParaRPr lang="en-US"/>
           </a:p>
         </p:txBody>
       </p:sp>
@@ -2590,7 +2245,7 @@
           <a:p>
             <a:pPr lvl="0"/>
             <a:r>
-              <a:rPr lang="en-US"/>
+              <a:rPr lang="en-US" smtClean="0"/>
               <a:t>Click to edit Master text styles</a:t>
             </a:r>
           </a:p>
@@ -2613,7 +2268,7 @@
           <a:p>
             <a:fld id="{5BCAD085-E8A6-8845-BD4E-CB4CCA059FC4}" type="datetimeFigureOut">
               <a:rPr lang="en-US" smtClean="0"/>
-              <a:t>5/16/2026</a:t>
+              <a:t>1/27/13</a:t>
             </a:fld>
             <a:endParaRPr lang="en-US"/>
           </a:p>
@@ -2655,7 +2310,7 @@
           <a:p>
             <a:fld id="{C1FF6DA9-008F-8B48-92A6-B652298478BF}" type="slidenum">
               <a:rPr lang="en-US" smtClean="0"/>
-              <a:t>‹N°›</a:t>
+              <a:t>‹#›</a:t>
             </a:fld>
             <a:endParaRPr lang="en-US"/>
           </a:p>
@@ -2716,9 +2371,10 @@
           </a:lstStyle>
           <a:p>
             <a:r>
-              <a:rPr lang="en-US"/>
+              <a:rPr lang="en-US" smtClean="0"/>
               <a:t>Click to edit Master title style</a:t>
             </a:r>
+            <a:endParaRPr lang="en-US"/>
           </a:p>
         </p:txBody>
       </p:sp>
@@ -2842,7 +2498,7 @@
           <a:p>
             <a:pPr lvl="0"/>
             <a:r>
-              <a:rPr lang="en-US"/>
+              <a:rPr lang="en-US" smtClean="0"/>
               <a:t>Click to edit Master text styles</a:t>
             </a:r>
           </a:p>
@@ -2865,7 +2521,7 @@
           <a:p>
             <a:fld id="{5BCAD085-E8A6-8845-BD4E-CB4CCA059FC4}" type="datetimeFigureOut">
               <a:rPr lang="en-US" smtClean="0"/>
-              <a:t>5/16/2026</a:t>
+              <a:t>1/27/13</a:t>
             </a:fld>
             <a:endParaRPr lang="en-US"/>
           </a:p>
@@ -2907,7 +2563,7 @@
           <a:p>
             <a:fld id="{C1FF6DA9-008F-8B48-92A6-B652298478BF}" type="slidenum">
               <a:rPr lang="en-US" smtClean="0"/>
-              <a:t>‹N°›</a:t>
+              <a:t>‹#›</a:t>
             </a:fld>
             <a:endParaRPr lang="en-US"/>
           </a:p>
@@ -2974,9 +2630,10 @@
           <a:lstStyle/>
           <a:p>
             <a:r>
-              <a:rPr lang="en-US"/>
+              <a:rPr lang="en-US" smtClean="0"/>
               <a:t>Click to edit Master title style</a:t>
             </a:r>
+            <a:endParaRPr lang="en-US"/>
           </a:p>
         </p:txBody>
       </p:sp>
@@ -3007,37 +2664,38 @@
           <a:p>
             <a:pPr lvl="0"/>
             <a:r>
-              <a:rPr lang="en-US"/>
+              <a:rPr lang="en-US" smtClean="0"/>
               <a:t>Click to edit Master text styles</a:t>
             </a:r>
           </a:p>
           <a:p>
             <a:pPr lvl="1"/>
             <a:r>
-              <a:rPr lang="en-US"/>
+              <a:rPr lang="en-US" smtClean="0"/>
               <a:t>Second level</a:t>
             </a:r>
           </a:p>
           <a:p>
             <a:pPr lvl="2"/>
             <a:r>
-              <a:rPr lang="en-US"/>
+              <a:rPr lang="en-US" smtClean="0"/>
               <a:t>Third level</a:t>
             </a:r>
           </a:p>
           <a:p>
             <a:pPr lvl="3"/>
             <a:r>
-              <a:rPr lang="en-US"/>
+              <a:rPr lang="en-US" smtClean="0"/>
               <a:t>Fourth level</a:t>
             </a:r>
           </a:p>
           <a:p>
             <a:pPr lvl="4"/>
             <a:r>
-              <a:rPr lang="en-US"/>
+              <a:rPr lang="en-US" smtClean="0"/>
               <a:t>Fifth level</a:t>
             </a:r>
+            <a:endParaRPr lang="en-US"/>
           </a:p>
         </p:txBody>
       </p:sp>
@@ -3076,7 +2734,7 @@
           <a:p>
             <a:fld id="{5BCAD085-E8A6-8845-BD4E-CB4CCA059FC4}" type="datetimeFigureOut">
               <a:rPr lang="en-US" smtClean="0"/>
-              <a:t>5/16/2026</a:t>
+              <a:t>1/27/13</a:t>
             </a:fld>
             <a:endParaRPr lang="en-US"/>
           </a:p>
@@ -3154,7 +2812,7 @@
           <a:p>
             <a:fld id="{C1FF6DA9-008F-8B48-92A6-B652298478BF}" type="slidenum">
               <a:rPr lang="en-US" smtClean="0"/>
-              <a:t>‹N°›</a:t>
+              <a:t>‹#›</a:t>
             </a:fld>
             <a:endParaRPr lang="en-US"/>
           </a:p>
@@ -3437,6 +3095,14 @@
 <file path=ppt/slides/slide1.xml><?xml version="1.0" encoding="utf-8"?>
 <p:sld xmlns:a="http://schemas.openxmlformats.org/drawingml/2006/main" xmlns:p="http://schemas.openxmlformats.org/presentationml/2006/main" xmlns:r="http://schemas.openxmlformats.org/officeDocument/2006/relationships">
   <p:cSld>
+    <p:bg>
+      <p:bgPr>
+        <a:solidFill>
+          <a:srgbClr val="1A5C33"/>
+        </a:solidFill>
+        <a:effectLst/>
+      </p:bgPr>
+    </p:bg>
     <p:spTree>
       <p:nvGrpSpPr>
         <p:cNvPr id="1" name=""/>
@@ -3446,56 +3112,14 @@
       <p:grpSpPr/>
       <p:sp>
         <p:nvSpPr>
-          <p:cNvPr id="2" name="Title 1"/>
-          <p:cNvSpPr>
-            <a:spLocks noGrp="1"/>
-          </p:cNvSpPr>
-          <p:nvPr>
-            <p:ph type="ctrTitle"/>
-          </p:nvPr>
-        </p:nvSpPr>
-        <p:spPr/>
-        <p:txBody>
-          <a:bodyPr/>
-          <a:lstStyle/>
-          <a:p>
-            <a:r>
-              <a:t>Microsoft PowerPoint</a:t>
-            </a:r>
-          </a:p>
-        </p:txBody>
-      </p:sp>
-      <p:sp>
-        <p:nvSpPr>
-          <p:cNvPr id="3" name="Subtitle 2"/>
-          <p:cNvSpPr>
-            <a:spLocks noGrp="1"/>
-          </p:cNvSpPr>
-          <p:nvPr>
-            <p:ph type="subTitle" idx="1"/>
-          </p:nvPr>
-        </p:nvSpPr>
-        <p:spPr/>
-        <p:txBody>
-          <a:bodyPr/>
-          <a:lstStyle/>
-          <a:p>
-            <a:r>
-              <a:t>Cours TIC 06 | 1h30 (90 min) | BELACEL Madani</a:t>
-            </a:r>
-          </a:p>
-        </p:txBody>
-      </p:sp>
-      <p:sp>
-        <p:nvSpPr>
-          <p:cNvPr id="4" name="TextBox 3"/>
+          <p:cNvPr id="2" name="TextBox 1"/>
           <p:cNvSpPr txBox="1"/>
           <p:nvPr/>
         </p:nvSpPr>
         <p:spPr>
           <a:xfrm>
-            <a:off x="365760" y="6446520"/>
-            <a:ext cx="8412480" cy="320040"/>
+            <a:off x="731520" y="1371600"/>
+            <a:ext cx="7680960" cy="1371600"/>
           </a:xfrm>
           <a:prstGeom prst="rect">
             <a:avLst/>
@@ -3503,20 +3127,90 @@
           <a:noFill/>
         </p:spPr>
         <p:txBody>
-          <a:bodyPr wrap="none">
+          <a:bodyPr wrap="square">
             <a:spAutoFit/>
           </a:bodyPr>
           <a:lstStyle/>
           <a:p>
             <a:pPr algn="ctr">
-              <a:defRPr sz="900">
-                <a:solidFill>
-                  <a:srgbClr val="404040"/>
-                </a:solidFill>
-              </a:defRPr>
-            </a:pPr>
-            <a:r>
-              <a:t>Cours TIC 06  •  Diapositive 1/10</a:t>
+              <a:defRPr sz="3200" b="1">
+                <a:solidFill>
+                  <a:srgbClr val="FFFFFF"/>
+                </a:solidFill>
+              </a:defRPr>
+            </a:pPr>
+            <a:r>
+              <a:t>Cours TIC 06 — Microsoft PowerPoint</a:t>
+            </a:r>
+          </a:p>
+        </p:txBody>
+      </p:sp>
+      <p:sp>
+        <p:nvSpPr>
+          <p:cNvPr id="3" name="TextBox 2"/>
+          <p:cNvSpPr txBox="1"/>
+          <p:nvPr/>
+        </p:nvSpPr>
+        <p:spPr>
+          <a:xfrm>
+            <a:off x="731520" y="2926080"/>
+            <a:ext cx="7680960" cy="548640"/>
+          </a:xfrm>
+          <a:prstGeom prst="rect">
+            <a:avLst/>
+          </a:prstGeom>
+          <a:noFill/>
+        </p:spPr>
+        <p:txBody>
+          <a:bodyPr wrap="square">
+            <a:spAutoFit/>
+          </a:bodyPr>
+          <a:lstStyle/>
+          <a:p>
+            <a:pPr algn="ctr">
+              <a:defRPr sz="2000" b="0">
+                <a:solidFill>
+                  <a:srgbClr val="C5D9C7"/>
+                </a:solidFill>
+              </a:defRPr>
+            </a:pPr>
+            <a:r>
+              <a:t>Module TIC — Dr. BELACEL Madani</a:t>
+            </a:r>
+          </a:p>
+        </p:txBody>
+      </p:sp>
+      <p:sp>
+        <p:nvSpPr>
+          <p:cNvPr id="4" name="TextBox 3"/>
+          <p:cNvSpPr txBox="1"/>
+          <p:nvPr/>
+        </p:nvSpPr>
+        <p:spPr>
+          <a:xfrm>
+            <a:off x="731520" y="3657600"/>
+            <a:ext cx="7680960" cy="457200"/>
+          </a:xfrm>
+          <a:prstGeom prst="rect">
+            <a:avLst/>
+          </a:prstGeom>
+          <a:noFill/>
+        </p:spPr>
+        <p:txBody>
+          <a:bodyPr wrap="square">
+            <a:spAutoFit/>
+          </a:bodyPr>
+          <a:lstStyle/>
+          <a:p>
+            <a:pPr algn="ctr">
+              <a:defRPr sz="1600" b="0">
+                <a:solidFill>
+                  <a:srgbClr val="A0CFA0"/>
+                </a:solidFill>
+              </a:defRPr>
+            </a:pPr>
+            <a:r>
+              <a:t>Université de Mostaganem — MCB</a:t>
             </a:r>
           </a:p>
         </p:txBody>
@@ -3526,15 +3220,20 @@
   <p:clrMapOvr>
     <a:masterClrMapping/>
   </p:clrMapOvr>
-  <p:transition spd="med">
-    <p:fade/>
-  </p:transition>
 </p:sld>
 </file>
 
 <file path=ppt/slides/slide10.xml><?xml version="1.0" encoding="utf-8"?>
 <p:sld xmlns:a="http://schemas.openxmlformats.org/drawingml/2006/main" xmlns:p="http://schemas.openxmlformats.org/presentationml/2006/main" xmlns:r="http://schemas.openxmlformats.org/officeDocument/2006/relationships">
   <p:cSld>
+    <p:bg>
+      <p:bgPr>
+        <a:solidFill>
+          <a:srgbClr val="FFFFFF"/>
+        </a:solidFill>
+        <a:effectLst/>
+      </p:bgPr>
+    </p:bg>
     <p:spTree>
       <p:nvGrpSpPr>
         <p:cNvPr id="1" name=""/>
@@ -3544,83 +3243,57 @@
       <p:grpSpPr/>
       <p:sp>
         <p:nvSpPr>
-          <p:cNvPr id="2" name="Title 1"/>
-          <p:cNvSpPr>
-            <a:spLocks noGrp="1"/>
-          </p:cNvSpPr>
-          <p:nvPr>
-            <p:ph type="title"/>
-          </p:nvPr>
-        </p:nvSpPr>
-        <p:spPr/>
-        <p:txBody>
-          <a:bodyPr/>
-          <a:lstStyle/>
-          <a:p>
-            <a:r>
-              <a:t>Conclusion</a:t>
-            </a:r>
-          </a:p>
-        </p:txBody>
-      </p:sp>
-      <p:sp>
-        <p:nvSpPr>
-          <p:cNvPr id="3" name="Content Placeholder 2"/>
-          <p:cNvSpPr>
-            <a:spLocks noGrp="1"/>
-          </p:cNvSpPr>
-          <p:nvPr>
-            <p:ph idx="1"/>
-          </p:nvPr>
-        </p:nvSpPr>
-        <p:spPr/>
-        <p:txBody>
-          <a:bodyPr/>
-          <a:lstStyle/>
-          <a:p>
-            <a:pPr>
-              <a:defRPr sz="2000"/>
-            </a:pPr>
-            <a:r>
-              <a:t>✅ PowerPoint clôt la triade bureautique — Prochain : Internet</a:t>
-            </a:r>
-          </a:p>
-          <a:p>
-            <a:pPr>
-              <a:defRPr sz="2000"/>
-            </a:pPr>
-            <a:r>
-              <a:t>✅ TD 06 — 1h30</a:t>
-            </a:r>
-          </a:p>
-          <a:p>
-            <a:pPr>
-              <a:defRPr sz="2000"/>
-            </a:pPr>
-            <a:r>
-              <a:t>✅ Séance suivante</a:t>
-            </a:r>
-          </a:p>
-          <a:p>
-            <a:pPr>
-              <a:defRPr sz="2000"/>
-            </a:pPr>
-            <a:r>
-              <a:t>✅ Questions ?</a:t>
-            </a:r>
-          </a:p>
-        </p:txBody>
-      </p:sp>
-      <p:sp>
-        <p:nvSpPr>
-          <p:cNvPr id="4" name="TextBox 3"/>
+          <p:cNvPr id="2" name="Rectangle 1"/>
+          <p:cNvSpPr/>
+          <p:nvPr/>
+        </p:nvSpPr>
+        <p:spPr>
+          <a:xfrm>
+            <a:off x="0" y="0"/>
+            <a:ext cx="109728" cy="6858000"/>
+          </a:xfrm>
+          <a:prstGeom prst="rect">
+            <a:avLst/>
+          </a:prstGeom>
+          <a:solidFill>
+            <a:srgbClr val="2C6E49"/>
+          </a:solidFill>
+          <a:ln>
+            <a:noFill/>
+          </a:ln>
+        </p:spPr>
+        <p:style>
+          <a:lnRef idx="1">
+            <a:schemeClr val="accent1"/>
+          </a:lnRef>
+          <a:fillRef idx="3">
+            <a:schemeClr val="accent1"/>
+          </a:fillRef>
+          <a:effectRef idx="2">
+            <a:schemeClr val="accent1"/>
+          </a:effectRef>
+          <a:fontRef idx="minor">
+            <a:schemeClr val="lt1"/>
+          </a:fontRef>
+        </p:style>
+        <p:txBody>
+          <a:bodyPr rtlCol="0" anchor="ctr"/>
+          <a:lstStyle/>
+          <a:p>
+            <a:pPr algn="ctr"/>
+          </a:p>
+        </p:txBody>
+      </p:sp>
+      <p:sp>
+        <p:nvSpPr>
+          <p:cNvPr id="3" name="TextBox 2"/>
           <p:cNvSpPr txBox="1"/>
           <p:nvPr/>
         </p:nvSpPr>
         <p:spPr>
           <a:xfrm>
-            <a:off x="365760" y="6446520"/>
-            <a:ext cx="8412480" cy="320040"/>
+            <a:off x="457200" y="365760"/>
+            <a:ext cx="8229600" cy="640080"/>
           </a:xfrm>
           <a:prstGeom prst="rect">
             <a:avLst/>
@@ -3628,20 +3301,193 @@
           <a:noFill/>
         </p:spPr>
         <p:txBody>
-          <a:bodyPr wrap="none">
+          <a:bodyPr wrap="square">
             <a:spAutoFit/>
           </a:bodyPr>
           <a:lstStyle/>
           <a:p>
-            <a:pPr algn="ctr">
-              <a:defRPr sz="900">
-                <a:solidFill>
-                  <a:srgbClr val="404040"/>
-                </a:solidFill>
-              </a:defRPr>
-            </a:pPr>
-            <a:r>
-              <a:t>Cours TIC 06  •  Diapositive 10/10</a:t>
+            <a:pPr algn="l">
+              <a:defRPr sz="2200" b="1">
+                <a:solidFill>
+                  <a:srgbClr val="1A5C33"/>
+                </a:solidFill>
+              </a:defRPr>
+            </a:pPr>
+            <a:r>
+              <a:t>Plan du cours</a:t>
+            </a:r>
+          </a:p>
+        </p:txBody>
+      </p:sp>
+      <p:sp>
+        <p:nvSpPr>
+          <p:cNvPr id="4" name="TextBox 3"/>
+          <p:cNvSpPr txBox="1"/>
+          <p:nvPr/>
+        </p:nvSpPr>
+        <p:spPr>
+          <a:xfrm>
+            <a:off x="457200" y="1371600"/>
+            <a:ext cx="7772400" cy="4572000"/>
+          </a:xfrm>
+          <a:prstGeom prst="rect">
+            <a:avLst/>
+          </a:prstGeom>
+          <a:noFill/>
+        </p:spPr>
+        <p:txBody>
+          <a:bodyPr wrap="square">
+            <a:spAutoFit/>
+          </a:bodyPr>
+          <a:lstStyle/>
+          <a:p>
+            <a:pPr>
+              <a:spcAft>
+                <a:spcPts val="600"/>
+              </a:spcAft>
+              <a:defRPr sz="1400">
+                <a:solidFill>
+                  <a:srgbClr val="222222"/>
+                </a:solidFill>
+              </a:defRPr>
+            </a:pPr>
+            <a:r>
+              <a:t>• Introduction — PowerPoint comme outil de recherche</a:t>
+            </a:r>
+          </a:p>
+          <a:p>
+            <a:pPr>
+              <a:spcAft>
+                <a:spcPts val="600"/>
+              </a:spcAft>
+              <a:defRPr sz="1400">
+                <a:solidFill>
+                  <a:srgbClr val="222222"/>
+                </a:solidFill>
+              </a:defRPr>
+            </a:pPr>
+            <a:r>
+              <a:t>• Interface avancée et modes d'affichage</a:t>
+            </a:r>
+          </a:p>
+          <a:p>
+            <a:pPr>
+              <a:spcAft>
+                <a:spcPts val="600"/>
+              </a:spcAft>
+              <a:defRPr sz="1400">
+                <a:solidFill>
+                  <a:srgbClr val="222222"/>
+                </a:solidFill>
+              </a:defRPr>
+            </a:pPr>
+            <a:r>
+              <a:t>• Architecture d'une communication scientifique (12–15 slides)</a:t>
+            </a:r>
+          </a:p>
+          <a:p>
+            <a:pPr>
+              <a:spcAft>
+                <a:spcPts val="600"/>
+              </a:spcAft>
+              <a:defRPr sz="1400">
+                <a:solidFill>
+                  <a:srgbClr val="222222"/>
+                </a:solidFill>
+              </a:defRPr>
+            </a:pPr>
+            <a:r>
+              <a:t>• Design professionnel, template et charte graphique</a:t>
+            </a:r>
+          </a:p>
+          <a:p>
+            <a:pPr>
+              <a:spcAft>
+                <a:spcPts val="600"/>
+              </a:spcAft>
+              <a:defRPr sz="1400">
+                <a:solidFill>
+                  <a:srgbClr val="222222"/>
+                </a:solidFill>
+              </a:defRPr>
+            </a:pPr>
+            <a:r>
+              <a:t>• Data visualisation : graphiques, tableaux, infographies</a:t>
+            </a:r>
+          </a:p>
+          <a:p>
+            <a:pPr>
+              <a:spcAft>
+                <a:spcPts val="600"/>
+              </a:spcAft>
+              <a:defRPr sz="1400">
+                <a:solidFill>
+                  <a:srgbClr val="222222"/>
+                </a:solidFill>
+              </a:defRPr>
+            </a:pPr>
+            <a:r>
+              <a:t>• Transitions, animations et storytelling</a:t>
+            </a:r>
+          </a:p>
+          <a:p>
+            <a:pPr>
+              <a:spcAft>
+                <a:spcPts val="600"/>
+              </a:spcAft>
+              <a:defRPr sz="1400">
+                <a:solidFill>
+                  <a:srgbClr val="222222"/>
+                </a:solidFill>
+              </a:defRPr>
+            </a:pPr>
+            <a:r>
+              <a:t>• Intégration de données Word, Excel et corpus</a:t>
+            </a:r>
+          </a:p>
+          <a:p>
+            <a:pPr>
+              <a:spcAft>
+                <a:spcPts val="600"/>
+              </a:spcAft>
+              <a:defRPr sz="1400">
+                <a:solidFill>
+                  <a:srgbClr val="222222"/>
+                </a:solidFill>
+              </a:defRPr>
+            </a:pPr>
+            <a:r>
+              <a:t>• Présentation orale : techniques pour soutenance et colloque</a:t>
+            </a:r>
+          </a:p>
+          <a:p>
+            <a:pPr>
+              <a:spcAft>
+                <a:spcPts val="600"/>
+              </a:spcAft>
+              <a:defRPr sz="1400">
+                <a:solidFill>
+                  <a:srgbClr val="222222"/>
+                </a:solidFill>
+              </a:defRPr>
+            </a:pPr>
+            <a:r>
+              <a:t>• Export, archivage et dépôt en ligne (HAL, Zenodo)</a:t>
+            </a:r>
+          </a:p>
+          <a:p>
+            <a:pPr>
+              <a:spcAft>
+                <a:spcPts val="600"/>
+              </a:spcAft>
+              <a:defRPr sz="1400">
+                <a:solidFill>
+                  <a:srgbClr val="222222"/>
+                </a:solidFill>
+              </a:defRPr>
+            </a:pPr>
+            <a:r>
+              <a:t>• Conclusion et TD</a:t>
             </a:r>
           </a:p>
         </p:txBody>
@@ -3651,15 +3497,20 @@
   <p:clrMapOvr>
     <a:masterClrMapping/>
   </p:clrMapOvr>
-  <p:transition spd="med">
-    <p:fade/>
-  </p:transition>
 </p:sld>
 </file>
 
-<file path=ppt/slides/slide2.xml><?xml version="1.0" encoding="utf-8"?>
+<file path=ppt/slides/slide11.xml><?xml version="1.0" encoding="utf-8"?>
 <p:sld xmlns:a="http://schemas.openxmlformats.org/drawingml/2006/main" xmlns:p="http://schemas.openxmlformats.org/presentationml/2006/main" xmlns:r="http://schemas.openxmlformats.org/officeDocument/2006/relationships">
   <p:cSld>
+    <p:bg>
+      <p:bgPr>
+        <a:solidFill>
+          <a:srgbClr val="FFFFFF"/>
+        </a:solidFill>
+        <a:effectLst/>
+      </p:bgPr>
+    </p:bg>
     <p:spTree>
       <p:nvGrpSpPr>
         <p:cNvPr id="1" name=""/>
@@ -3669,83 +3520,57 @@
       <p:grpSpPr/>
       <p:sp>
         <p:nvSpPr>
-          <p:cNvPr id="2" name="Title 1"/>
-          <p:cNvSpPr>
-            <a:spLocks noGrp="1"/>
-          </p:cNvSpPr>
-          <p:nvPr>
-            <p:ph type="title"/>
-          </p:nvPr>
-        </p:nvSpPr>
-        <p:spPr/>
-        <p:txBody>
-          <a:bodyPr/>
-          <a:lstStyle/>
-          <a:p>
-            <a:r>
-              <a:t>Objectifs pédagogiques</a:t>
-            </a:r>
-          </a:p>
-        </p:txBody>
-      </p:sp>
-      <p:sp>
-        <p:nvSpPr>
-          <p:cNvPr id="3" name="Content Placeholder 2"/>
-          <p:cNvSpPr>
-            <a:spLocks noGrp="1"/>
-          </p:cNvSpPr>
-          <p:nvPr>
-            <p:ph idx="1"/>
-          </p:nvPr>
-        </p:nvSpPr>
-        <p:spPr/>
-        <p:txBody>
-          <a:bodyPr/>
-          <a:lstStyle/>
-          <a:p>
-            <a:pPr>
-              <a:defRPr sz="2000"/>
-            </a:pPr>
-            <a:r>
-              <a:t>🎯 Maîtriser les notions du chapitre</a:t>
-            </a:r>
-          </a:p>
-          <a:p>
-            <a:pPr>
-              <a:defRPr sz="2000"/>
-            </a:pPr>
-            <a:r>
-              <a:t>🎯 Atelier poste informatique</a:t>
-            </a:r>
-          </a:p>
-          <a:p>
-            <a:pPr>
-              <a:defRPr sz="2000"/>
-            </a:pPr>
-            <a:r>
-              <a:t>🎯 Préparation TD et évaluation</a:t>
-            </a:r>
-          </a:p>
-          <a:p>
-            <a:pPr>
-              <a:defRPr sz="2000"/>
-            </a:pPr>
-            <a:r>
-              <a:t>🎯 Contexte Licence Langues</a:t>
-            </a:r>
-          </a:p>
-        </p:txBody>
-      </p:sp>
-      <p:sp>
-        <p:nvSpPr>
-          <p:cNvPr id="4" name="TextBox 3"/>
+          <p:cNvPr id="2" name="Rectangle 1"/>
+          <p:cNvSpPr/>
+          <p:nvPr/>
+        </p:nvSpPr>
+        <p:spPr>
+          <a:xfrm>
+            <a:off x="0" y="0"/>
+            <a:ext cx="109728" cy="6858000"/>
+          </a:xfrm>
+          <a:prstGeom prst="rect">
+            <a:avLst/>
+          </a:prstGeom>
+          <a:solidFill>
+            <a:srgbClr val="2C6E49"/>
+          </a:solidFill>
+          <a:ln>
+            <a:noFill/>
+          </a:ln>
+        </p:spPr>
+        <p:style>
+          <a:lnRef idx="1">
+            <a:schemeClr val="accent1"/>
+          </a:lnRef>
+          <a:fillRef idx="3">
+            <a:schemeClr val="accent1"/>
+          </a:fillRef>
+          <a:effectRef idx="2">
+            <a:schemeClr val="accent1"/>
+          </a:effectRef>
+          <a:fontRef idx="minor">
+            <a:schemeClr val="lt1"/>
+          </a:fontRef>
+        </p:style>
+        <p:txBody>
+          <a:bodyPr rtlCol="0" anchor="ctr"/>
+          <a:lstStyle/>
+          <a:p>
+            <a:pPr algn="ctr"/>
+          </a:p>
+        </p:txBody>
+      </p:sp>
+      <p:sp>
+        <p:nvSpPr>
+          <p:cNvPr id="3" name="TextBox 2"/>
           <p:cNvSpPr txBox="1"/>
           <p:nvPr/>
         </p:nvSpPr>
         <p:spPr>
           <a:xfrm>
-            <a:off x="365760" y="6446520"/>
-            <a:ext cx="8412480" cy="320040"/>
+            <a:off x="457200" y="365760"/>
+            <a:ext cx="8229600" cy="640080"/>
           </a:xfrm>
           <a:prstGeom prst="rect">
             <a:avLst/>
@@ -3753,20 +3578,115 @@
           <a:noFill/>
         </p:spPr>
         <p:txBody>
-          <a:bodyPr wrap="none">
+          <a:bodyPr wrap="square">
             <a:spAutoFit/>
           </a:bodyPr>
           <a:lstStyle/>
           <a:p>
-            <a:pPr algn="ctr">
-              <a:defRPr sz="900">
-                <a:solidFill>
-                  <a:srgbClr val="404040"/>
-                </a:solidFill>
-              </a:defRPr>
-            </a:pPr>
-            <a:r>
-              <a:t>Cours TIC 06  •  Diapositive 2/10</a:t>
+            <a:pPr algn="l">
+              <a:defRPr sz="2200" b="1">
+                <a:solidFill>
+                  <a:srgbClr val="1A5C33"/>
+                </a:solidFill>
+              </a:defRPr>
+            </a:pPr>
+            <a:r>
+              <a:t>Introduction — PowerPoint comme outil de recherche(10 min)</a:t>
+            </a:r>
+          </a:p>
+        </p:txBody>
+      </p:sp>
+      <p:sp>
+        <p:nvSpPr>
+          <p:cNvPr id="4" name="TextBox 3"/>
+          <p:cNvSpPr txBox="1"/>
+          <p:nvPr/>
+        </p:nvSpPr>
+        <p:spPr>
+          <a:xfrm>
+            <a:off x="457200" y="1371600"/>
+            <a:ext cx="7772400" cy="4572000"/>
+          </a:xfrm>
+          <a:prstGeom prst="rect">
+            <a:avLst/>
+          </a:prstGeom>
+          <a:noFill/>
+        </p:spPr>
+        <p:txBody>
+          <a:bodyPr wrap="square">
+            <a:spAutoFit/>
+          </a:bodyPr>
+          <a:lstStyle/>
+          <a:p>
+            <a:pPr>
+              <a:spcAft>
+                <a:spcPts val="600"/>
+              </a:spcAft>
+              <a:defRPr sz="1400">
+                <a:solidFill>
+                  <a:srgbClr val="222222"/>
+                </a:solidFill>
+              </a:defRPr>
+            </a:pPr>
+            <a:r>
+              <a:t>• PowerPointest l'outil de présentation de la suite Office. En Master, il ne s'agit plus seulement de montrer des informations, mais deconstruire un argument visuelau service de la démonstration scientifique.</a:t>
+            </a:r>
+          </a:p>
+          <a:p>
+            <a:pPr>
+              <a:spcAft>
+                <a:spcPts val="600"/>
+              </a:spcAft>
+              <a:defRPr sz="1400">
+                <a:solidFill>
+                  <a:srgbClr val="222222"/>
+                </a:solidFill>
+              </a:defRPr>
+            </a:pPr>
+            <a:r>
+              <a:t>• Spécificité Langue et Culture :présenter une analyse de corpus, une enquête de terrain, ou une synthèse théorique requiert une scénarisation particulière — intégration de données qualitatives (verbatim, extraits littéraires) et quantitatives (statistiques textuelles).</a:t>
+            </a:r>
+          </a:p>
+          <a:p>
+            <a:pPr>
+              <a:spcAft>
+                <a:spcPts val="600"/>
+              </a:spcAft>
+              <a:defRPr sz="1400">
+                <a:solidFill>
+                  <a:srgbClr val="222222"/>
+                </a:solidFill>
+              </a:defRPr>
+            </a:pPr>
+            <a:r>
+              <a:t>• Usages en Master :- Présentation de mémoire (soutenance)</a:t>
+            </a:r>
+            <a:br/>
+            <a:r>
+              <a:t>- Communication en colloque / journée d'étude</a:t>
+            </a:r>
+            <a:br/>
+            <a:r>
+              <a:t>- Séminaire de recherche (état d'avancement)</a:t>
+            </a:r>
+            <a:br/>
+            <a:r>
+              <a:t>- Poster scientifique (format différent, mais même logique de synthèse)</a:t>
+            </a:r>
+          </a:p>
+          <a:p>
+            <a:pPr>
+              <a:spcAft>
+                <a:spcPts val="600"/>
+              </a:spcAft>
+              <a:defRPr sz="1400">
+                <a:solidFill>
+                  <a:srgbClr val="222222"/>
+                </a:solidFill>
+              </a:defRPr>
+            </a:pPr>
+            <a:r>
+              <a:t>• Pourquoi le mode « recherche » ?Contrairement au monde professionnel, la présentation académique valorise latransparence méthodologiqueet ladiscussion des résultatsplus que la persuasion commerciale.</a:t>
             </a:r>
           </a:p>
         </p:txBody>
@@ -3776,15 +3696,20 @@
   <p:clrMapOvr>
     <a:masterClrMapping/>
   </p:clrMapOvr>
-  <p:transition spd="med">
-    <p:fade/>
-  </p:transition>
 </p:sld>
 </file>
 
-<file path=ppt/slides/slide3.xml><?xml version="1.0" encoding="utf-8"?>
+<file path=ppt/slides/slide12.xml><?xml version="1.0" encoding="utf-8"?>
 <p:sld xmlns:a="http://schemas.openxmlformats.org/drawingml/2006/main" xmlns:p="http://schemas.openxmlformats.org/presentationml/2006/main" xmlns:r="http://schemas.openxmlformats.org/officeDocument/2006/relationships">
   <p:cSld>
+    <p:bg>
+      <p:bgPr>
+        <a:solidFill>
+          <a:srgbClr val="FFFFFF"/>
+        </a:solidFill>
+        <a:effectLst/>
+      </p:bgPr>
+    </p:bg>
     <p:spTree>
       <p:nvGrpSpPr>
         <p:cNvPr id="1" name=""/>
@@ -3794,83 +3719,57 @@
       <p:grpSpPr/>
       <p:sp>
         <p:nvSpPr>
-          <p:cNvPr id="2" name="Title 1"/>
-          <p:cNvSpPr>
-            <a:spLocks noGrp="1"/>
-          </p:cNvSpPr>
-          <p:nvPr>
-            <p:ph type="title"/>
-          </p:nvPr>
-        </p:nvSpPr>
-        <p:spPr/>
-        <p:txBody>
-          <a:bodyPr/>
-          <a:lstStyle/>
-          <a:p>
-            <a:r>
-              <a:t>Plan du cours (1h30)</a:t>
-            </a:r>
-          </a:p>
-        </p:txBody>
-      </p:sp>
-      <p:sp>
-        <p:nvSpPr>
-          <p:cNvPr id="3" name="Content Placeholder 2"/>
-          <p:cNvSpPr>
-            <a:spLocks noGrp="1"/>
-          </p:cNvSpPr>
-          <p:nvPr>
-            <p:ph idx="1"/>
-          </p:nvPr>
-        </p:nvSpPr>
-        <p:spPr/>
-        <p:txBody>
-          <a:bodyPr/>
-          <a:lstStyle/>
-          <a:p>
-            <a:pPr>
-              <a:defRPr sz="2000"/>
-            </a:pPr>
-            <a:r>
-              <a:t>📋 8 parties — 90 min</a:t>
-            </a:r>
-          </a:p>
-          <a:p>
-            <a:pPr>
-              <a:defRPr sz="2000"/>
-            </a:pPr>
-            <a:r>
-              <a:t>📋 Introduction à PowerPoint</a:t>
-            </a:r>
-          </a:p>
-          <a:p>
-            <a:pPr>
-              <a:defRPr sz="2000"/>
-            </a:pPr>
-            <a:r>
-              <a:t>📋 Interface et modes d'affichage</a:t>
-            </a:r>
-          </a:p>
-          <a:p>
-            <a:pPr>
-              <a:defRPr sz="2000"/>
-            </a:pPr>
-            <a:r>
-              <a:t>📋 Architecture d'une présentation (10 slides)</a:t>
-            </a:r>
-          </a:p>
-        </p:txBody>
-      </p:sp>
-      <p:sp>
-        <p:nvSpPr>
-          <p:cNvPr id="4" name="TextBox 3"/>
+          <p:cNvPr id="2" name="Rectangle 1"/>
+          <p:cNvSpPr/>
+          <p:nvPr/>
+        </p:nvSpPr>
+        <p:spPr>
+          <a:xfrm>
+            <a:off x="0" y="0"/>
+            <a:ext cx="109728" cy="6858000"/>
+          </a:xfrm>
+          <a:prstGeom prst="rect">
+            <a:avLst/>
+          </a:prstGeom>
+          <a:solidFill>
+            <a:srgbClr val="2C6E49"/>
+          </a:solidFill>
+          <a:ln>
+            <a:noFill/>
+          </a:ln>
+        </p:spPr>
+        <p:style>
+          <a:lnRef idx="1">
+            <a:schemeClr val="accent1"/>
+          </a:lnRef>
+          <a:fillRef idx="3">
+            <a:schemeClr val="accent1"/>
+          </a:fillRef>
+          <a:effectRef idx="2">
+            <a:schemeClr val="accent1"/>
+          </a:effectRef>
+          <a:fontRef idx="minor">
+            <a:schemeClr val="lt1"/>
+          </a:fontRef>
+        </p:style>
+        <p:txBody>
+          <a:bodyPr rtlCol="0" anchor="ctr"/>
+          <a:lstStyle/>
+          <a:p>
+            <a:pPr algn="ctr"/>
+          </a:p>
+        </p:txBody>
+      </p:sp>
+      <p:sp>
+        <p:nvSpPr>
+          <p:cNvPr id="3" name="TextBox 2"/>
           <p:cNvSpPr txBox="1"/>
           <p:nvPr/>
         </p:nvSpPr>
         <p:spPr>
           <a:xfrm>
-            <a:off x="365760" y="6446520"/>
-            <a:ext cx="8412480" cy="320040"/>
+            <a:off x="457200" y="365760"/>
+            <a:ext cx="8229600" cy="640080"/>
           </a:xfrm>
           <a:prstGeom prst="rect">
             <a:avLst/>
@@ -3878,20 +3777,73 @@
           <a:noFill/>
         </p:spPr>
         <p:txBody>
-          <a:bodyPr wrap="none">
+          <a:bodyPr wrap="square">
             <a:spAutoFit/>
           </a:bodyPr>
           <a:lstStyle/>
           <a:p>
-            <a:pPr algn="ctr">
-              <a:defRPr sz="900">
-                <a:solidFill>
-                  <a:srgbClr val="404040"/>
-                </a:solidFill>
-              </a:defRPr>
-            </a:pPr>
-            <a:r>
-              <a:t>Cours TIC 06  •  Diapositive 3/10</a:t>
+            <a:pPr algn="l">
+              <a:defRPr sz="2200" b="1">
+                <a:solidFill>
+                  <a:srgbClr val="1A5C33"/>
+                </a:solidFill>
+              </a:defRPr>
+            </a:pPr>
+            <a:r>
+              <a:t>Interface avancée et modes d'affichage(10 min)</a:t>
+            </a:r>
+          </a:p>
+        </p:txBody>
+      </p:sp>
+      <p:sp>
+        <p:nvSpPr>
+          <p:cNvPr id="4" name="TextBox 3"/>
+          <p:cNvSpPr txBox="1"/>
+          <p:nvPr/>
+        </p:nvSpPr>
+        <p:spPr>
+          <a:xfrm>
+            <a:off x="457200" y="1371600"/>
+            <a:ext cx="7772400" cy="4572000"/>
+          </a:xfrm>
+          <a:prstGeom prst="rect">
+            <a:avLst/>
+          </a:prstGeom>
+          <a:noFill/>
+        </p:spPr>
+        <p:txBody>
+          <a:bodyPr wrap="square">
+            <a:spAutoFit/>
+          </a:bodyPr>
+          <a:lstStyle/>
+          <a:p>
+            <a:pPr>
+              <a:spcAft>
+                <a:spcPts val="600"/>
+              </a:spcAft>
+              <a:defRPr sz="1400">
+                <a:solidFill>
+                  <a:srgbClr val="222222"/>
+                </a:solidFill>
+              </a:defRPr>
+            </a:pPr>
+            <a:r>
+              <a:t>• Ruban contextualisé: chaque objet (image, graphique, tableau) fait apparaître un onglet supplémentaire (Format, Création de graphique, etc.).</a:t>
+            </a:r>
+          </a:p>
+          <a:p>
+            <a:pPr>
+              <a:spcAft>
+                <a:spcPts val="600"/>
+              </a:spcAft>
+              <a:defRPr sz="1400">
+                <a:solidFill>
+                  <a:srgbClr val="222222"/>
+                </a:solidFill>
+              </a:defRPr>
+            </a:pPr>
+            <a:r>
+              <a:t>• Raccourcis:F5(depuis début),Ctrl+F5(depuis slide active),B(écran noir = attention public),W(écran blanc).</a:t>
             </a:r>
           </a:p>
         </p:txBody>
@@ -3901,15 +3853,20 @@
   <p:clrMapOvr>
     <a:masterClrMapping/>
   </p:clrMapOvr>
-  <p:transition spd="med">
-    <p:fade/>
-  </p:transition>
 </p:sld>
 </file>
 
-<file path=ppt/slides/slide4.xml><?xml version="1.0" encoding="utf-8"?>
+<file path=ppt/slides/slide13.xml><?xml version="1.0" encoding="utf-8"?>
 <p:sld xmlns:a="http://schemas.openxmlformats.org/drawingml/2006/main" xmlns:p="http://schemas.openxmlformats.org/presentationml/2006/main" xmlns:r="http://schemas.openxmlformats.org/officeDocument/2006/relationships">
   <p:cSld>
+    <p:bg>
+      <p:bgPr>
+        <a:solidFill>
+          <a:srgbClr val="E8F0E9"/>
+        </a:solidFill>
+        <a:effectLst/>
+      </p:bgPr>
+    </p:bg>
     <p:spTree>
       <p:nvGrpSpPr>
         <p:cNvPr id="1" name=""/>
@@ -3919,83 +3876,14 @@
       <p:grpSpPr/>
       <p:sp>
         <p:nvSpPr>
-          <p:cNvPr id="2" name="Title 1"/>
-          <p:cNvSpPr>
-            <a:spLocks noGrp="1"/>
-          </p:cNvSpPr>
-          <p:nvPr>
-            <p:ph type="title"/>
-          </p:nvPr>
-        </p:nvSpPr>
-        <p:spPr/>
-        <p:txBody>
-          <a:bodyPr/>
-          <a:lstStyle/>
-          <a:p>
-            <a:r>
-              <a:t>Introduction à PowerPoint</a:t>
-            </a:r>
-          </a:p>
-        </p:txBody>
-      </p:sp>
-      <p:sp>
-        <p:nvSpPr>
-          <p:cNvPr id="3" name="Content Placeholder 2"/>
-          <p:cNvSpPr>
-            <a:spLocks noGrp="1"/>
-          </p:cNvSpPr>
-          <p:nvPr>
-            <p:ph idx="1"/>
-          </p:nvPr>
-        </p:nvSpPr>
-        <p:spPr/>
-        <p:txBody>
-          <a:bodyPr/>
-          <a:lstStyle/>
-          <a:p>
-            <a:pPr>
-              <a:defRPr sz="2000"/>
-            </a:pPr>
-            <a:r>
-              <a:t>💡 Points clés polycopié</a:t>
-            </a:r>
-          </a:p>
-          <a:p>
-            <a:pPr>
-              <a:defRPr sz="2000"/>
-            </a:pPr>
-            <a:r>
-              <a:t>💡 Exemples universitaires</a:t>
-            </a:r>
-          </a:p>
-          <a:p>
-            <a:pPr>
-              <a:defRPr sz="2000"/>
-            </a:pPr>
-            <a:r>
-              <a:t>💡 Démonstration guidée</a:t>
-            </a:r>
-          </a:p>
-          <a:p>
-            <a:pPr>
-              <a:defRPr sz="2000"/>
-            </a:pPr>
-            <a:r>
-              <a:t>💡 Questions</a:t>
-            </a:r>
-          </a:p>
-        </p:txBody>
-      </p:sp>
-      <p:sp>
-        <p:nvSpPr>
-          <p:cNvPr id="4" name="TextBox 3"/>
+          <p:cNvPr id="2" name="TextBox 1"/>
           <p:cNvSpPr txBox="1"/>
           <p:nvPr/>
         </p:nvSpPr>
         <p:spPr>
           <a:xfrm>
-            <a:off x="365760" y="6446520"/>
-            <a:ext cx="8412480" cy="320040"/>
+            <a:off x="548640" y="365760"/>
+            <a:ext cx="7772400" cy="640080"/>
           </a:xfrm>
           <a:prstGeom prst="rect">
             <a:avLst/>
@@ -4003,20 +3891,126 @@
           <a:noFill/>
         </p:spPr>
         <p:txBody>
-          <a:bodyPr wrap="none">
+          <a:bodyPr wrap="square">
             <a:spAutoFit/>
           </a:bodyPr>
           <a:lstStyle/>
           <a:p>
             <a:pPr algn="ctr">
-              <a:defRPr sz="900">
-                <a:solidFill>
-                  <a:srgbClr val="404040"/>
-                </a:solidFill>
-              </a:defRPr>
-            </a:pPr>
-            <a:r>
-              <a:t>Cours TIC 06  •  Diapositive 4/10</a:t>
+              <a:defRPr sz="2600" b="1">
+                <a:solidFill>
+                  <a:srgbClr val="1A5C33"/>
+                </a:solidFill>
+              </a:defRPr>
+            </a:pPr>
+            <a:r>
+              <a:t>📝 Points clés à retenir</a:t>
+            </a:r>
+          </a:p>
+        </p:txBody>
+      </p:sp>
+      <p:sp>
+        <p:nvSpPr>
+          <p:cNvPr id="3" name="TextBox 2"/>
+          <p:cNvSpPr txBox="1"/>
+          <p:nvPr/>
+        </p:nvSpPr>
+        <p:spPr>
+          <a:xfrm>
+            <a:off x="548640" y="1828800"/>
+            <a:ext cx="7772400" cy="4572000"/>
+          </a:xfrm>
+          <a:prstGeom prst="rect">
+            <a:avLst/>
+          </a:prstGeom>
+          <a:noFill/>
+        </p:spPr>
+        <p:txBody>
+          <a:bodyPr wrap="square">
+            <a:spAutoFit/>
+          </a:bodyPr>
+          <a:lstStyle/>
+          <a:p>
+            <a:pPr>
+              <a:spcAft>
+                <a:spcPts val="600"/>
+              </a:spcAft>
+              <a:defRPr sz="1600">
+                <a:solidFill>
+                  <a:srgbClr val="222222"/>
+                </a:solidFill>
+              </a:defRPr>
+            </a:pPr>
+            <a:r>
+              <a:t>• Référentiel :titres et structure alignés sur Canvas Univ-Mosta (elearning.univ-usto.dz) ; bonnes pratiques benchmark 10 universités algériennes (voirBENCHMARK_10_UNIVERSITES_ELEARNING.md).</a:t>
+            </a:r>
+          </a:p>
+          <a:p>
+            <a:pPr>
+              <a:spcAft>
+                <a:spcPts val="600"/>
+              </a:spcAft>
+              <a:defRPr sz="1600">
+                <a:solidFill>
+                  <a:srgbClr val="222222"/>
+                </a:solidFill>
+              </a:defRPr>
+            </a:pPr>
+            <a:r>
+              <a:t>• En termes de savoir :- Structurer une soutenance ou communication scientifique (12–15 slides)</a:t>
+            </a:r>
+            <a:br/>
+            <a:r>
+              <a:t>- Distinguer transition, animation, et principes de data visualisation</a:t>
+            </a:r>
+            <a:br/>
+            <a:r>
+              <a:t>- Connaître les normes typographiques et chartes graphiques institutionnelles</a:t>
+            </a:r>
+          </a:p>
+          <a:p>
+            <a:pPr>
+              <a:spcAft>
+                <a:spcPts val="600"/>
+              </a:spcAft>
+              <a:defRPr sz="1600">
+                <a:solidFill>
+                  <a:srgbClr val="222222"/>
+                </a:solidFill>
+              </a:defRPr>
+            </a:pPr>
+            <a:r>
+              <a:t>• Création d'un diaporama de 10 slides sur un sujet de recherche en langue/culture</a:t>
+            </a:r>
+          </a:p>
+          <a:p>
+            <a:pPr>
+              <a:spcAft>
+                <a:spcPts val="600"/>
+              </a:spcAft>
+              <a:defRPr sz="1600">
+                <a:solidFill>
+                  <a:srgbClr val="222222"/>
+                </a:solidFill>
+              </a:defRPr>
+            </a:pPr>
+            <a:r>
+              <a:t>• Simulation de communication scientifique (10 min exposé + 5 min questions)</a:t>
+            </a:r>
+          </a:p>
+          <a:p>
+            <a:pPr>
+              <a:spcAft>
+                <a:spcPts val="600"/>
+              </a:spcAft>
+              <a:defRPr sz="1600">
+                <a:solidFill>
+                  <a:srgbClr val="222222"/>
+                </a:solidFill>
+              </a:defRPr>
+            </a:pPr>
+            <a:r>
+              <a:t>• TemplatePresentation_BELACEL_V3.pptx; règle 6×6 (ENS/M'sila)</a:t>
             </a:r>
           </a:p>
         </p:txBody>
@@ -4026,15 +4020,20 @@
   <p:clrMapOvr>
     <a:masterClrMapping/>
   </p:clrMapOvr>
-  <p:transition spd="med">
-    <p:fade/>
-  </p:transition>
 </p:sld>
 </file>
 
-<file path=ppt/slides/slide5.xml><?xml version="1.0" encoding="utf-8"?>
+<file path=ppt/slides/slide14.xml><?xml version="1.0" encoding="utf-8"?>
 <p:sld xmlns:a="http://schemas.openxmlformats.org/drawingml/2006/main" xmlns:p="http://schemas.openxmlformats.org/presentationml/2006/main" xmlns:r="http://schemas.openxmlformats.org/officeDocument/2006/relationships">
   <p:cSld>
+    <p:bg>
+      <p:bgPr>
+        <a:solidFill>
+          <a:srgbClr val="FFFFFF"/>
+        </a:solidFill>
+        <a:effectLst/>
+      </p:bgPr>
+    </p:bg>
     <p:spTree>
       <p:nvGrpSpPr>
         <p:cNvPr id="1" name=""/>
@@ -4044,83 +4043,14 @@
       <p:grpSpPr/>
       <p:sp>
         <p:nvSpPr>
-          <p:cNvPr id="2" name="Title 1"/>
-          <p:cNvSpPr>
-            <a:spLocks noGrp="1"/>
-          </p:cNvSpPr>
-          <p:nvPr>
-            <p:ph type="title"/>
-          </p:nvPr>
-        </p:nvSpPr>
-        <p:spPr/>
-        <p:txBody>
-          <a:bodyPr/>
-          <a:lstStyle/>
-          <a:p>
-            <a:r>
-              <a:t>Interface et modes d'affichage</a:t>
-            </a:r>
-          </a:p>
-        </p:txBody>
-      </p:sp>
-      <p:sp>
-        <p:nvSpPr>
-          <p:cNvPr id="3" name="Content Placeholder 2"/>
-          <p:cNvSpPr>
-            <a:spLocks noGrp="1"/>
-          </p:cNvSpPr>
-          <p:nvPr>
-            <p:ph idx="1"/>
-          </p:nvPr>
-        </p:nvSpPr>
-        <p:spPr/>
-        <p:txBody>
-          <a:bodyPr/>
-          <a:lstStyle/>
-          <a:p>
-            <a:pPr>
-              <a:defRPr sz="2000"/>
-            </a:pPr>
-            <a:r>
-              <a:t>📖 Points clés polycopié</a:t>
-            </a:r>
-          </a:p>
-          <a:p>
-            <a:pPr>
-              <a:defRPr sz="2000"/>
-            </a:pPr>
-            <a:r>
-              <a:t>📖 Exemples universitaires</a:t>
-            </a:r>
-          </a:p>
-          <a:p>
-            <a:pPr>
-              <a:defRPr sz="2000"/>
-            </a:pPr>
-            <a:r>
-              <a:t>📖 Démonstration guidée</a:t>
-            </a:r>
-          </a:p>
-          <a:p>
-            <a:pPr>
-              <a:defRPr sz="2000"/>
-            </a:pPr>
-            <a:r>
-              <a:t>📖 Questions</a:t>
-            </a:r>
-          </a:p>
-        </p:txBody>
-      </p:sp>
-      <p:sp>
-        <p:nvSpPr>
-          <p:cNvPr id="4" name="TextBox 3"/>
+          <p:cNvPr id="2" name="TextBox 1"/>
           <p:cNvSpPr txBox="1"/>
           <p:nvPr/>
         </p:nvSpPr>
         <p:spPr>
           <a:xfrm>
-            <a:off x="365760" y="6446520"/>
-            <a:ext cx="8412480" cy="320040"/>
+            <a:off x="548640" y="365760"/>
+            <a:ext cx="7772400" cy="640080"/>
           </a:xfrm>
           <a:prstGeom prst="rect">
             <a:avLst/>
@@ -4128,20 +4058,118 @@
           <a:noFill/>
         </p:spPr>
         <p:txBody>
-          <a:bodyPr wrap="none">
+          <a:bodyPr wrap="square">
             <a:spAutoFit/>
           </a:bodyPr>
           <a:lstStyle/>
           <a:p>
             <a:pPr algn="ctr">
-              <a:defRPr sz="900">
-                <a:solidFill>
-                  <a:srgbClr val="404040"/>
-                </a:solidFill>
-              </a:defRPr>
-            </a:pPr>
-            <a:r>
-              <a:t>Cours TIC 06  •  Diapositive 5/10</a:t>
+              <a:defRPr sz="2600" b="1">
+                <a:solidFill>
+                  <a:srgbClr val="1A5C33"/>
+                </a:solidFill>
+              </a:defRPr>
+            </a:pPr>
+            <a:r>
+              <a:t>✏️ Exercices d'application</a:t>
+            </a:r>
+          </a:p>
+        </p:txBody>
+      </p:sp>
+      <p:sp>
+        <p:nvSpPr>
+          <p:cNvPr id="3" name="TextBox 2"/>
+          <p:cNvSpPr txBox="1"/>
+          <p:nvPr/>
+        </p:nvSpPr>
+        <p:spPr>
+          <a:xfrm>
+            <a:off x="548640" y="1828800"/>
+            <a:ext cx="7772400" cy="4572000"/>
+          </a:xfrm>
+          <a:prstGeom prst="rect">
+            <a:avLst/>
+          </a:prstGeom>
+          <a:noFill/>
+        </p:spPr>
+        <p:txBody>
+          <a:bodyPr wrap="square">
+            <a:spAutoFit/>
+          </a:bodyPr>
+          <a:lstStyle/>
+          <a:p>
+            <a:pPr>
+              <a:spcAft>
+                <a:spcPts val="600"/>
+              </a:spcAft>
+              <a:defRPr sz="1500">
+                <a:solidFill>
+                  <a:srgbClr val="222222"/>
+                </a:solidFill>
+              </a:defRPr>
+            </a:pPr>
+            <a:r>
+              <a:t>• Définir les concepts principaux du cours</a:t>
+            </a:r>
+          </a:p>
+          <a:p>
+            <a:pPr>
+              <a:spcAft>
+                <a:spcPts val="600"/>
+              </a:spcAft>
+              <a:defRPr sz="1500">
+                <a:solidFill>
+                  <a:srgbClr val="222222"/>
+                </a:solidFill>
+              </a:defRPr>
+            </a:pPr>
+            <a:r>
+              <a:t>• Identifier les applications pratiques</a:t>
+            </a:r>
+          </a:p>
+          <a:p>
+            <a:pPr>
+              <a:spcAft>
+                <a:spcPts val="600"/>
+              </a:spcAft>
+              <a:defRPr sz="1500">
+                <a:solidFill>
+                  <a:srgbClr val="222222"/>
+                </a:solidFill>
+              </a:defRPr>
+            </a:pPr>
+            <a:r>
+              <a:t>• Résoudre les exercices du TD</a:t>
+            </a:r>
+          </a:p>
+          <a:p>
+            <a:pPr>
+              <a:spcAft>
+                <a:spcPts val="600"/>
+              </a:spcAft>
+              <a:defRPr sz="1500">
+                <a:solidFill>
+                  <a:srgbClr val="222222"/>
+                </a:solidFill>
+              </a:defRPr>
+            </a:pPr>
+            <a:r>
+              <a:t>• Synthétiser les points clés en un paragraphe</a:t>
+            </a:r>
+          </a:p>
+          <a:p>
+            <a:pPr>
+              <a:spcAft>
+                <a:spcPts val="600"/>
+              </a:spcAft>
+              <a:defRPr sz="1500">
+                <a:solidFill>
+                  <a:srgbClr val="222222"/>
+                </a:solidFill>
+              </a:defRPr>
+            </a:pPr>
+            <a:r>
+              <a:t>• Préparer une courte présentation orale</a:t>
             </a:r>
           </a:p>
         </p:txBody>
@@ -4151,15 +4179,20 @@
   <p:clrMapOvr>
     <a:masterClrMapping/>
   </p:clrMapOvr>
-  <p:transition spd="med">
-    <p:fade/>
-  </p:transition>
 </p:sld>
 </file>
 
-<file path=ppt/slides/slide6.xml><?xml version="1.0" encoding="utf-8"?>
+<file path=ppt/slides/slide15.xml><?xml version="1.0" encoding="utf-8"?>
 <p:sld xmlns:a="http://schemas.openxmlformats.org/drawingml/2006/main" xmlns:p="http://schemas.openxmlformats.org/presentationml/2006/main" xmlns:r="http://schemas.openxmlformats.org/officeDocument/2006/relationships">
   <p:cSld>
+    <p:bg>
+      <p:bgPr>
+        <a:solidFill>
+          <a:srgbClr val="1A5C33"/>
+        </a:solidFill>
+        <a:effectLst/>
+      </p:bgPr>
+    </p:bg>
     <p:spTree>
       <p:nvGrpSpPr>
         <p:cNvPr id="1" name=""/>
@@ -4169,83 +4202,14 @@
       <p:grpSpPr/>
       <p:sp>
         <p:nvSpPr>
-          <p:cNvPr id="2" name="Title 1"/>
-          <p:cNvSpPr>
-            <a:spLocks noGrp="1"/>
-          </p:cNvSpPr>
-          <p:nvPr>
-            <p:ph type="title"/>
-          </p:nvPr>
-        </p:nvSpPr>
-        <p:spPr/>
-        <p:txBody>
-          <a:bodyPr/>
-          <a:lstStyle/>
-          <a:p>
-            <a:r>
-              <a:t>Architecture d'une présentation (10 slides)</a:t>
-            </a:r>
-          </a:p>
-        </p:txBody>
-      </p:sp>
-      <p:sp>
-        <p:nvSpPr>
-          <p:cNvPr id="3" name="Content Placeholder 2"/>
-          <p:cNvSpPr>
-            <a:spLocks noGrp="1"/>
-          </p:cNvSpPr>
-          <p:nvPr>
-            <p:ph idx="1"/>
-          </p:nvPr>
-        </p:nvSpPr>
-        <p:spPr/>
-        <p:txBody>
-          <a:bodyPr/>
-          <a:lstStyle/>
-          <a:p>
-            <a:pPr>
-              <a:defRPr sz="2000"/>
-            </a:pPr>
-            <a:r>
-              <a:t>🌐 Points clés polycopié</a:t>
-            </a:r>
-          </a:p>
-          <a:p>
-            <a:pPr>
-              <a:defRPr sz="2000"/>
-            </a:pPr>
-            <a:r>
-              <a:t>🌐 Exemples universitaires</a:t>
-            </a:r>
-          </a:p>
-          <a:p>
-            <a:pPr>
-              <a:defRPr sz="2000"/>
-            </a:pPr>
-            <a:r>
-              <a:t>🌐 Démonstration guidée</a:t>
-            </a:r>
-          </a:p>
-          <a:p>
-            <a:pPr>
-              <a:defRPr sz="2000"/>
-            </a:pPr>
-            <a:r>
-              <a:t>🌐 Questions</a:t>
-            </a:r>
-          </a:p>
-        </p:txBody>
-      </p:sp>
-      <p:sp>
-        <p:nvSpPr>
-          <p:cNvPr id="4" name="TextBox 3"/>
+          <p:cNvPr id="2" name="TextBox 1"/>
           <p:cNvSpPr txBox="1"/>
           <p:nvPr/>
         </p:nvSpPr>
         <p:spPr>
           <a:xfrm>
-            <a:off x="365760" y="6446520"/>
-            <a:ext cx="8412480" cy="320040"/>
+            <a:off x="731520" y="1371600"/>
+            <a:ext cx="7680960" cy="914400"/>
           </a:xfrm>
           <a:prstGeom prst="rect">
             <a:avLst/>
@@ -4253,20 +4217,67 @@
           <a:noFill/>
         </p:spPr>
         <p:txBody>
-          <a:bodyPr wrap="none">
+          <a:bodyPr wrap="square">
             <a:spAutoFit/>
           </a:bodyPr>
           <a:lstStyle/>
           <a:p>
             <a:pPr algn="ctr">
-              <a:defRPr sz="900">
-                <a:solidFill>
-                  <a:srgbClr val="404040"/>
-                </a:solidFill>
-              </a:defRPr>
-            </a:pPr>
-            <a:r>
-              <a:t>Cours TIC 06  •  Diapositive 6/10</a:t>
+              <a:defRPr sz="2800" b="1">
+                <a:solidFill>
+                  <a:srgbClr val="FFFFFF"/>
+                </a:solidFill>
+              </a:defRPr>
+            </a:pPr>
+            <a:r>
+              <a:t>🎓 Conclusion</a:t>
+            </a:r>
+          </a:p>
+        </p:txBody>
+      </p:sp>
+      <p:sp>
+        <p:nvSpPr>
+          <p:cNvPr id="3" name="TextBox 2"/>
+          <p:cNvSpPr txBox="1"/>
+          <p:nvPr/>
+        </p:nvSpPr>
+        <p:spPr>
+          <a:xfrm>
+            <a:off x="731520" y="2743200"/>
+            <a:ext cx="7680960" cy="1828800"/>
+          </a:xfrm>
+          <a:prstGeom prst="rect">
+            <a:avLst/>
+          </a:prstGeom>
+          <a:noFill/>
+        </p:spPr>
+        <p:txBody>
+          <a:bodyPr wrap="square">
+            <a:spAutoFit/>
+          </a:bodyPr>
+          <a:lstStyle/>
+          <a:p>
+            <a:pPr algn="ctr">
+              <a:defRPr sz="1800" b="0">
+                <a:solidFill>
+                  <a:srgbClr val="C5D9C7"/>
+                </a:solidFill>
+              </a:defRPr>
+            </a:pPr>
+            <a:r>
+              <a:t>Dr. BELACEL Madani</a:t>
+            </a:r>
+            <a:br/>
+            <a:r>
+              <a:t>Maître de Conférences B</a:t>
+            </a:r>
+            <a:br/>
+            <a:r>
+              <a:t>Université de Mostaganem</a:t>
+            </a:r>
+            <a:br/>
+            <a:r>
+              <a:t>madani.belacel@univ-mosta.dz</a:t>
             </a:r>
           </a:p>
         </p:txBody>
@@ -4276,15 +4287,20 @@
   <p:clrMapOvr>
     <a:masterClrMapping/>
   </p:clrMapOvr>
-  <p:transition spd="med">
-    <p:fade/>
-  </p:transition>
 </p:sld>
 </file>
 
-<file path=ppt/slides/slide7.xml><?xml version="1.0" encoding="utf-8"?>
+<file path=ppt/slides/slide2.xml><?xml version="1.0" encoding="utf-8"?>
 <p:sld xmlns:a="http://schemas.openxmlformats.org/drawingml/2006/main" xmlns:p="http://schemas.openxmlformats.org/presentationml/2006/main" xmlns:r="http://schemas.openxmlformats.org/officeDocument/2006/relationships">
   <p:cSld>
+    <p:bg>
+      <p:bgPr>
+        <a:solidFill>
+          <a:srgbClr val="FFFFFF"/>
+        </a:solidFill>
+        <a:effectLst/>
+      </p:bgPr>
+    </p:bg>
     <p:spTree>
       <p:nvGrpSpPr>
         <p:cNvPr id="1" name=""/>
@@ -4294,83 +4310,14 @@
       <p:grpSpPr/>
       <p:sp>
         <p:nvSpPr>
-          <p:cNvPr id="2" name="Title 1"/>
-          <p:cNvSpPr>
-            <a:spLocks noGrp="1"/>
-          </p:cNvSpPr>
-          <p:nvPr>
-            <p:ph type="title"/>
-          </p:nvPr>
-        </p:nvSpPr>
-        <p:spPr/>
-        <p:txBody>
-          <a:bodyPr/>
-          <a:lstStyle/>
-          <a:p>
-            <a:r>
-              <a:t>Design professionnel et template</a:t>
-            </a:r>
-          </a:p>
-        </p:txBody>
-      </p:sp>
-      <p:sp>
-        <p:nvSpPr>
-          <p:cNvPr id="3" name="Content Placeholder 2"/>
-          <p:cNvSpPr>
-            <a:spLocks noGrp="1"/>
-          </p:cNvSpPr>
-          <p:nvPr>
-            <p:ph idx="1"/>
-          </p:nvPr>
-        </p:nvSpPr>
-        <p:spPr/>
-        <p:txBody>
-          <a:bodyPr/>
-          <a:lstStyle/>
-          <a:p>
-            <a:pPr>
-              <a:defRPr sz="2000"/>
-            </a:pPr>
-            <a:r>
-              <a:t>🔗 Points clés polycopié</a:t>
-            </a:r>
-          </a:p>
-          <a:p>
-            <a:pPr>
-              <a:defRPr sz="2000"/>
-            </a:pPr>
-            <a:r>
-              <a:t>🔗 Exemples universitaires</a:t>
-            </a:r>
-          </a:p>
-          <a:p>
-            <a:pPr>
-              <a:defRPr sz="2000"/>
-            </a:pPr>
-            <a:r>
-              <a:t>🔗 Démonstration guidée</a:t>
-            </a:r>
-          </a:p>
-          <a:p>
-            <a:pPr>
-              <a:defRPr sz="2000"/>
-            </a:pPr>
-            <a:r>
-              <a:t>🔗 Questions</a:t>
-            </a:r>
-          </a:p>
-        </p:txBody>
-      </p:sp>
-      <p:sp>
-        <p:nvSpPr>
-          <p:cNvPr id="4" name="TextBox 3"/>
+          <p:cNvPr id="2" name="TextBox 1"/>
           <p:cNvSpPr txBox="1"/>
           <p:nvPr/>
         </p:nvSpPr>
         <p:spPr>
           <a:xfrm>
-            <a:off x="365760" y="6446520"/>
-            <a:ext cx="8412480" cy="320040"/>
+            <a:off x="548640" y="365760"/>
+            <a:ext cx="7772400" cy="640080"/>
           </a:xfrm>
           <a:prstGeom prst="rect">
             <a:avLst/>
@@ -4378,20 +4325,127 @@
           <a:noFill/>
         </p:spPr>
         <p:txBody>
-          <a:bodyPr wrap="none">
+          <a:bodyPr wrap="square">
             <a:spAutoFit/>
           </a:bodyPr>
           <a:lstStyle/>
           <a:p>
-            <a:pPr algn="ctr">
-              <a:defRPr sz="900">
-                <a:solidFill>
-                  <a:srgbClr val="404040"/>
-                </a:solidFill>
-              </a:defRPr>
-            </a:pPr>
-            <a:r>
-              <a:t>Cours TIC 06  •  Diapositive 7/10</a:t>
+            <a:pPr algn="l">
+              <a:defRPr sz="2600" b="1">
+                <a:solidFill>
+                  <a:srgbClr val="1A5C33"/>
+                </a:solidFill>
+              </a:defRPr>
+            </a:pPr>
+            <a:r>
+              <a:t>🎯 Objectifs pédagogiques</a:t>
+            </a:r>
+          </a:p>
+        </p:txBody>
+      </p:sp>
+      <p:sp>
+        <p:nvSpPr>
+          <p:cNvPr id="3" name="TextBox 2"/>
+          <p:cNvSpPr txBox="1"/>
+          <p:nvPr/>
+        </p:nvSpPr>
+        <p:spPr>
+          <a:xfrm>
+            <a:off x="548640" y="1828800"/>
+            <a:ext cx="7772400" cy="4572000"/>
+          </a:xfrm>
+          <a:prstGeom prst="rect">
+            <a:avLst/>
+          </a:prstGeom>
+          <a:noFill/>
+        </p:spPr>
+        <p:txBody>
+          <a:bodyPr wrap="square">
+            <a:spAutoFit/>
+          </a:bodyPr>
+          <a:lstStyle/>
+          <a:p>
+            <a:pPr>
+              <a:spcAft>
+                <a:spcPts val="600"/>
+              </a:spcAft>
+              <a:defRPr sz="1500">
+                <a:solidFill>
+                  <a:srgbClr val="222222"/>
+                </a:solidFill>
+              </a:defRPr>
+            </a:pPr>
+            <a:r>
+              <a:t>• En termes de savoir :- Structurer une soutenance ou communication scientifique (12–15 slides)</a:t>
+            </a:r>
+            <a:br/>
+            <a:r>
+              <a:t>- Distinguer transition, animation, et principes de data visualisation</a:t>
+            </a:r>
+            <a:br/>
+            <a:r>
+              <a:t>- Connaître les normes typographiques et chartes graphiques institutionnelles</a:t>
+            </a:r>
+          </a:p>
+          <a:p>
+            <a:pPr>
+              <a:spcAft>
+                <a:spcPts val="600"/>
+              </a:spcAft>
+              <a:defRPr sz="1500">
+                <a:solidFill>
+                  <a:srgbClr val="222222"/>
+                </a:solidFill>
+              </a:defRPr>
+            </a:pPr>
+            <a:r>
+              <a:t>• En termes de savoir-faire :- Créer une présentation académique avec template institutionnel</a:t>
+            </a:r>
+            <a:br/>
+            <a:r>
+              <a:t>- Exporter PDF, PPTX, et vidéo pour dépôt sur HAL ou archive ouverte</a:t>
+            </a:r>
+            <a:br/>
+            <a:r>
+              <a:t>- Appliquer les principes de visualisation des données (graphiques, tableaux, nuages de mots)</a:t>
+            </a:r>
+            <a:br/>
+            <a:r>
+              <a:t>- Utiliser le mode présentateur, le pointeur laser, le chronométrage</a:t>
+            </a:r>
+          </a:p>
+          <a:p>
+            <a:pPr>
+              <a:spcAft>
+                <a:spcPts val="600"/>
+              </a:spcAft>
+              <a:defRPr sz="1500">
+                <a:solidFill>
+                  <a:srgbClr val="222222"/>
+                </a:solidFill>
+              </a:defRPr>
+            </a:pPr>
+            <a:r>
+              <a:t>• En termes de savoir-être :- Communication scientifique claire, registre formel, gestion du temps</a:t>
+            </a:r>
+            <a:br/>
+            <a:r>
+              <a:t>- Réception constructive des questions du jury/public</a:t>
+            </a:r>
+          </a:p>
+          <a:p>
+            <a:pPr>
+              <a:spcAft>
+                <a:spcPts val="600"/>
+              </a:spcAft>
+              <a:defRPr sz="1500">
+                <a:solidFill>
+                  <a:srgbClr val="222222"/>
+                </a:solidFill>
+              </a:defRPr>
+            </a:pPr>
+            <a:r>
+              <a:t>• Mode d'évaluation :TD 20 % + Présentation orale (simulation soutenance) 50 % + QCM 30 %</a:t>
             </a:r>
           </a:p>
         </p:txBody>
@@ -4401,15 +4455,20 @@
   <p:clrMapOvr>
     <a:masterClrMapping/>
   </p:clrMapOvr>
-  <p:transition spd="med">
-    <p:fade/>
-  </p:transition>
 </p:sld>
 </file>
 
-<file path=ppt/slides/slide8.xml><?xml version="1.0" encoding="utf-8"?>
+<file path=ppt/slides/slide3.xml><?xml version="1.0" encoding="utf-8"?>
 <p:sld xmlns:a="http://schemas.openxmlformats.org/drawingml/2006/main" xmlns:p="http://schemas.openxmlformats.org/presentationml/2006/main" xmlns:r="http://schemas.openxmlformats.org/officeDocument/2006/relationships">
   <p:cSld>
+    <p:bg>
+      <p:bgPr>
+        <a:solidFill>
+          <a:srgbClr val="FFFFFF"/>
+        </a:solidFill>
+        <a:effectLst/>
+      </p:bgPr>
+    </p:bg>
     <p:spTree>
       <p:nvGrpSpPr>
         <p:cNvPr id="1" name=""/>
@@ -4419,83 +4478,14 @@
       <p:grpSpPr/>
       <p:sp>
         <p:nvSpPr>
-          <p:cNvPr id="2" name="Title 1"/>
-          <p:cNvSpPr>
-            <a:spLocks noGrp="1"/>
-          </p:cNvSpPr>
-          <p:nvPr>
-            <p:ph type="title"/>
-          </p:nvPr>
-        </p:nvSpPr>
-        <p:spPr/>
-        <p:txBody>
-          <a:bodyPr/>
-          <a:lstStyle/>
-          <a:p>
-            <a:r>
-              <a:t>Transitions et animations</a:t>
-            </a:r>
-          </a:p>
-        </p:txBody>
-      </p:sp>
-      <p:sp>
-        <p:nvSpPr>
-          <p:cNvPr id="3" name="Content Placeholder 2"/>
-          <p:cNvSpPr>
-            <a:spLocks noGrp="1"/>
-          </p:cNvSpPr>
-          <p:nvPr>
-            <p:ph idx="1"/>
-          </p:nvPr>
-        </p:nvSpPr>
-        <p:spPr/>
-        <p:txBody>
-          <a:bodyPr/>
-          <a:lstStyle/>
-          <a:p>
-            <a:pPr>
-              <a:defRPr sz="2000"/>
-            </a:pPr>
-            <a:r>
-              <a:t>📡 Points clés polycopié</a:t>
-            </a:r>
-          </a:p>
-          <a:p>
-            <a:pPr>
-              <a:defRPr sz="2000"/>
-            </a:pPr>
-            <a:r>
-              <a:t>📡 Exemples universitaires</a:t>
-            </a:r>
-          </a:p>
-          <a:p>
-            <a:pPr>
-              <a:defRPr sz="2000"/>
-            </a:pPr>
-            <a:r>
-              <a:t>📡 Démonstration guidée</a:t>
-            </a:r>
-          </a:p>
-          <a:p>
-            <a:pPr>
-              <a:defRPr sz="2000"/>
-            </a:pPr>
-            <a:r>
-              <a:t>📡 Questions</a:t>
-            </a:r>
-          </a:p>
-        </p:txBody>
-      </p:sp>
-      <p:sp>
-        <p:nvSpPr>
-          <p:cNvPr id="4" name="TextBox 3"/>
+          <p:cNvPr id="2" name="TextBox 1"/>
           <p:cNvSpPr txBox="1"/>
           <p:nvPr/>
         </p:nvSpPr>
         <p:spPr>
           <a:xfrm>
-            <a:off x="365760" y="6446520"/>
-            <a:ext cx="8412480" cy="320040"/>
+            <a:off x="548640" y="365760"/>
+            <a:ext cx="7772400" cy="640080"/>
           </a:xfrm>
           <a:prstGeom prst="rect">
             <a:avLst/>
@@ -4503,20 +4493,193 @@
           <a:noFill/>
         </p:spPr>
         <p:txBody>
-          <a:bodyPr wrap="none">
+          <a:bodyPr wrap="square">
             <a:spAutoFit/>
           </a:bodyPr>
           <a:lstStyle/>
           <a:p>
-            <a:pPr algn="ctr">
-              <a:defRPr sz="900">
-                <a:solidFill>
-                  <a:srgbClr val="404040"/>
-                </a:solidFill>
-              </a:defRPr>
-            </a:pPr>
-            <a:r>
-              <a:t>Cours TIC 06  •  Diapositive 8/10</a:t>
+            <a:pPr algn="l">
+              <a:defRPr sz="2600" b="1">
+                <a:solidFill>
+                  <a:srgbClr val="1A5C33"/>
+                </a:solidFill>
+              </a:defRPr>
+            </a:pPr>
+            <a:r>
+              <a:t>📋 Plan du cours</a:t>
+            </a:r>
+          </a:p>
+        </p:txBody>
+      </p:sp>
+      <p:sp>
+        <p:nvSpPr>
+          <p:cNvPr id="3" name="TextBox 2"/>
+          <p:cNvSpPr txBox="1"/>
+          <p:nvPr/>
+        </p:nvSpPr>
+        <p:spPr>
+          <a:xfrm>
+            <a:off x="548640" y="1828800"/>
+            <a:ext cx="7772400" cy="4572000"/>
+          </a:xfrm>
+          <a:prstGeom prst="rect">
+            <a:avLst/>
+          </a:prstGeom>
+          <a:noFill/>
+        </p:spPr>
+        <p:txBody>
+          <a:bodyPr wrap="square">
+            <a:spAutoFit/>
+          </a:bodyPr>
+          <a:lstStyle/>
+          <a:p>
+            <a:pPr>
+              <a:spcAft>
+                <a:spcPts val="600"/>
+              </a:spcAft>
+              <a:defRPr sz="1600">
+                <a:solidFill>
+                  <a:srgbClr val="222222"/>
+                </a:solidFill>
+              </a:defRPr>
+            </a:pPr>
+            <a:r>
+              <a:t>• Fiche cours — Plateforme e-learning (Moodle)</a:t>
+            </a:r>
+          </a:p>
+          <a:p>
+            <a:pPr>
+              <a:spcAft>
+                <a:spcPts val="600"/>
+              </a:spcAft>
+              <a:defRPr sz="1600">
+                <a:solidFill>
+                  <a:srgbClr val="222222"/>
+                </a:solidFill>
+              </a:defRPr>
+            </a:pPr>
+            <a:r>
+              <a:t>• Objectifs de l'enseignement</a:t>
+            </a:r>
+          </a:p>
+          <a:p>
+            <a:pPr>
+              <a:spcAft>
+                <a:spcPts val="600"/>
+              </a:spcAft>
+              <a:defRPr sz="1600">
+                <a:solidFill>
+                  <a:srgbClr val="222222"/>
+                </a:solidFill>
+              </a:defRPr>
+            </a:pPr>
+            <a:r>
+              <a:t>• Activités d'apprentissage</a:t>
+            </a:r>
+          </a:p>
+          <a:p>
+            <a:pPr>
+              <a:spcAft>
+                <a:spcPts val="600"/>
+              </a:spcAft>
+              <a:defRPr sz="1600">
+                <a:solidFill>
+                  <a:srgbClr val="222222"/>
+                </a:solidFill>
+              </a:defRPr>
+            </a:pPr>
+            <a:r>
+              <a:t>• Activités d'évaluation</a:t>
+            </a:r>
+          </a:p>
+          <a:p>
+            <a:pPr>
+              <a:spcAft>
+                <a:spcPts val="600"/>
+              </a:spcAft>
+              <a:defRPr sz="1600">
+                <a:solidFill>
+                  <a:srgbClr val="222222"/>
+                </a:solidFill>
+              </a:defRPr>
+            </a:pPr>
+            <a:r>
+              <a:t>• Bibliographie et ressources externes</a:t>
+            </a:r>
+          </a:p>
+          <a:p>
+            <a:pPr>
+              <a:spcAft>
+                <a:spcPts val="600"/>
+              </a:spcAft>
+              <a:defRPr sz="1600">
+                <a:solidFill>
+                  <a:srgbClr val="222222"/>
+                </a:solidFill>
+              </a:defRPr>
+            </a:pPr>
+            <a:r>
+              <a:t>• Contexte réglementaire algérien</a:t>
+            </a:r>
+          </a:p>
+          <a:p>
+            <a:pPr>
+              <a:spcAft>
+                <a:spcPts val="600"/>
+              </a:spcAft>
+              <a:defRPr sz="1600">
+                <a:solidFill>
+                  <a:srgbClr val="222222"/>
+                </a:solidFill>
+              </a:defRPr>
+            </a:pPr>
+            <a:r>
+              <a:t>• Plan du cours</a:t>
+            </a:r>
+          </a:p>
+          <a:p>
+            <a:pPr>
+              <a:spcAft>
+                <a:spcPts val="600"/>
+              </a:spcAft>
+              <a:defRPr sz="1600">
+                <a:solidFill>
+                  <a:srgbClr val="222222"/>
+                </a:solidFill>
+              </a:defRPr>
+            </a:pPr>
+            <a:r>
+              <a:t>• Introduction — PowerPoint comme outil de recherche(10 min)</a:t>
+            </a:r>
+          </a:p>
+          <a:p>
+            <a:pPr>
+              <a:spcAft>
+                <a:spcPts val="600"/>
+              </a:spcAft>
+              <a:defRPr sz="1600">
+                <a:solidFill>
+                  <a:srgbClr val="222222"/>
+                </a:solidFill>
+              </a:defRPr>
+            </a:pPr>
+            <a:r>
+              <a:t>• Interface avancée et modes d'affichage(10 min)</a:t>
+            </a:r>
+          </a:p>
+          <a:p>
+            <a:pPr>
+              <a:spcAft>
+                <a:spcPts val="600"/>
+              </a:spcAft>
+              <a:defRPr sz="1600">
+                <a:solidFill>
+                  <a:srgbClr val="222222"/>
+                </a:solidFill>
+              </a:defRPr>
+            </a:pPr>
+            <a:r>
+              <a:t>• Architecture d'une communication scientifique (12–15 slides)(15 min)</a:t>
             </a:r>
           </a:p>
         </p:txBody>
@@ -4526,15 +4689,20 @@
   <p:clrMapOvr>
     <a:masterClrMapping/>
   </p:clrMapOvr>
-  <p:transition spd="med">
-    <p:fade/>
-  </p:transition>
 </p:sld>
 </file>
 
-<file path=ppt/slides/slide9.xml><?xml version="1.0" encoding="utf-8"?>
+<file path=ppt/slides/slide4.xml><?xml version="1.0" encoding="utf-8"?>
 <p:sld xmlns:a="http://schemas.openxmlformats.org/drawingml/2006/main" xmlns:p="http://schemas.openxmlformats.org/presentationml/2006/main" xmlns:r="http://schemas.openxmlformats.org/officeDocument/2006/relationships">
   <p:cSld>
+    <p:bg>
+      <p:bgPr>
+        <a:solidFill>
+          <a:srgbClr val="FFFFFF"/>
+        </a:solidFill>
+        <a:effectLst/>
+      </p:bgPr>
+    </p:bg>
     <p:spTree>
       <p:nvGrpSpPr>
         <p:cNvPr id="1" name=""/>
@@ -4544,83 +4712,57 @@
       <p:grpSpPr/>
       <p:sp>
         <p:nvSpPr>
-          <p:cNvPr id="2" name="Title 1"/>
-          <p:cNvSpPr>
-            <a:spLocks noGrp="1"/>
-          </p:cNvSpPr>
-          <p:nvPr>
-            <p:ph type="title"/>
-          </p:nvPr>
-        </p:nvSpPr>
-        <p:spPr/>
-        <p:txBody>
-          <a:bodyPr/>
-          <a:lstStyle/>
-          <a:p>
-            <a:r>
-              <a:t>Atelier et évaluation</a:t>
-            </a:r>
-          </a:p>
-        </p:txBody>
-      </p:sp>
-      <p:sp>
-        <p:nvSpPr>
-          <p:cNvPr id="3" name="Content Placeholder 2"/>
-          <p:cNvSpPr>
-            <a:spLocks noGrp="1"/>
-          </p:cNvSpPr>
-          <p:nvPr>
-            <p:ph idx="1"/>
-          </p:nvPr>
-        </p:nvSpPr>
-        <p:spPr/>
-        <p:txBody>
-          <a:bodyPr/>
-          <a:lstStyle/>
-          <a:p>
-            <a:pPr>
-              <a:defRPr sz="2000"/>
-            </a:pPr>
-            <a:r>
-              <a:t>🛠️ Travaux sur poste</a:t>
-            </a:r>
-          </a:p>
-          <a:p>
-            <a:pPr>
-              <a:defRPr sz="2000"/>
-            </a:pPr>
-            <a:r>
-              <a:t>🛠️ Fiche TD 1h30</a:t>
-            </a:r>
-          </a:p>
-          <a:p>
-            <a:pPr>
-              <a:defRPr sz="2000"/>
-            </a:pPr>
-            <a:r>
-              <a:t>🛠️ Auto-évaluation</a:t>
-            </a:r>
-          </a:p>
-          <a:p>
-            <a:pPr>
-              <a:defRPr sz="2000"/>
-            </a:pPr>
-            <a:r>
-              <a:t>🛠️ Support PDF officiel</a:t>
-            </a:r>
-          </a:p>
-        </p:txBody>
-      </p:sp>
-      <p:sp>
-        <p:nvSpPr>
-          <p:cNvPr id="4" name="TextBox 3"/>
+          <p:cNvPr id="2" name="Rectangle 1"/>
+          <p:cNvSpPr/>
+          <p:nvPr/>
+        </p:nvSpPr>
+        <p:spPr>
+          <a:xfrm>
+            <a:off x="0" y="0"/>
+            <a:ext cx="109728" cy="6858000"/>
+          </a:xfrm>
+          <a:prstGeom prst="rect">
+            <a:avLst/>
+          </a:prstGeom>
+          <a:solidFill>
+            <a:srgbClr val="2C6E49"/>
+          </a:solidFill>
+          <a:ln>
+            <a:noFill/>
+          </a:ln>
+        </p:spPr>
+        <p:style>
+          <a:lnRef idx="1">
+            <a:schemeClr val="accent1"/>
+          </a:lnRef>
+          <a:fillRef idx="3">
+            <a:schemeClr val="accent1"/>
+          </a:fillRef>
+          <a:effectRef idx="2">
+            <a:schemeClr val="accent1"/>
+          </a:effectRef>
+          <a:fontRef idx="minor">
+            <a:schemeClr val="lt1"/>
+          </a:fontRef>
+        </p:style>
+        <p:txBody>
+          <a:bodyPr rtlCol="0" anchor="ctr"/>
+          <a:lstStyle/>
+          <a:p>
+            <a:pPr algn="ctr"/>
+          </a:p>
+        </p:txBody>
+      </p:sp>
+      <p:sp>
+        <p:nvSpPr>
+          <p:cNvPr id="3" name="TextBox 2"/>
           <p:cNvSpPr txBox="1"/>
           <p:nvPr/>
         </p:nvSpPr>
         <p:spPr>
           <a:xfrm>
-            <a:off x="365760" y="6446520"/>
-            <a:ext cx="8412480" cy="320040"/>
+            <a:off x="457200" y="365760"/>
+            <a:ext cx="8229600" cy="640080"/>
           </a:xfrm>
           <a:prstGeom prst="rect">
             <a:avLst/>
@@ -4628,20 +4770,88 @@
           <a:noFill/>
         </p:spPr>
         <p:txBody>
-          <a:bodyPr wrap="none">
+          <a:bodyPr wrap="square">
             <a:spAutoFit/>
           </a:bodyPr>
           <a:lstStyle/>
           <a:p>
-            <a:pPr algn="ctr">
-              <a:defRPr sz="900">
-                <a:solidFill>
-                  <a:srgbClr val="404040"/>
-                </a:solidFill>
-              </a:defRPr>
-            </a:pPr>
-            <a:r>
-              <a:t>Cours TIC 06  •  Diapositive 9/10</a:t>
+            <a:pPr algn="l">
+              <a:defRPr sz="2200" b="1">
+                <a:solidFill>
+                  <a:srgbClr val="1A5C33"/>
+                </a:solidFill>
+              </a:defRPr>
+            </a:pPr>
+            <a:r>
+              <a:t>Fiche cours — Plateforme e-learning (Moodle)</a:t>
+            </a:r>
+          </a:p>
+        </p:txBody>
+      </p:sp>
+      <p:sp>
+        <p:nvSpPr>
+          <p:cNvPr id="4" name="TextBox 3"/>
+          <p:cNvSpPr txBox="1"/>
+          <p:nvPr/>
+        </p:nvSpPr>
+        <p:spPr>
+          <a:xfrm>
+            <a:off x="457200" y="1371600"/>
+            <a:ext cx="7772400" cy="4572000"/>
+          </a:xfrm>
+          <a:prstGeom prst="rect">
+            <a:avLst/>
+          </a:prstGeom>
+          <a:noFill/>
+        </p:spPr>
+        <p:txBody>
+          <a:bodyPr wrap="square">
+            <a:spAutoFit/>
+          </a:bodyPr>
+          <a:lstStyle/>
+          <a:p>
+            <a:pPr>
+              <a:spcAft>
+                <a:spcPts val="600"/>
+              </a:spcAft>
+              <a:defRPr sz="1400">
+                <a:solidFill>
+                  <a:srgbClr val="222222"/>
+                </a:solidFill>
+              </a:defRPr>
+            </a:pPr>
+            <a:r>
+              <a:t>• Référentiel :titres et structure alignés sur Canvas Univ-Mosta (elearning.univ-usto.dz) ; bonnes pratiques benchmark 10 universités algériennes (voirBENCHMARK_10_UNIVERSITES_ELEARNING.md).</a:t>
+            </a:r>
+          </a:p>
+          <a:p>
+            <a:pPr>
+              <a:spcAft>
+                <a:spcPts val="600"/>
+              </a:spcAft>
+              <a:defRPr sz="1400">
+                <a:solidFill>
+                  <a:srgbClr val="222222"/>
+                </a:solidFill>
+              </a:defRPr>
+            </a:pPr>
+            <a:r>
+              <a:t>• Public visé :Master 1 Langue et Culture</a:t>
+            </a:r>
+          </a:p>
+          <a:p>
+            <a:pPr>
+              <a:spcAft>
+                <a:spcPts val="600"/>
+              </a:spcAft>
+              <a:defRPr sz="1400">
+                <a:solidFill>
+                  <a:srgbClr val="222222"/>
+                </a:solidFill>
+              </a:defRPr>
+            </a:pPr>
+            <a:r>
+              <a:t>• Compétences pré-requises :TIC 04–05 ; maîtrise de base de Word et Excel ; capacité à synthétiser une recherche</a:t>
             </a:r>
           </a:p>
         </p:txBody>
@@ -4651,9 +4861,905 @@
   <p:clrMapOvr>
     <a:masterClrMapping/>
   </p:clrMapOvr>
-  <p:transition spd="med">
-    <p:fade/>
-  </p:transition>
+</p:sld>
+</file>
+
+<file path=ppt/slides/slide5.xml><?xml version="1.0" encoding="utf-8"?>
+<p:sld xmlns:a="http://schemas.openxmlformats.org/drawingml/2006/main" xmlns:p="http://schemas.openxmlformats.org/presentationml/2006/main" xmlns:r="http://schemas.openxmlformats.org/officeDocument/2006/relationships">
+  <p:cSld>
+    <p:bg>
+      <p:bgPr>
+        <a:solidFill>
+          <a:srgbClr val="FFFFFF"/>
+        </a:solidFill>
+        <a:effectLst/>
+      </p:bgPr>
+    </p:bg>
+    <p:spTree>
+      <p:nvGrpSpPr>
+        <p:cNvPr id="1" name=""/>
+        <p:cNvGrpSpPr/>
+        <p:nvPr/>
+      </p:nvGrpSpPr>
+      <p:grpSpPr/>
+      <p:sp>
+        <p:nvSpPr>
+          <p:cNvPr id="2" name="Rectangle 1"/>
+          <p:cNvSpPr/>
+          <p:nvPr/>
+        </p:nvSpPr>
+        <p:spPr>
+          <a:xfrm>
+            <a:off x="0" y="0"/>
+            <a:ext cx="109728" cy="6858000"/>
+          </a:xfrm>
+          <a:prstGeom prst="rect">
+            <a:avLst/>
+          </a:prstGeom>
+          <a:solidFill>
+            <a:srgbClr val="2C6E49"/>
+          </a:solidFill>
+          <a:ln>
+            <a:noFill/>
+          </a:ln>
+        </p:spPr>
+        <p:style>
+          <a:lnRef idx="1">
+            <a:schemeClr val="accent1"/>
+          </a:lnRef>
+          <a:fillRef idx="3">
+            <a:schemeClr val="accent1"/>
+          </a:fillRef>
+          <a:effectRef idx="2">
+            <a:schemeClr val="accent1"/>
+          </a:effectRef>
+          <a:fontRef idx="minor">
+            <a:schemeClr val="lt1"/>
+          </a:fontRef>
+        </p:style>
+        <p:txBody>
+          <a:bodyPr rtlCol="0" anchor="ctr"/>
+          <a:lstStyle/>
+          <a:p>
+            <a:pPr algn="ctr"/>
+          </a:p>
+        </p:txBody>
+      </p:sp>
+      <p:sp>
+        <p:nvSpPr>
+          <p:cNvPr id="3" name="TextBox 2"/>
+          <p:cNvSpPr txBox="1"/>
+          <p:nvPr/>
+        </p:nvSpPr>
+        <p:spPr>
+          <a:xfrm>
+            <a:off x="457200" y="365760"/>
+            <a:ext cx="8229600" cy="640080"/>
+          </a:xfrm>
+          <a:prstGeom prst="rect">
+            <a:avLst/>
+          </a:prstGeom>
+          <a:noFill/>
+        </p:spPr>
+        <p:txBody>
+          <a:bodyPr wrap="square">
+            <a:spAutoFit/>
+          </a:bodyPr>
+          <a:lstStyle/>
+          <a:p>
+            <a:pPr algn="l">
+              <a:defRPr sz="2200" b="1">
+                <a:solidFill>
+                  <a:srgbClr val="1A5C33"/>
+                </a:solidFill>
+              </a:defRPr>
+            </a:pPr>
+            <a:r>
+              <a:t>Objectifs de l'enseignement</a:t>
+            </a:r>
+          </a:p>
+        </p:txBody>
+      </p:sp>
+      <p:sp>
+        <p:nvSpPr>
+          <p:cNvPr id="4" name="TextBox 3"/>
+          <p:cNvSpPr txBox="1"/>
+          <p:nvPr/>
+        </p:nvSpPr>
+        <p:spPr>
+          <a:xfrm>
+            <a:off x="457200" y="1371600"/>
+            <a:ext cx="7772400" cy="4572000"/>
+          </a:xfrm>
+          <a:prstGeom prst="rect">
+            <a:avLst/>
+          </a:prstGeom>
+          <a:noFill/>
+        </p:spPr>
+        <p:txBody>
+          <a:bodyPr wrap="square">
+            <a:spAutoFit/>
+          </a:bodyPr>
+          <a:lstStyle/>
+          <a:p>
+            <a:pPr>
+              <a:spcAft>
+                <a:spcPts val="600"/>
+              </a:spcAft>
+              <a:defRPr sz="1400">
+                <a:solidFill>
+                  <a:srgbClr val="222222"/>
+                </a:solidFill>
+              </a:defRPr>
+            </a:pPr>
+            <a:r>
+              <a:t>• En termes de savoir :- Structurer une soutenance ou communication scientifique (12–15 slides)</a:t>
+            </a:r>
+            <a:br/>
+            <a:r>
+              <a:t>- Distinguer transition, animation, et principes de data visualisation</a:t>
+            </a:r>
+            <a:br/>
+            <a:r>
+              <a:t>- Connaître les normes typographiques et chartes graphiques institutionnelles</a:t>
+            </a:r>
+          </a:p>
+          <a:p>
+            <a:pPr>
+              <a:spcAft>
+                <a:spcPts val="600"/>
+              </a:spcAft>
+              <a:defRPr sz="1400">
+                <a:solidFill>
+                  <a:srgbClr val="222222"/>
+                </a:solidFill>
+              </a:defRPr>
+            </a:pPr>
+            <a:r>
+              <a:t>• En termes de savoir-faire :- Créer une présentation académique avec template institutionnel</a:t>
+            </a:r>
+            <a:br/>
+            <a:r>
+              <a:t>- Exporter PDF, PPTX, et vidéo pour dépôt sur HAL ou archive ouverte</a:t>
+            </a:r>
+            <a:br/>
+            <a:r>
+              <a:t>- Appliquer les principes de visualisation des données (graphiques, tableaux, nuages de mots)</a:t>
+            </a:r>
+            <a:br/>
+            <a:r>
+              <a:t>- Utiliser le mode présentateur, le pointeur laser, le chronométrage</a:t>
+            </a:r>
+          </a:p>
+          <a:p>
+            <a:pPr>
+              <a:spcAft>
+                <a:spcPts val="600"/>
+              </a:spcAft>
+              <a:defRPr sz="1400">
+                <a:solidFill>
+                  <a:srgbClr val="222222"/>
+                </a:solidFill>
+              </a:defRPr>
+            </a:pPr>
+            <a:r>
+              <a:t>• En termes de savoir-être :- Communication scientifique claire, registre formel, gestion du temps</a:t>
+            </a:r>
+            <a:br/>
+            <a:r>
+              <a:t>- Réception constructive des questions du jury/public</a:t>
+            </a:r>
+          </a:p>
+          <a:p>
+            <a:pPr>
+              <a:spcAft>
+                <a:spcPts val="600"/>
+              </a:spcAft>
+              <a:defRPr sz="1400">
+                <a:solidFill>
+                  <a:srgbClr val="222222"/>
+                </a:solidFill>
+              </a:defRPr>
+            </a:pPr>
+            <a:r>
+              <a:t>• Mode d'évaluation :TD 20 % + Présentation orale (simulation soutenance) 50 % + QCM 30 %</a:t>
+            </a:r>
+          </a:p>
+        </p:txBody>
+      </p:sp>
+    </p:spTree>
+  </p:cSld>
+  <p:clrMapOvr>
+    <a:masterClrMapping/>
+  </p:clrMapOvr>
+</p:sld>
+</file>
+
+<file path=ppt/slides/slide6.xml><?xml version="1.0" encoding="utf-8"?>
+<p:sld xmlns:a="http://schemas.openxmlformats.org/drawingml/2006/main" xmlns:p="http://schemas.openxmlformats.org/presentationml/2006/main" xmlns:r="http://schemas.openxmlformats.org/officeDocument/2006/relationships">
+  <p:cSld>
+    <p:bg>
+      <p:bgPr>
+        <a:solidFill>
+          <a:srgbClr val="FFFFFF"/>
+        </a:solidFill>
+        <a:effectLst/>
+      </p:bgPr>
+    </p:bg>
+    <p:spTree>
+      <p:nvGrpSpPr>
+        <p:cNvPr id="1" name=""/>
+        <p:cNvGrpSpPr/>
+        <p:nvPr/>
+      </p:nvGrpSpPr>
+      <p:grpSpPr/>
+      <p:sp>
+        <p:nvSpPr>
+          <p:cNvPr id="2" name="Rectangle 1"/>
+          <p:cNvSpPr/>
+          <p:nvPr/>
+        </p:nvSpPr>
+        <p:spPr>
+          <a:xfrm>
+            <a:off x="0" y="0"/>
+            <a:ext cx="109728" cy="6858000"/>
+          </a:xfrm>
+          <a:prstGeom prst="rect">
+            <a:avLst/>
+          </a:prstGeom>
+          <a:solidFill>
+            <a:srgbClr val="2C6E49"/>
+          </a:solidFill>
+          <a:ln>
+            <a:noFill/>
+          </a:ln>
+        </p:spPr>
+        <p:style>
+          <a:lnRef idx="1">
+            <a:schemeClr val="accent1"/>
+          </a:lnRef>
+          <a:fillRef idx="3">
+            <a:schemeClr val="accent1"/>
+          </a:fillRef>
+          <a:effectRef idx="2">
+            <a:schemeClr val="accent1"/>
+          </a:effectRef>
+          <a:fontRef idx="minor">
+            <a:schemeClr val="lt1"/>
+          </a:fontRef>
+        </p:style>
+        <p:txBody>
+          <a:bodyPr rtlCol="0" anchor="ctr"/>
+          <a:lstStyle/>
+          <a:p>
+            <a:pPr algn="ctr"/>
+          </a:p>
+        </p:txBody>
+      </p:sp>
+      <p:sp>
+        <p:nvSpPr>
+          <p:cNvPr id="3" name="TextBox 2"/>
+          <p:cNvSpPr txBox="1"/>
+          <p:nvPr/>
+        </p:nvSpPr>
+        <p:spPr>
+          <a:xfrm>
+            <a:off x="457200" y="365760"/>
+            <a:ext cx="8229600" cy="640080"/>
+          </a:xfrm>
+          <a:prstGeom prst="rect">
+            <a:avLst/>
+          </a:prstGeom>
+          <a:noFill/>
+        </p:spPr>
+        <p:txBody>
+          <a:bodyPr wrap="square">
+            <a:spAutoFit/>
+          </a:bodyPr>
+          <a:lstStyle/>
+          <a:p>
+            <a:pPr algn="l">
+              <a:defRPr sz="2200" b="1">
+                <a:solidFill>
+                  <a:srgbClr val="1A5C33"/>
+                </a:solidFill>
+              </a:defRPr>
+            </a:pPr>
+            <a:r>
+              <a:t>Activités d'apprentissage</a:t>
+            </a:r>
+          </a:p>
+        </p:txBody>
+      </p:sp>
+      <p:sp>
+        <p:nvSpPr>
+          <p:cNvPr id="4" name="TextBox 3"/>
+          <p:cNvSpPr txBox="1"/>
+          <p:nvPr/>
+        </p:nvSpPr>
+        <p:spPr>
+          <a:xfrm>
+            <a:off x="457200" y="1371600"/>
+            <a:ext cx="7772400" cy="4572000"/>
+          </a:xfrm>
+          <a:prstGeom prst="rect">
+            <a:avLst/>
+          </a:prstGeom>
+          <a:noFill/>
+        </p:spPr>
+        <p:txBody>
+          <a:bodyPr wrap="square">
+            <a:spAutoFit/>
+          </a:bodyPr>
+          <a:lstStyle/>
+          <a:p>
+            <a:pPr>
+              <a:spcAft>
+                <a:spcPts val="600"/>
+              </a:spcAft>
+              <a:defRPr sz="1400">
+                <a:solidFill>
+                  <a:srgbClr val="222222"/>
+                </a:solidFill>
+              </a:defRPr>
+            </a:pPr>
+            <a:r>
+              <a:t>• Création d'un diaporama de 10 slides sur un sujet de recherche en langue/culture</a:t>
+            </a:r>
+          </a:p>
+          <a:p>
+            <a:pPr>
+              <a:spcAft>
+                <a:spcPts val="600"/>
+              </a:spcAft>
+              <a:defRPr sz="1400">
+                <a:solidFill>
+                  <a:srgbClr val="222222"/>
+                </a:solidFill>
+              </a:defRPr>
+            </a:pPr>
+            <a:r>
+              <a:t>• Exercice de data visualisation (transformer un tableau brut en infographie)</a:t>
+            </a:r>
+          </a:p>
+        </p:txBody>
+      </p:sp>
+    </p:spTree>
+  </p:cSld>
+  <p:clrMapOvr>
+    <a:masterClrMapping/>
+  </p:clrMapOvr>
+</p:sld>
+</file>
+
+<file path=ppt/slides/slide7.xml><?xml version="1.0" encoding="utf-8"?>
+<p:sld xmlns:a="http://schemas.openxmlformats.org/drawingml/2006/main" xmlns:p="http://schemas.openxmlformats.org/presentationml/2006/main" xmlns:r="http://schemas.openxmlformats.org/officeDocument/2006/relationships">
+  <p:cSld>
+    <p:bg>
+      <p:bgPr>
+        <a:solidFill>
+          <a:srgbClr val="FFFFFF"/>
+        </a:solidFill>
+        <a:effectLst/>
+      </p:bgPr>
+    </p:bg>
+    <p:spTree>
+      <p:nvGrpSpPr>
+        <p:cNvPr id="1" name=""/>
+        <p:cNvGrpSpPr/>
+        <p:nvPr/>
+      </p:nvGrpSpPr>
+      <p:grpSpPr/>
+      <p:sp>
+        <p:nvSpPr>
+          <p:cNvPr id="2" name="Rectangle 1"/>
+          <p:cNvSpPr/>
+          <p:nvPr/>
+        </p:nvSpPr>
+        <p:spPr>
+          <a:xfrm>
+            <a:off x="0" y="0"/>
+            <a:ext cx="109728" cy="6858000"/>
+          </a:xfrm>
+          <a:prstGeom prst="rect">
+            <a:avLst/>
+          </a:prstGeom>
+          <a:solidFill>
+            <a:srgbClr val="2C6E49"/>
+          </a:solidFill>
+          <a:ln>
+            <a:noFill/>
+          </a:ln>
+        </p:spPr>
+        <p:style>
+          <a:lnRef idx="1">
+            <a:schemeClr val="accent1"/>
+          </a:lnRef>
+          <a:fillRef idx="3">
+            <a:schemeClr val="accent1"/>
+          </a:fillRef>
+          <a:effectRef idx="2">
+            <a:schemeClr val="accent1"/>
+          </a:effectRef>
+          <a:fontRef idx="minor">
+            <a:schemeClr val="lt1"/>
+          </a:fontRef>
+        </p:style>
+        <p:txBody>
+          <a:bodyPr rtlCol="0" anchor="ctr"/>
+          <a:lstStyle/>
+          <a:p>
+            <a:pPr algn="ctr"/>
+          </a:p>
+        </p:txBody>
+      </p:sp>
+      <p:sp>
+        <p:nvSpPr>
+          <p:cNvPr id="3" name="TextBox 2"/>
+          <p:cNvSpPr txBox="1"/>
+          <p:nvPr/>
+        </p:nvSpPr>
+        <p:spPr>
+          <a:xfrm>
+            <a:off x="457200" y="365760"/>
+            <a:ext cx="8229600" cy="640080"/>
+          </a:xfrm>
+          <a:prstGeom prst="rect">
+            <a:avLst/>
+          </a:prstGeom>
+          <a:noFill/>
+        </p:spPr>
+        <p:txBody>
+          <a:bodyPr wrap="square">
+            <a:spAutoFit/>
+          </a:bodyPr>
+          <a:lstStyle/>
+          <a:p>
+            <a:pPr algn="l">
+              <a:defRPr sz="2200" b="1">
+                <a:solidFill>
+                  <a:srgbClr val="1A5C33"/>
+                </a:solidFill>
+              </a:defRPr>
+            </a:pPr>
+            <a:r>
+              <a:t>Activités d'évaluation</a:t>
+            </a:r>
+          </a:p>
+        </p:txBody>
+      </p:sp>
+      <p:sp>
+        <p:nvSpPr>
+          <p:cNvPr id="4" name="TextBox 3"/>
+          <p:cNvSpPr txBox="1"/>
+          <p:nvPr/>
+        </p:nvSpPr>
+        <p:spPr>
+          <a:xfrm>
+            <a:off x="457200" y="1371600"/>
+            <a:ext cx="7772400" cy="4572000"/>
+          </a:xfrm>
+          <a:prstGeom prst="rect">
+            <a:avLst/>
+          </a:prstGeom>
+          <a:noFill/>
+        </p:spPr>
+        <p:txBody>
+          <a:bodyPr wrap="square">
+            <a:spAutoFit/>
+          </a:bodyPr>
+          <a:lstStyle/>
+          <a:p>
+            <a:pPr>
+              <a:spcAft>
+                <a:spcPts val="600"/>
+              </a:spcAft>
+              <a:defRPr sz="1400">
+                <a:solidFill>
+                  <a:srgbClr val="222222"/>
+                </a:solidFill>
+              </a:defRPr>
+            </a:pPr>
+            <a:r>
+              <a:t>• Simulation de communication scientifique (10 min exposé + 5 min questions)</a:t>
+            </a:r>
+          </a:p>
+          <a:p>
+            <a:pPr>
+              <a:spcAft>
+                <a:spcPts val="600"/>
+              </a:spcAft>
+              <a:defRPr sz="1400">
+                <a:solidFill>
+                  <a:srgbClr val="222222"/>
+                </a:solidFill>
+              </a:defRPr>
+            </a:pPr>
+            <a:r>
+              <a:t>• Grille d'évaluation critériée (contenu, design, oral, gestion du temps)</a:t>
+            </a:r>
+          </a:p>
+        </p:txBody>
+      </p:sp>
+    </p:spTree>
+  </p:cSld>
+  <p:clrMapOvr>
+    <a:masterClrMapping/>
+  </p:clrMapOvr>
+</p:sld>
+</file>
+
+<file path=ppt/slides/slide8.xml><?xml version="1.0" encoding="utf-8"?>
+<p:sld xmlns:a="http://schemas.openxmlformats.org/drawingml/2006/main" xmlns:p="http://schemas.openxmlformats.org/presentationml/2006/main" xmlns:r="http://schemas.openxmlformats.org/officeDocument/2006/relationships">
+  <p:cSld>
+    <p:bg>
+      <p:bgPr>
+        <a:solidFill>
+          <a:srgbClr val="FFFFFF"/>
+        </a:solidFill>
+        <a:effectLst/>
+      </p:bgPr>
+    </p:bg>
+    <p:spTree>
+      <p:nvGrpSpPr>
+        <p:cNvPr id="1" name=""/>
+        <p:cNvGrpSpPr/>
+        <p:nvPr/>
+      </p:nvGrpSpPr>
+      <p:grpSpPr/>
+      <p:sp>
+        <p:nvSpPr>
+          <p:cNvPr id="2" name="Rectangle 1"/>
+          <p:cNvSpPr/>
+          <p:nvPr/>
+        </p:nvSpPr>
+        <p:spPr>
+          <a:xfrm>
+            <a:off x="0" y="0"/>
+            <a:ext cx="109728" cy="6858000"/>
+          </a:xfrm>
+          <a:prstGeom prst="rect">
+            <a:avLst/>
+          </a:prstGeom>
+          <a:solidFill>
+            <a:srgbClr val="2C6E49"/>
+          </a:solidFill>
+          <a:ln>
+            <a:noFill/>
+          </a:ln>
+        </p:spPr>
+        <p:style>
+          <a:lnRef idx="1">
+            <a:schemeClr val="accent1"/>
+          </a:lnRef>
+          <a:fillRef idx="3">
+            <a:schemeClr val="accent1"/>
+          </a:fillRef>
+          <a:effectRef idx="2">
+            <a:schemeClr val="accent1"/>
+          </a:effectRef>
+          <a:fontRef idx="minor">
+            <a:schemeClr val="lt1"/>
+          </a:fontRef>
+        </p:style>
+        <p:txBody>
+          <a:bodyPr rtlCol="0" anchor="ctr"/>
+          <a:lstStyle/>
+          <a:p>
+            <a:pPr algn="ctr"/>
+          </a:p>
+        </p:txBody>
+      </p:sp>
+      <p:sp>
+        <p:nvSpPr>
+          <p:cNvPr id="3" name="TextBox 2"/>
+          <p:cNvSpPr txBox="1"/>
+          <p:nvPr/>
+        </p:nvSpPr>
+        <p:spPr>
+          <a:xfrm>
+            <a:off x="457200" y="365760"/>
+            <a:ext cx="8229600" cy="640080"/>
+          </a:xfrm>
+          <a:prstGeom prst="rect">
+            <a:avLst/>
+          </a:prstGeom>
+          <a:noFill/>
+        </p:spPr>
+        <p:txBody>
+          <a:bodyPr wrap="square">
+            <a:spAutoFit/>
+          </a:bodyPr>
+          <a:lstStyle/>
+          <a:p>
+            <a:pPr algn="l">
+              <a:defRPr sz="2200" b="1">
+                <a:solidFill>
+                  <a:srgbClr val="1A5C33"/>
+                </a:solidFill>
+              </a:defRPr>
+            </a:pPr>
+            <a:r>
+              <a:t>Bibliographie et ressources externes</a:t>
+            </a:r>
+          </a:p>
+        </p:txBody>
+      </p:sp>
+      <p:sp>
+        <p:nvSpPr>
+          <p:cNvPr id="4" name="TextBox 3"/>
+          <p:cNvSpPr txBox="1"/>
+          <p:nvPr/>
+        </p:nvSpPr>
+        <p:spPr>
+          <a:xfrm>
+            <a:off x="457200" y="1371600"/>
+            <a:ext cx="7772400" cy="4572000"/>
+          </a:xfrm>
+          <a:prstGeom prst="rect">
+            <a:avLst/>
+          </a:prstGeom>
+          <a:noFill/>
+        </p:spPr>
+        <p:txBody>
+          <a:bodyPr wrap="square">
+            <a:spAutoFit/>
+          </a:bodyPr>
+          <a:lstStyle/>
+          <a:p>
+            <a:pPr>
+              <a:spcAft>
+                <a:spcPts val="600"/>
+              </a:spcAft>
+              <a:defRPr sz="1400">
+                <a:solidFill>
+                  <a:srgbClr val="222222"/>
+                </a:solidFill>
+              </a:defRPr>
+            </a:pPr>
+            <a:r>
+              <a:t>• TemplatePresentation_BELACEL_V3.pptx; règle 6×6 (ENS/M'sila)</a:t>
+            </a:r>
+          </a:p>
+          <a:p>
+            <a:pPr>
+              <a:spcAft>
+                <a:spcPts val="600"/>
+              </a:spcAft>
+              <a:defRPr sz="1400">
+                <a:solidFill>
+                  <a:srgbClr val="222222"/>
+                </a:solidFill>
+              </a:defRPr>
+            </a:pPr>
+            <a:r>
+              <a:t>• Tufte, E. (2001).The Visual Display of Quantitative Information. Graphics Press.</a:t>
+            </a:r>
+          </a:p>
+          <a:p>
+            <a:pPr>
+              <a:spcAft>
+                <a:spcPts val="600"/>
+              </a:spcAft>
+              <a:defRPr sz="1400">
+                <a:solidFill>
+                  <a:srgbClr val="222222"/>
+                </a:solidFill>
+              </a:defRPr>
+            </a:pPr>
+            <a:r>
+              <a:t>• Duarte, N. (2008).Slide:ology: The Art and Science of Creating Great Presentations. O'Reilly.</a:t>
+            </a:r>
+          </a:p>
+          <a:p>
+            <a:pPr>
+              <a:spcAft>
+                <a:spcPts val="600"/>
+              </a:spcAft>
+              <a:defRPr sz="1400">
+                <a:solidFill>
+                  <a:srgbClr val="222222"/>
+                </a:solidFill>
+              </a:defRPr>
+            </a:pPr>
+            <a:r>
+              <a:t>• Reynolds, G. (2012).Presentation Zen. New Riders.</a:t>
+            </a:r>
+          </a:p>
+          <a:p>
+            <a:pPr>
+              <a:spcAft>
+                <a:spcPts val="600"/>
+              </a:spcAft>
+              <a:defRPr sz="1400">
+                <a:solidFill>
+                  <a:srgbClr val="222222"/>
+                </a:solidFill>
+              </a:defRPr>
+            </a:pPr>
+            <a:r>
+              <a:t>• Bardin, L. (2013).L'analyse de contenu. PUF (pour la structuration des données qualitatives).</a:t>
+            </a:r>
+          </a:p>
+          <a:p>
+            <a:pPr>
+              <a:spcAft>
+                <a:spcPts val="600"/>
+              </a:spcAft>
+              <a:defRPr sz="1400">
+                <a:solidFill>
+                  <a:srgbClr val="222222"/>
+                </a:solidFill>
+              </a:defRPr>
+            </a:pPr>
+            <a:r>
+              <a:t>• Contact enseignant :BELACEL Madani —madani.belacel@univ-mosta.dz</a:t>
+            </a:r>
+          </a:p>
+        </p:txBody>
+      </p:sp>
+    </p:spTree>
+  </p:cSld>
+  <p:clrMapOvr>
+    <a:masterClrMapping/>
+  </p:clrMapOvr>
+</p:sld>
+</file>
+
+<file path=ppt/slides/slide9.xml><?xml version="1.0" encoding="utf-8"?>
+<p:sld xmlns:a="http://schemas.openxmlformats.org/drawingml/2006/main" xmlns:p="http://schemas.openxmlformats.org/presentationml/2006/main" xmlns:r="http://schemas.openxmlformats.org/officeDocument/2006/relationships">
+  <p:cSld>
+    <p:bg>
+      <p:bgPr>
+        <a:solidFill>
+          <a:srgbClr val="FFFFFF"/>
+        </a:solidFill>
+        <a:effectLst/>
+      </p:bgPr>
+    </p:bg>
+    <p:spTree>
+      <p:nvGrpSpPr>
+        <p:cNvPr id="1" name=""/>
+        <p:cNvGrpSpPr/>
+        <p:nvPr/>
+      </p:nvGrpSpPr>
+      <p:grpSpPr/>
+      <p:sp>
+        <p:nvSpPr>
+          <p:cNvPr id="2" name="Rectangle 1"/>
+          <p:cNvSpPr/>
+          <p:nvPr/>
+        </p:nvSpPr>
+        <p:spPr>
+          <a:xfrm>
+            <a:off x="0" y="0"/>
+            <a:ext cx="109728" cy="6858000"/>
+          </a:xfrm>
+          <a:prstGeom prst="rect">
+            <a:avLst/>
+          </a:prstGeom>
+          <a:solidFill>
+            <a:srgbClr val="2C6E49"/>
+          </a:solidFill>
+          <a:ln>
+            <a:noFill/>
+          </a:ln>
+        </p:spPr>
+        <p:style>
+          <a:lnRef idx="1">
+            <a:schemeClr val="accent1"/>
+          </a:lnRef>
+          <a:fillRef idx="3">
+            <a:schemeClr val="accent1"/>
+          </a:fillRef>
+          <a:effectRef idx="2">
+            <a:schemeClr val="accent1"/>
+          </a:effectRef>
+          <a:fontRef idx="minor">
+            <a:schemeClr val="lt1"/>
+          </a:fontRef>
+        </p:style>
+        <p:txBody>
+          <a:bodyPr rtlCol="0" anchor="ctr"/>
+          <a:lstStyle/>
+          <a:p>
+            <a:pPr algn="ctr"/>
+          </a:p>
+        </p:txBody>
+      </p:sp>
+      <p:sp>
+        <p:nvSpPr>
+          <p:cNvPr id="3" name="TextBox 2"/>
+          <p:cNvSpPr txBox="1"/>
+          <p:nvPr/>
+        </p:nvSpPr>
+        <p:spPr>
+          <a:xfrm>
+            <a:off x="457200" y="365760"/>
+            <a:ext cx="8229600" cy="640080"/>
+          </a:xfrm>
+          <a:prstGeom prst="rect">
+            <a:avLst/>
+          </a:prstGeom>
+          <a:noFill/>
+        </p:spPr>
+        <p:txBody>
+          <a:bodyPr wrap="square">
+            <a:spAutoFit/>
+          </a:bodyPr>
+          <a:lstStyle/>
+          <a:p>
+            <a:pPr algn="l">
+              <a:defRPr sz="2200" b="1">
+                <a:solidFill>
+                  <a:srgbClr val="1A5C33"/>
+                </a:solidFill>
+              </a:defRPr>
+            </a:pPr>
+            <a:r>
+              <a:t>Contexte réglementaire algérien</a:t>
+            </a:r>
+          </a:p>
+        </p:txBody>
+      </p:sp>
+      <p:sp>
+        <p:nvSpPr>
+          <p:cNvPr id="4" name="TextBox 3"/>
+          <p:cNvSpPr txBox="1"/>
+          <p:nvPr/>
+        </p:nvSpPr>
+        <p:spPr>
+          <a:xfrm>
+            <a:off x="457200" y="1371600"/>
+            <a:ext cx="7772400" cy="4572000"/>
+          </a:xfrm>
+          <a:prstGeom prst="rect">
+            <a:avLst/>
+          </a:prstGeom>
+          <a:noFill/>
+        </p:spPr>
+        <p:txBody>
+          <a:bodyPr wrap="square">
+            <a:spAutoFit/>
+          </a:bodyPr>
+          <a:lstStyle/>
+          <a:p>
+            <a:pPr>
+              <a:spcAft>
+                <a:spcPts val="600"/>
+              </a:spcAft>
+              <a:defRPr sz="1400">
+                <a:solidFill>
+                  <a:srgbClr val="222222"/>
+                </a:solidFill>
+              </a:defRPr>
+            </a:pPr>
+            <a:r>
+              <a:t>• Arrêté ministériel 933(2016) : le Master en Langue et Culture s'inscrit dans le cadre du système LMD. Les compétences TIC sont obligatoires (référentiel national des programmes). L'arrêté 129 (2019) précise l'intégration des outils numériques dans les formations de lettres et langues.</a:t>
+            </a:r>
+          </a:p>
+          <a:p>
+            <a:pPr>
+              <a:spcAft>
+                <a:spcPts val="600"/>
+              </a:spcAft>
+              <a:defRPr sz="1400">
+                <a:solidFill>
+                  <a:srgbClr val="222222"/>
+                </a:solidFill>
+              </a:defRPr>
+            </a:pPr>
+            <a:r>
+              <a:t>• Recommandations CNREN(Comité National de Réforme de l'Enseignement Supérieur) : les étudiants de Master doivent maîtriser les outils de présentation scientifique pour les journées d'étude, colloques et séminaires. Le recours aux TIC dans la recherche est un critère d'évaluation des établissements (AAC – Auto-évaluation et Audit de Conformité).</a:t>
+            </a:r>
+          </a:p>
+        </p:txBody>
+      </p:sp>
+    </p:spTree>
+  </p:cSld>
+  <p:clrMapOvr>
+    <a:masterClrMapping/>
+  </p:clrMapOvr>
 </p:sld>
 </file>
 
@@ -4975,319 +6081,4 @@
   </a:objectDefaults>
   <a:extraClrSchemeLst/>
 </a:theme>
-</file>
-
-<file path=ppt/theme/theme2.xml><?xml version="1.0" encoding="utf-8"?>
-<a:theme xmlns:a="http://schemas.openxmlformats.org/drawingml/2006/main" name="Thème Office">
-  <a:themeElements>
-    <a:clrScheme name="Office">
-      <a:dk1>
-        <a:sysClr val="windowText" lastClr="000000"/>
-      </a:dk1>
-      <a:lt1>
-        <a:sysClr val="window" lastClr="FFFFFF"/>
-      </a:lt1>
-      <a:dk2>
-        <a:srgbClr val="0E2841"/>
-      </a:dk2>
-      <a:lt2>
-        <a:srgbClr val="E8E8E8"/>
-      </a:lt2>
-      <a:accent1>
-        <a:srgbClr val="156082"/>
-      </a:accent1>
-      <a:accent2>
-        <a:srgbClr val="E97132"/>
-      </a:accent2>
-      <a:accent3>
-        <a:srgbClr val="196B24"/>
-      </a:accent3>
-      <a:accent4>
-        <a:srgbClr val="0F9ED5"/>
-      </a:accent4>
-      <a:accent5>
-        <a:srgbClr val="A02B93"/>
-      </a:accent5>
-      <a:accent6>
-        <a:srgbClr val="4EA72E"/>
-      </a:accent6>
-      <a:hlink>
-        <a:srgbClr val="467886"/>
-      </a:hlink>
-      <a:folHlink>
-        <a:srgbClr val="96607D"/>
-      </a:folHlink>
-    </a:clrScheme>
-    <a:fontScheme name="Office">
-      <a:majorFont>
-        <a:latin typeface="Aptos Display" panose="02110004020202020204"/>
-        <a:ea typeface=""/>
-        <a:cs typeface=""/>
-        <a:font script="Jpan" typeface="游ゴシック Light"/>
-        <a:font script="Hang" typeface="맑은 고딕"/>
-        <a:font script="Hans" typeface="等线 Light"/>
-        <a:font script="Hant" typeface="新細明體"/>
-        <a:font script="Arab" typeface="Times New Roman"/>
-        <a:font script="Hebr" typeface="Times New Roman"/>
-        <a:font script="Thai" typeface="Angsana New"/>
-        <a:font script="Ethi" typeface="Nyala"/>
-        <a:font script="Beng" typeface="Vrinda"/>
-        <a:font script="Gujr" typeface="Shruti"/>
-        <a:font script="Khmr" typeface="MoolBoran"/>
-        <a:font script="Knda" typeface="Tunga"/>
-        <a:font script="Guru" typeface="Raavi"/>
-        <a:font script="Cans" typeface="Euphemia"/>
-        <a:font script="Cher" typeface="Plantagenet Cherokee"/>
-        <a:font script="Yiii" typeface="Microsoft Yi Baiti"/>
-        <a:font script="Tibt" typeface="Microsoft Himalaya"/>
-        <a:font script="Thaa" typeface="MV Boli"/>
-        <a:font script="Deva" typeface="Mangal"/>
-        <a:font script="Telu" typeface="Gautami"/>
-        <a:font script="Taml" typeface="Latha"/>
-        <a:font script="Syrc" typeface="Estrangelo Edessa"/>
-        <a:font script="Orya" typeface="Kalinga"/>
-        <a:font script="Mlym" typeface="Kartika"/>
-        <a:font script="Laoo" typeface="DokChampa"/>
-        <a:font script="Sinh" typeface="Iskoola Pota"/>
-        <a:font script="Mong" typeface="Mongolian Baiti"/>
-        <a:font script="Viet" typeface="Times New Roman"/>
-        <a:font script="Uigh" typeface="Microsoft Uighur"/>
-        <a:font script="Geor" typeface="Sylfaen"/>
-        <a:font script="Armn" typeface="Arial"/>
-        <a:font script="Bugi" typeface="Leelawadee UI"/>
-        <a:font script="Bopo" typeface="Microsoft JhengHei"/>
-        <a:font script="Java" typeface="Javanese Text"/>
-        <a:font script="Lisu" typeface="Segoe UI"/>
-        <a:font script="Mymr" typeface="Myanmar Text"/>
-        <a:font script="Nkoo" typeface="Ebrima"/>
-        <a:font script="Olck" typeface="Nirmala UI"/>
-        <a:font script="Osma" typeface="Ebrima"/>
-        <a:font script="Phag" typeface="Phagspa"/>
-        <a:font script="Syrn" typeface="Estrangelo Edessa"/>
-        <a:font script="Syrj" typeface="Estrangelo Edessa"/>
-        <a:font script="Syre" typeface="Estrangelo Edessa"/>
-        <a:font script="Sora" typeface="Nirmala UI"/>
-        <a:font script="Tale" typeface="Microsoft Tai Le"/>
-        <a:font script="Talu" typeface="Microsoft New Tai Lue"/>
-        <a:font script="Tfng" typeface="Ebrima"/>
-      </a:majorFont>
-      <a:minorFont>
-        <a:latin typeface="Aptos" panose="02110004020202020204"/>
-        <a:ea typeface=""/>
-        <a:cs typeface=""/>
-        <a:font script="Jpan" typeface="游ゴシック"/>
-        <a:font script="Hang" typeface="맑은 고딕"/>
-        <a:font script="Hans" typeface="等线"/>
-        <a:font script="Hant" typeface="新細明體"/>
-        <a:font script="Arab" typeface="Arial"/>
-        <a:font script="Hebr" typeface="Arial"/>
-        <a:font script="Thai" typeface="Cordia New"/>
-        <a:font script="Ethi" typeface="Nyala"/>
-        <a:font script="Beng" typeface="Vrinda"/>
-        <a:font script="Gujr" typeface="Shruti"/>
-        <a:font script="Khmr" typeface="DaunPenh"/>
-        <a:font script="Knda" typeface="Tunga"/>
-        <a:font script="Guru" typeface="Raavi"/>
-        <a:font script="Cans" typeface="Euphemia"/>
-        <a:font script="Cher" typeface="Plantagenet Cherokee"/>
-        <a:font script="Yiii" typeface="Microsoft Yi Baiti"/>
-        <a:font script="Tibt" typeface="Microsoft Himalaya"/>
-        <a:font script="Thaa" typeface="MV Boli"/>
-        <a:font script="Deva" typeface="Mangal"/>
-        <a:font script="Telu" typeface="Gautami"/>
-        <a:font script="Taml" typeface="Latha"/>
-        <a:font script="Syrc" typeface="Estrangelo Edessa"/>
-        <a:font script="Orya" typeface="Kalinga"/>
-        <a:font script="Mlym" typeface="Kartika"/>
-        <a:font script="Laoo" typeface="DokChampa"/>
-        <a:font script="Sinh" typeface="Iskoola Pota"/>
-        <a:font script="Mong" typeface="Mongolian Baiti"/>
-        <a:font script="Viet" typeface="Arial"/>
-        <a:font script="Uigh" typeface="Microsoft Uighur"/>
-        <a:font script="Geor" typeface="Sylfaen"/>
-        <a:font script="Armn" typeface="Arial"/>
-        <a:font script="Bugi" typeface="Leelawadee UI"/>
-        <a:font script="Bopo" typeface="Microsoft JhengHei"/>
-        <a:font script="Java" typeface="Javanese Text"/>
-        <a:font script="Lisu" typeface="Segoe UI"/>
-        <a:font script="Mymr" typeface="Myanmar Text"/>
-        <a:font script="Nkoo" typeface="Ebrima"/>
-        <a:font script="Olck" typeface="Nirmala UI"/>
-        <a:font script="Osma" typeface="Ebrima"/>
-        <a:font script="Phag" typeface="Phagspa"/>
-        <a:font script="Syrn" typeface="Estrangelo Edessa"/>
-        <a:font script="Syrj" typeface="Estrangelo Edessa"/>
-        <a:font script="Syre" typeface="Estrangelo Edessa"/>
-        <a:font script="Sora" typeface="Nirmala UI"/>
-        <a:font script="Tale" typeface="Microsoft Tai Le"/>
-        <a:font script="Talu" typeface="Microsoft New Tai Lue"/>
-        <a:font script="Tfng" typeface="Ebrima"/>
-      </a:minorFont>
-    </a:fontScheme>
-    <a:fmtScheme name="Office">
-      <a:fillStyleLst>
-        <a:solidFill>
-          <a:schemeClr val="phClr"/>
-        </a:solidFill>
-        <a:gradFill rotWithShape="1">
-          <a:gsLst>
-            <a:gs pos="0">
-              <a:schemeClr val="phClr">
-                <a:lumMod val="110000"/>
-                <a:satMod val="105000"/>
-                <a:tint val="67000"/>
-              </a:schemeClr>
-            </a:gs>
-            <a:gs pos="50000">
-              <a:schemeClr val="phClr">
-                <a:lumMod val="105000"/>
-                <a:satMod val="103000"/>
-                <a:tint val="73000"/>
-              </a:schemeClr>
-            </a:gs>
-            <a:gs pos="100000">
-              <a:schemeClr val="phClr">
-                <a:lumMod val="105000"/>
-                <a:satMod val="109000"/>
-                <a:tint val="81000"/>
-              </a:schemeClr>
-            </a:gs>
-          </a:gsLst>
-          <a:lin ang="5400000" scaled="0"/>
-        </a:gradFill>
-        <a:gradFill rotWithShape="1">
-          <a:gsLst>
-            <a:gs pos="0">
-              <a:schemeClr val="phClr">
-                <a:satMod val="103000"/>
-                <a:lumMod val="102000"/>
-                <a:tint val="94000"/>
-              </a:schemeClr>
-            </a:gs>
-            <a:gs pos="50000">
-              <a:schemeClr val="phClr">
-                <a:satMod val="110000"/>
-                <a:lumMod val="100000"/>
-                <a:shade val="100000"/>
-              </a:schemeClr>
-            </a:gs>
-            <a:gs pos="100000">
-              <a:schemeClr val="phClr">
-                <a:lumMod val="99000"/>
-                <a:satMod val="120000"/>
-                <a:shade val="78000"/>
-              </a:schemeClr>
-            </a:gs>
-          </a:gsLst>
-          <a:lin ang="5400000" scaled="0"/>
-        </a:gradFill>
-      </a:fillStyleLst>
-      <a:lnStyleLst>
-        <a:ln w="12700" cap="flat" cmpd="sng" algn="ctr">
-          <a:solidFill>
-            <a:schemeClr val="phClr"/>
-          </a:solidFill>
-          <a:prstDash val="solid"/>
-          <a:miter lim="800000"/>
-        </a:ln>
-        <a:ln w="19050" cap="flat" cmpd="sng" algn="ctr">
-          <a:solidFill>
-            <a:schemeClr val="phClr"/>
-          </a:solidFill>
-          <a:prstDash val="solid"/>
-          <a:miter lim="800000"/>
-        </a:ln>
-        <a:ln w="25400" cap="flat" cmpd="sng" algn="ctr">
-          <a:solidFill>
-            <a:schemeClr val="phClr"/>
-          </a:solidFill>
-          <a:prstDash val="solid"/>
-          <a:miter lim="800000"/>
-        </a:ln>
-      </a:lnStyleLst>
-      <a:effectStyleLst>
-        <a:effectStyle>
-          <a:effectLst/>
-        </a:effectStyle>
-        <a:effectStyle>
-          <a:effectLst/>
-        </a:effectStyle>
-        <a:effectStyle>
-          <a:effectLst>
-            <a:outerShdw blurRad="57150" dist="19050" dir="5400000" algn="ctr" rotWithShape="0">
-              <a:srgbClr val="000000">
-                <a:alpha val="63000"/>
-              </a:srgbClr>
-            </a:outerShdw>
-          </a:effectLst>
-        </a:effectStyle>
-      </a:effectStyleLst>
-      <a:bgFillStyleLst>
-        <a:solidFill>
-          <a:schemeClr val="phClr"/>
-        </a:solidFill>
-        <a:solidFill>
-          <a:schemeClr val="phClr">
-            <a:tint val="95000"/>
-            <a:satMod val="170000"/>
-          </a:schemeClr>
-        </a:solidFill>
-        <a:gradFill rotWithShape="1">
-          <a:gsLst>
-            <a:gs pos="0">
-              <a:schemeClr val="phClr">
-                <a:tint val="93000"/>
-                <a:satMod val="150000"/>
-                <a:shade val="98000"/>
-                <a:lumMod val="102000"/>
-              </a:schemeClr>
-            </a:gs>
-            <a:gs pos="50000">
-              <a:schemeClr val="phClr">
-                <a:tint val="98000"/>
-                <a:satMod val="130000"/>
-                <a:shade val="90000"/>
-                <a:lumMod val="103000"/>
-              </a:schemeClr>
-            </a:gs>
-            <a:gs pos="100000">
-              <a:schemeClr val="phClr">
-                <a:shade val="63000"/>
-                <a:satMod val="120000"/>
-              </a:schemeClr>
-            </a:gs>
-          </a:gsLst>
-          <a:lin ang="5400000" scaled="0"/>
-        </a:gradFill>
-      </a:bgFillStyleLst>
-    </a:fmtScheme>
-  </a:themeElements>
-  <a:objectDefaults>
-    <a:lnDef>
-      <a:spPr/>
-      <a:bodyPr/>
-      <a:lstStyle/>
-      <a:style>
-        <a:lnRef idx="2">
-          <a:schemeClr val="accent1"/>
-        </a:lnRef>
-        <a:fillRef idx="0">
-          <a:schemeClr val="accent1"/>
-        </a:fillRef>
-        <a:effectRef idx="1">
-          <a:schemeClr val="accent1"/>
-        </a:effectRef>
-        <a:fontRef idx="minor">
-          <a:schemeClr val="tx1"/>
-        </a:fontRef>
-      </a:style>
-    </a:lnDef>
-  </a:objectDefaults>
-  <a:extraClrSchemeLst/>
-  <a:extLst>
-    <a:ext uri="{05A4C25C-085E-4340-85A3-A5531E510DB2}">
-      <thm15:themeFamily xmlns:thm15="http://schemas.microsoft.com/office/thememl/2012/main" name="Office Theme" id="{2E142A2C-CD16-42D6-873A-C26D2A0506FA}" vid="{1BDDFF52-6CD6-40A5-AB3C-68EB2F1E4D0A}"/>
-    </a:ext>
-  </a:extLst>
-</a:theme>
 </file>
--- a/cours/Module TIC/Département Français/Master 1 - Langue et Culture/Cours_TIC_06_Microsoft_PowerPoint_FR.pptx
+++ b/cours/Module TIC/Département Français/Master 1 - Langue et Culture/Cours_TIC_06_Microsoft_PowerPoint_FR.pptx
@@ -2850,7 +2850,7 @@
           <a:solidFill>
             <a:schemeClr val="tx1"/>
           </a:solidFill>
-          <a:latin typeface="+mj-lt"/>
+          <a:latin typeface="Poppins"/>
           <a:ea typeface="+mj-ea"/>
           <a:cs typeface="+mj-cs"/>
         </a:defRPr>
@@ -2867,7 +2867,7 @@
           <a:solidFill>
             <a:schemeClr val="tx1"/>
           </a:solidFill>
-          <a:latin typeface="+mn-lt"/>
+          <a:latin typeface="Poppins"/>
           <a:ea typeface="+mn-ea"/>
           <a:cs typeface="+mn-cs"/>
         </a:defRPr>
@@ -2882,7 +2882,7 @@
           <a:solidFill>
             <a:schemeClr val="tx1"/>
           </a:solidFill>
-          <a:latin typeface="+mn-lt"/>
+          <a:latin typeface="Poppins"/>
           <a:ea typeface="+mn-ea"/>
           <a:cs typeface="+mn-cs"/>
         </a:defRPr>
@@ -2897,7 +2897,7 @@
           <a:solidFill>
             <a:schemeClr val="tx1"/>
           </a:solidFill>
-          <a:latin typeface="+mn-lt"/>
+          <a:latin typeface="Poppins"/>
           <a:ea typeface="+mn-ea"/>
           <a:cs typeface="+mn-cs"/>
         </a:defRPr>
@@ -2912,7 +2912,7 @@
           <a:solidFill>
             <a:schemeClr val="tx1"/>
           </a:solidFill>
-          <a:latin typeface="+mn-lt"/>
+          <a:latin typeface="Poppins"/>
           <a:ea typeface="+mn-ea"/>
           <a:cs typeface="+mn-cs"/>
         </a:defRPr>
@@ -2927,7 +2927,7 @@
           <a:solidFill>
             <a:schemeClr val="tx1"/>
           </a:solidFill>
-          <a:latin typeface="+mn-lt"/>
+          <a:latin typeface="Poppins"/>
           <a:ea typeface="+mn-ea"/>
           <a:cs typeface="+mn-cs"/>
         </a:defRPr>
@@ -2942,7 +2942,7 @@
           <a:solidFill>
             <a:schemeClr val="tx1"/>
           </a:solidFill>
-          <a:latin typeface="+mn-lt"/>
+          <a:latin typeface="Poppins"/>
           <a:ea typeface="+mn-ea"/>
           <a:cs typeface="+mn-cs"/>
         </a:defRPr>
@@ -2957,7 +2957,7 @@
           <a:solidFill>
             <a:schemeClr val="tx1"/>
           </a:solidFill>
-          <a:latin typeface="+mn-lt"/>
+          <a:latin typeface="Poppins"/>
           <a:ea typeface="+mn-ea"/>
           <a:cs typeface="+mn-cs"/>
         </a:defRPr>
@@ -2972,7 +2972,7 @@
           <a:solidFill>
             <a:schemeClr val="tx1"/>
           </a:solidFill>
-          <a:latin typeface="+mn-lt"/>
+          <a:latin typeface="Poppins"/>
           <a:ea typeface="+mn-ea"/>
           <a:cs typeface="+mn-cs"/>
         </a:defRPr>
@@ -2987,7 +2987,7 @@
           <a:solidFill>
             <a:schemeClr val="tx1"/>
           </a:solidFill>
-          <a:latin typeface="+mn-lt"/>
+          <a:latin typeface="Poppins"/>
           <a:ea typeface="+mn-ea"/>
           <a:cs typeface="+mn-cs"/>
         </a:defRPr>
@@ -3002,7 +3002,7 @@
           <a:solidFill>
             <a:schemeClr val="tx1"/>
           </a:solidFill>
-          <a:latin typeface="+mn-lt"/>
+          <a:latin typeface="Poppins"/>
           <a:ea typeface="+mn-ea"/>
           <a:cs typeface="+mn-cs"/>
         </a:defRPr>
@@ -3012,7 +3012,7 @@
           <a:solidFill>
             <a:schemeClr val="tx1"/>
           </a:solidFill>
-          <a:latin typeface="+mn-lt"/>
+          <a:latin typeface="Poppins"/>
           <a:ea typeface="+mn-ea"/>
           <a:cs typeface="+mn-cs"/>
         </a:defRPr>
@@ -3022,7 +3022,7 @@
           <a:solidFill>
             <a:schemeClr val="tx1"/>
           </a:solidFill>
-          <a:latin typeface="+mn-lt"/>
+          <a:latin typeface="Poppins"/>
           <a:ea typeface="+mn-ea"/>
           <a:cs typeface="+mn-cs"/>
         </a:defRPr>
@@ -3032,7 +3032,7 @@
           <a:solidFill>
             <a:schemeClr val="tx1"/>
           </a:solidFill>
-          <a:latin typeface="+mn-lt"/>
+          <a:latin typeface="Poppins"/>
           <a:ea typeface="+mn-ea"/>
           <a:cs typeface="+mn-cs"/>
         </a:defRPr>
@@ -3042,7 +3042,7 @@
           <a:solidFill>
             <a:schemeClr val="tx1"/>
           </a:solidFill>
-          <a:latin typeface="+mn-lt"/>
+          <a:latin typeface="Poppins"/>
           <a:ea typeface="+mn-ea"/>
           <a:cs typeface="+mn-cs"/>
         </a:defRPr>
@@ -3052,7 +3052,7 @@
           <a:solidFill>
             <a:schemeClr val="tx1"/>
           </a:solidFill>
-          <a:latin typeface="+mn-lt"/>
+          <a:latin typeface="Poppins"/>
           <a:ea typeface="+mn-ea"/>
           <a:cs typeface="+mn-cs"/>
         </a:defRPr>
@@ -3062,7 +3062,7 @@
           <a:solidFill>
             <a:schemeClr val="tx1"/>
           </a:solidFill>
-          <a:latin typeface="+mn-lt"/>
+          <a:latin typeface="Poppins"/>
           <a:ea typeface="+mn-ea"/>
           <a:cs typeface="+mn-cs"/>
         </a:defRPr>
@@ -3072,7 +3072,7 @@
           <a:solidFill>
             <a:schemeClr val="tx1"/>
           </a:solidFill>
-          <a:latin typeface="+mn-lt"/>
+          <a:latin typeface="Poppins"/>
           <a:ea typeface="+mn-ea"/>
           <a:cs typeface="+mn-cs"/>
         </a:defRPr>
@@ -3082,7 +3082,7 @@
           <a:solidFill>
             <a:schemeClr val="tx1"/>
           </a:solidFill>
-          <a:latin typeface="+mn-lt"/>
+          <a:latin typeface="Poppins"/>
           <a:ea typeface="+mn-ea"/>
           <a:cs typeface="+mn-cs"/>
         </a:defRPr>
@@ -3097,9 +3097,7 @@
   <p:cSld>
     <p:bg>
       <p:bgPr>
-        <a:solidFill>
-          <a:srgbClr val="1A5C33"/>
-        </a:solidFill>
+        <a:solidFill>val="006847"/&gt;</a:solidFill>
         <a:effectLst/>
       </p:bgPr>
     </p:bg>
@@ -3134,9 +3132,7 @@
           <a:p>
             <a:pPr algn="ctr">
               <a:defRPr sz="3200" b="1">
-                <a:solidFill>
-                  <a:srgbClr val="FFFFFF"/>
-                </a:solidFill>
+                <a:solidFill>val="FFFFFF"/&gt;</a:solidFill>
               </a:defRPr>
             </a:pPr>
             <a:r>
@@ -3169,9 +3165,7 @@
           <a:p>
             <a:pPr algn="ctr">
               <a:defRPr sz="2000" b="0">
-                <a:solidFill>
-                  <a:srgbClr val="C5D9C7"/>
-                </a:solidFill>
+                <a:solidFill>val="DFE5EA"/&gt;</a:solidFill>
               </a:defRPr>
             </a:pPr>
             <a:r>
@@ -3204,13 +3198,52 @@
           <a:p>
             <a:pPr algn="ctr">
               <a:defRPr sz="1600" b="0">
+                <a:solidFill>val="B7C9BE"/&gt;</a:solidFill>
+              </a:defRPr>
+            </a:pPr>
+            <a:r>
+              <a:t>Université de Mostaganem — MCB</a:t>
+            </a:r>
+          </a:p>
+        </p:txBody>
+      </p:sp>
+      <p:sp>
+        <p:nvSpPr>
+          <p:cNvPr id="990001" name="Pied de page FLE"/>
+          <p:cNvSpPr>
+            <a:spLocks noGrp="1"/>
+          </p:cNvSpPr>
+          <p:nvPr/>
+        </p:nvSpPr>
+        <p:spPr>
+          <a:xfrm>
+            <a:off x="2880360" y="914400"/>
+            <a:ext cx="4572000" cy="274320"/>
+          </a:xfrm>
+          <a:prstGeom prst="rect">
+            <a:avLst/>
+          </a:prstGeom>
+        </p:spPr>
+        <p:txBody>
+          <a:bodyPr anchor="b"/>
+          <a:lstStyle/>
+          <a:p>
+            <a:pPr algn="r">
+              <a:defRPr sz="900">
                 <a:solidFill>
-                  <a:srgbClr val="A0CFA0"/>
+                  <a:srgbClr val="9AA7B6"/>
                 </a:solidFill>
-              </a:defRPr>
-            </a:pPr>
-            <a:r>
-              <a:t>Université de Mostaganem — MCB</a:t>
+                <a:latin typeface="Poppins"/>
+              </a:defRPr>
+            </a:pPr>
+            <a:r>
+              <a:rPr lang="fr-FR" sz="900">
+                <a:solidFill>
+                  <a:srgbClr val="9AA7B6"/>
+                </a:solidFill>
+                <a:latin typeface="Poppins"/>
+              </a:rPr>
+              <a:t>Université de Mostaganem — Dr. Madani BELACEL</a:t>
             </a:r>
           </a:p>
         </p:txBody>
@@ -3228,9 +3261,7 @@
   <p:cSld>
     <p:bg>
       <p:bgPr>
-        <a:solidFill>
-          <a:srgbClr val="FFFFFF"/>
-        </a:solidFill>
+        <a:solidFill>val="FFFFFF"/&gt;</a:solidFill>
         <a:effectLst/>
       </p:bgPr>
     </p:bg>
@@ -3255,9 +3286,7 @@
           <a:prstGeom prst="rect">
             <a:avLst/>
           </a:prstGeom>
-          <a:solidFill>
-            <a:srgbClr val="2C6E49"/>
-          </a:solidFill>
+          <a:solidFill>val="00875B"/&gt;</a:solidFill>
           <a:ln>
             <a:noFill/>
           </a:ln>
@@ -3308,9 +3337,7 @@
           <a:p>
             <a:pPr algn="l">
               <a:defRPr sz="2200" b="1">
-                <a:solidFill>
-                  <a:srgbClr val="1A5C33"/>
-                </a:solidFill>
+                <a:solidFill>val="006847"/&gt;</a:solidFill>
               </a:defRPr>
             </a:pPr>
             <a:r>
@@ -3346,9 +3373,7 @@
                 <a:spcPts val="600"/>
               </a:spcAft>
               <a:defRPr sz="1400">
-                <a:solidFill>
-                  <a:srgbClr val="222222"/>
-                </a:solidFill>
+                <a:solidFill>val="22344A"/&gt;</a:solidFill>
               </a:defRPr>
             </a:pPr>
             <a:r>
@@ -3361,9 +3386,7 @@
                 <a:spcPts val="600"/>
               </a:spcAft>
               <a:defRPr sz="1400">
-                <a:solidFill>
-                  <a:srgbClr val="222222"/>
-                </a:solidFill>
+                <a:solidFill>val="22344A"/&gt;</a:solidFill>
               </a:defRPr>
             </a:pPr>
             <a:r>
@@ -3376,9 +3399,7 @@
                 <a:spcPts val="600"/>
               </a:spcAft>
               <a:defRPr sz="1400">
-                <a:solidFill>
-                  <a:srgbClr val="222222"/>
-                </a:solidFill>
+                <a:solidFill>val="22344A"/&gt;</a:solidFill>
               </a:defRPr>
             </a:pPr>
             <a:r>
@@ -3391,9 +3412,7 @@
                 <a:spcPts val="600"/>
               </a:spcAft>
               <a:defRPr sz="1400">
-                <a:solidFill>
-                  <a:srgbClr val="222222"/>
-                </a:solidFill>
+                <a:solidFill>val="22344A"/&gt;</a:solidFill>
               </a:defRPr>
             </a:pPr>
             <a:r>
@@ -3406,9 +3425,7 @@
                 <a:spcPts val="600"/>
               </a:spcAft>
               <a:defRPr sz="1400">
-                <a:solidFill>
-                  <a:srgbClr val="222222"/>
-                </a:solidFill>
+                <a:solidFill>val="22344A"/&gt;</a:solidFill>
               </a:defRPr>
             </a:pPr>
             <a:r>
@@ -3421,9 +3438,7 @@
                 <a:spcPts val="600"/>
               </a:spcAft>
               <a:defRPr sz="1400">
-                <a:solidFill>
-                  <a:srgbClr val="222222"/>
-                </a:solidFill>
+                <a:solidFill>val="22344A"/&gt;</a:solidFill>
               </a:defRPr>
             </a:pPr>
             <a:r>
@@ -3436,9 +3451,7 @@
                 <a:spcPts val="600"/>
               </a:spcAft>
               <a:defRPr sz="1400">
-                <a:solidFill>
-                  <a:srgbClr val="222222"/>
-                </a:solidFill>
+                <a:solidFill>val="22344A"/&gt;</a:solidFill>
               </a:defRPr>
             </a:pPr>
             <a:r>
@@ -3451,9 +3464,7 @@
                 <a:spcPts val="600"/>
               </a:spcAft>
               <a:defRPr sz="1400">
-                <a:solidFill>
-                  <a:srgbClr val="222222"/>
-                </a:solidFill>
+                <a:solidFill>val="22344A"/&gt;</a:solidFill>
               </a:defRPr>
             </a:pPr>
             <a:r>
@@ -3466,9 +3477,7 @@
                 <a:spcPts val="600"/>
               </a:spcAft>
               <a:defRPr sz="1400">
-                <a:solidFill>
-                  <a:srgbClr val="222222"/>
-                </a:solidFill>
+                <a:solidFill>val="22344A"/&gt;</a:solidFill>
               </a:defRPr>
             </a:pPr>
             <a:r>
@@ -3481,13 +3490,52 @@
                 <a:spcPts val="600"/>
               </a:spcAft>
               <a:defRPr sz="1400">
+                <a:solidFill>val="22344A"/&gt;</a:solidFill>
+              </a:defRPr>
+            </a:pPr>
+            <a:r>
+              <a:t>• Conclusion et TD</a:t>
+            </a:r>
+          </a:p>
+        </p:txBody>
+      </p:sp>
+      <p:sp>
+        <p:nvSpPr>
+          <p:cNvPr id="990001" name="Pied de page FLE"/>
+          <p:cNvSpPr>
+            <a:spLocks noGrp="1"/>
+          </p:cNvSpPr>
+          <p:nvPr/>
+        </p:nvSpPr>
+        <p:spPr>
+          <a:xfrm>
+            <a:off x="-228600" y="6400800"/>
+            <a:ext cx="109728" cy="274320"/>
+          </a:xfrm>
+          <a:prstGeom prst="rect">
+            <a:avLst/>
+          </a:prstGeom>
+        </p:spPr>
+        <p:txBody>
+          <a:bodyPr anchor="b"/>
+          <a:lstStyle/>
+          <a:p>
+            <a:pPr algn="r">
+              <a:defRPr sz="900">
                 <a:solidFill>
-                  <a:srgbClr val="222222"/>
+                  <a:srgbClr val="9AA7B6"/>
                 </a:solidFill>
-              </a:defRPr>
-            </a:pPr>
-            <a:r>
-              <a:t>• Conclusion et TD</a:t>
+                <a:latin typeface="Poppins"/>
+              </a:defRPr>
+            </a:pPr>
+            <a:r>
+              <a:rPr lang="fr-FR" sz="900">
+                <a:solidFill>
+                  <a:srgbClr val="9AA7B6"/>
+                </a:solidFill>
+                <a:latin typeface="Poppins"/>
+              </a:rPr>
+              <a:t>Université de Mostaganem — Dr. Madani BELACEL</a:t>
             </a:r>
           </a:p>
         </p:txBody>
@@ -3505,9 +3553,7 @@
   <p:cSld>
     <p:bg>
       <p:bgPr>
-        <a:solidFill>
-          <a:srgbClr val="FFFFFF"/>
-        </a:solidFill>
+        <a:solidFill>val="FFFFFF"/&gt;</a:solidFill>
         <a:effectLst/>
       </p:bgPr>
     </p:bg>
@@ -3532,9 +3578,7 @@
           <a:prstGeom prst="rect">
             <a:avLst/>
           </a:prstGeom>
-          <a:solidFill>
-            <a:srgbClr val="2C6E49"/>
-          </a:solidFill>
+          <a:solidFill>val="00875B"/&gt;</a:solidFill>
           <a:ln>
             <a:noFill/>
           </a:ln>
@@ -3585,9 +3629,7 @@
           <a:p>
             <a:pPr algn="l">
               <a:defRPr sz="2200" b="1">
-                <a:solidFill>
-                  <a:srgbClr val="1A5C33"/>
-                </a:solidFill>
+                <a:solidFill>val="006847"/&gt;</a:solidFill>
               </a:defRPr>
             </a:pPr>
             <a:r>
@@ -3623,9 +3665,7 @@
                 <a:spcPts val="600"/>
               </a:spcAft>
               <a:defRPr sz="1400">
-                <a:solidFill>
-                  <a:srgbClr val="222222"/>
-                </a:solidFill>
+                <a:solidFill>val="22344A"/&gt;</a:solidFill>
               </a:defRPr>
             </a:pPr>
             <a:r>
@@ -3638,9 +3678,7 @@
                 <a:spcPts val="600"/>
               </a:spcAft>
               <a:defRPr sz="1400">
-                <a:solidFill>
-                  <a:srgbClr val="222222"/>
-                </a:solidFill>
+                <a:solidFill>val="22344A"/&gt;</a:solidFill>
               </a:defRPr>
             </a:pPr>
             <a:r>
@@ -3653,9 +3691,7 @@
                 <a:spcPts val="600"/>
               </a:spcAft>
               <a:defRPr sz="1400">
-                <a:solidFill>
-                  <a:srgbClr val="222222"/>
-                </a:solidFill>
+                <a:solidFill>val="22344A"/&gt;</a:solidFill>
               </a:defRPr>
             </a:pPr>
             <a:r>
@@ -3680,13 +3716,52 @@
                 <a:spcPts val="600"/>
               </a:spcAft>
               <a:defRPr sz="1400">
+                <a:solidFill>val="22344A"/&gt;</a:solidFill>
+              </a:defRPr>
+            </a:pPr>
+            <a:r>
+              <a:t>• Pourquoi le mode « recherche » ?Contrairement au monde professionnel, la présentation académique valorise latransparence méthodologiqueet ladiscussion des résultatsplus que la persuasion commerciale.</a:t>
+            </a:r>
+          </a:p>
+        </p:txBody>
+      </p:sp>
+      <p:sp>
+        <p:nvSpPr>
+          <p:cNvPr id="990001" name="Pied de page FLE"/>
+          <p:cNvSpPr>
+            <a:spLocks noGrp="1"/>
+          </p:cNvSpPr>
+          <p:nvPr/>
+        </p:nvSpPr>
+        <p:spPr>
+          <a:xfrm>
+            <a:off x="-228600" y="6400800"/>
+            <a:ext cx="109728" cy="274320"/>
+          </a:xfrm>
+          <a:prstGeom prst="rect">
+            <a:avLst/>
+          </a:prstGeom>
+        </p:spPr>
+        <p:txBody>
+          <a:bodyPr anchor="b"/>
+          <a:lstStyle/>
+          <a:p>
+            <a:pPr algn="r">
+              <a:defRPr sz="900">
                 <a:solidFill>
-                  <a:srgbClr val="222222"/>
+                  <a:srgbClr val="9AA7B6"/>
                 </a:solidFill>
-              </a:defRPr>
-            </a:pPr>
-            <a:r>
-              <a:t>• Pourquoi le mode « recherche » ?Contrairement au monde professionnel, la présentation académique valorise latransparence méthodologiqueet ladiscussion des résultatsplus que la persuasion commerciale.</a:t>
+                <a:latin typeface="Poppins"/>
+              </a:defRPr>
+            </a:pPr>
+            <a:r>
+              <a:rPr lang="fr-FR" sz="900">
+                <a:solidFill>
+                  <a:srgbClr val="9AA7B6"/>
+                </a:solidFill>
+                <a:latin typeface="Poppins"/>
+              </a:rPr>
+              <a:t>Université de Mostaganem — Dr. Madani BELACEL</a:t>
             </a:r>
           </a:p>
         </p:txBody>
@@ -3704,9 +3779,7 @@
   <p:cSld>
     <p:bg>
       <p:bgPr>
-        <a:solidFill>
-          <a:srgbClr val="FFFFFF"/>
-        </a:solidFill>
+        <a:solidFill>val="FFFFFF"/&gt;</a:solidFill>
         <a:effectLst/>
       </p:bgPr>
     </p:bg>
@@ -3731,9 +3804,7 @@
           <a:prstGeom prst="rect">
             <a:avLst/>
           </a:prstGeom>
-          <a:solidFill>
-            <a:srgbClr val="2C6E49"/>
-          </a:solidFill>
+          <a:solidFill>val="00875B"/&gt;</a:solidFill>
           <a:ln>
             <a:noFill/>
           </a:ln>
@@ -3784,9 +3855,7 @@
           <a:p>
             <a:pPr algn="l">
               <a:defRPr sz="2200" b="1">
-                <a:solidFill>
-                  <a:srgbClr val="1A5C33"/>
-                </a:solidFill>
+                <a:solidFill>val="006847"/&gt;</a:solidFill>
               </a:defRPr>
             </a:pPr>
             <a:r>
@@ -3822,9 +3891,7 @@
                 <a:spcPts val="600"/>
               </a:spcAft>
               <a:defRPr sz="1400">
-                <a:solidFill>
-                  <a:srgbClr val="222222"/>
-                </a:solidFill>
+                <a:solidFill>val="22344A"/&gt;</a:solidFill>
               </a:defRPr>
             </a:pPr>
             <a:r>
@@ -3837,13 +3904,52 @@
                 <a:spcPts val="600"/>
               </a:spcAft>
               <a:defRPr sz="1400">
+                <a:solidFill>val="22344A"/&gt;</a:solidFill>
+              </a:defRPr>
+            </a:pPr>
+            <a:r>
+              <a:t>• Raccourcis:F5(depuis début),Ctrl+F5(depuis slide active),B(écran noir = attention public),W(écran blanc).</a:t>
+            </a:r>
+          </a:p>
+        </p:txBody>
+      </p:sp>
+      <p:sp>
+        <p:nvSpPr>
+          <p:cNvPr id="990001" name="Pied de page FLE"/>
+          <p:cNvSpPr>
+            <a:spLocks noGrp="1"/>
+          </p:cNvSpPr>
+          <p:nvPr/>
+        </p:nvSpPr>
+        <p:spPr>
+          <a:xfrm>
+            <a:off x="-228600" y="6400800"/>
+            <a:ext cx="109728" cy="274320"/>
+          </a:xfrm>
+          <a:prstGeom prst="rect">
+            <a:avLst/>
+          </a:prstGeom>
+        </p:spPr>
+        <p:txBody>
+          <a:bodyPr anchor="b"/>
+          <a:lstStyle/>
+          <a:p>
+            <a:pPr algn="r">
+              <a:defRPr sz="900">
                 <a:solidFill>
-                  <a:srgbClr val="222222"/>
+                  <a:srgbClr val="9AA7B6"/>
                 </a:solidFill>
-              </a:defRPr>
-            </a:pPr>
-            <a:r>
-              <a:t>• Raccourcis:F5(depuis début),Ctrl+F5(depuis slide active),B(écran noir = attention public),W(écran blanc).</a:t>
+                <a:latin typeface="Poppins"/>
+              </a:defRPr>
+            </a:pPr>
+            <a:r>
+              <a:rPr lang="fr-FR" sz="900">
+                <a:solidFill>
+                  <a:srgbClr val="9AA7B6"/>
+                </a:solidFill>
+                <a:latin typeface="Poppins"/>
+              </a:rPr>
+              <a:t>Université de Mostaganem — Dr. Madani BELACEL</a:t>
             </a:r>
           </a:p>
         </p:txBody>
@@ -3861,9 +3967,7 @@
   <p:cSld>
     <p:bg>
       <p:bgPr>
-        <a:solidFill>
-          <a:srgbClr val="E8F0E9"/>
-        </a:solidFill>
+        <a:solidFill>val="F4F6F8"/&gt;</a:solidFill>
         <a:effectLst/>
       </p:bgPr>
     </p:bg>
@@ -3898,9 +4002,7 @@
           <a:p>
             <a:pPr algn="ctr">
               <a:defRPr sz="2600" b="1">
-                <a:solidFill>
-                  <a:srgbClr val="1A5C33"/>
-                </a:solidFill>
+                <a:solidFill>val="006847"/&gt;</a:solidFill>
               </a:defRPr>
             </a:pPr>
             <a:r>
@@ -3936,9 +4038,7 @@
                 <a:spcPts val="600"/>
               </a:spcAft>
               <a:defRPr sz="1600">
-                <a:solidFill>
-                  <a:srgbClr val="222222"/>
-                </a:solidFill>
+                <a:solidFill>val="22344A"/&gt;</a:solidFill>
               </a:defRPr>
             </a:pPr>
             <a:r>
@@ -3951,9 +4051,7 @@
                 <a:spcPts val="600"/>
               </a:spcAft>
               <a:defRPr sz="1600">
-                <a:solidFill>
-                  <a:srgbClr val="222222"/>
-                </a:solidFill>
+                <a:solidFill>val="22344A"/&gt;</a:solidFill>
               </a:defRPr>
             </a:pPr>
             <a:r>
@@ -3974,9 +4072,7 @@
                 <a:spcPts val="600"/>
               </a:spcAft>
               <a:defRPr sz="1600">
-                <a:solidFill>
-                  <a:srgbClr val="222222"/>
-                </a:solidFill>
+                <a:solidFill>val="22344A"/&gt;</a:solidFill>
               </a:defRPr>
             </a:pPr>
             <a:r>
@@ -3989,9 +4085,7 @@
                 <a:spcPts val="600"/>
               </a:spcAft>
               <a:defRPr sz="1600">
-                <a:solidFill>
-                  <a:srgbClr val="222222"/>
-                </a:solidFill>
+                <a:solidFill>val="22344A"/&gt;</a:solidFill>
               </a:defRPr>
             </a:pPr>
             <a:r>
@@ -4004,13 +4098,52 @@
                 <a:spcPts val="600"/>
               </a:spcAft>
               <a:defRPr sz="1600">
+                <a:solidFill>val="22344A"/&gt;</a:solidFill>
+              </a:defRPr>
+            </a:pPr>
+            <a:r>
+              <a:t>• TemplatePresentation_BELACEL_V3.pptx; règle 6×6 (ENS/M'sila)</a:t>
+            </a:r>
+          </a:p>
+        </p:txBody>
+      </p:sp>
+      <p:sp>
+        <p:nvSpPr>
+          <p:cNvPr id="990001" name="Pied de page FLE"/>
+          <p:cNvSpPr>
+            <a:spLocks noGrp="1"/>
+          </p:cNvSpPr>
+          <p:nvPr/>
+        </p:nvSpPr>
+        <p:spPr>
+          <a:xfrm>
+            <a:off x="2971800" y="182880"/>
+            <a:ext cx="4572000" cy="274320"/>
+          </a:xfrm>
+          <a:prstGeom prst="rect">
+            <a:avLst/>
+          </a:prstGeom>
+        </p:spPr>
+        <p:txBody>
+          <a:bodyPr anchor="b"/>
+          <a:lstStyle/>
+          <a:p>
+            <a:pPr algn="r">
+              <a:defRPr sz="900">
                 <a:solidFill>
-                  <a:srgbClr val="222222"/>
+                  <a:srgbClr val="9AA7B6"/>
                 </a:solidFill>
-              </a:defRPr>
-            </a:pPr>
-            <a:r>
-              <a:t>• TemplatePresentation_BELACEL_V3.pptx; règle 6×6 (ENS/M'sila)</a:t>
+                <a:latin typeface="Poppins"/>
+              </a:defRPr>
+            </a:pPr>
+            <a:r>
+              <a:rPr lang="fr-FR" sz="900">
+                <a:solidFill>
+                  <a:srgbClr val="9AA7B6"/>
+                </a:solidFill>
+                <a:latin typeface="Poppins"/>
+              </a:rPr>
+              <a:t>Université de Mostaganem — Dr. Madani BELACEL</a:t>
             </a:r>
           </a:p>
         </p:txBody>
@@ -4028,9 +4161,7 @@
   <p:cSld>
     <p:bg>
       <p:bgPr>
-        <a:solidFill>
-          <a:srgbClr val="FFFFFF"/>
-        </a:solidFill>
+        <a:solidFill>val="FFFFFF"/&gt;</a:solidFill>
         <a:effectLst/>
       </p:bgPr>
     </p:bg>
@@ -4065,9 +4196,7 @@
           <a:p>
             <a:pPr algn="ctr">
               <a:defRPr sz="2600" b="1">
-                <a:solidFill>
-                  <a:srgbClr val="1A5C33"/>
-                </a:solidFill>
+                <a:solidFill>val="006847"/&gt;</a:solidFill>
               </a:defRPr>
             </a:pPr>
             <a:r>
@@ -4103,9 +4232,7 @@
                 <a:spcPts val="600"/>
               </a:spcAft>
               <a:defRPr sz="1500">
-                <a:solidFill>
-                  <a:srgbClr val="222222"/>
-                </a:solidFill>
+                <a:solidFill>val="22344A"/&gt;</a:solidFill>
               </a:defRPr>
             </a:pPr>
             <a:r>
@@ -4118,9 +4245,7 @@
                 <a:spcPts val="600"/>
               </a:spcAft>
               <a:defRPr sz="1500">
-                <a:solidFill>
-                  <a:srgbClr val="222222"/>
-                </a:solidFill>
+                <a:solidFill>val="22344A"/&gt;</a:solidFill>
               </a:defRPr>
             </a:pPr>
             <a:r>
@@ -4133,9 +4258,7 @@
                 <a:spcPts val="600"/>
               </a:spcAft>
               <a:defRPr sz="1500">
-                <a:solidFill>
-                  <a:srgbClr val="222222"/>
-                </a:solidFill>
+                <a:solidFill>val="22344A"/&gt;</a:solidFill>
               </a:defRPr>
             </a:pPr>
             <a:r>
@@ -4148,9 +4271,7 @@
                 <a:spcPts val="600"/>
               </a:spcAft>
               <a:defRPr sz="1500">
-                <a:solidFill>
-                  <a:srgbClr val="222222"/>
-                </a:solidFill>
+                <a:solidFill>val="22344A"/&gt;</a:solidFill>
               </a:defRPr>
             </a:pPr>
             <a:r>
@@ -4163,13 +4284,52 @@
                 <a:spcPts val="600"/>
               </a:spcAft>
               <a:defRPr sz="1500">
+                <a:solidFill>val="22344A"/&gt;</a:solidFill>
+              </a:defRPr>
+            </a:pPr>
+            <a:r>
+              <a:t>• Préparer une courte présentation orale</a:t>
+            </a:r>
+          </a:p>
+        </p:txBody>
+      </p:sp>
+      <p:sp>
+        <p:nvSpPr>
+          <p:cNvPr id="990001" name="Pied de page FLE"/>
+          <p:cNvSpPr>
+            <a:spLocks noGrp="1"/>
+          </p:cNvSpPr>
+          <p:nvPr/>
+        </p:nvSpPr>
+        <p:spPr>
+          <a:xfrm>
+            <a:off x="2971800" y="182880"/>
+            <a:ext cx="4572000" cy="274320"/>
+          </a:xfrm>
+          <a:prstGeom prst="rect">
+            <a:avLst/>
+          </a:prstGeom>
+        </p:spPr>
+        <p:txBody>
+          <a:bodyPr anchor="b"/>
+          <a:lstStyle/>
+          <a:p>
+            <a:pPr algn="r">
+              <a:defRPr sz="900">
                 <a:solidFill>
-                  <a:srgbClr val="222222"/>
+                  <a:srgbClr val="9AA7B6"/>
                 </a:solidFill>
-              </a:defRPr>
-            </a:pPr>
-            <a:r>
-              <a:t>• Préparer une courte présentation orale</a:t>
+                <a:latin typeface="Poppins"/>
+              </a:defRPr>
+            </a:pPr>
+            <a:r>
+              <a:rPr lang="fr-FR" sz="900">
+                <a:solidFill>
+                  <a:srgbClr val="9AA7B6"/>
+                </a:solidFill>
+                <a:latin typeface="Poppins"/>
+              </a:rPr>
+              <a:t>Université de Mostaganem — Dr. Madani BELACEL</a:t>
             </a:r>
           </a:p>
         </p:txBody>
@@ -4187,9 +4347,7 @@
   <p:cSld>
     <p:bg>
       <p:bgPr>
-        <a:solidFill>
-          <a:srgbClr val="1A5C33"/>
-        </a:solidFill>
+        <a:solidFill>val="006847"/&gt;</a:solidFill>
         <a:effectLst/>
       </p:bgPr>
     </p:bg>
@@ -4224,9 +4382,7 @@
           <a:p>
             <a:pPr algn="ctr">
               <a:defRPr sz="2800" b="1">
-                <a:solidFill>
-                  <a:srgbClr val="FFFFFF"/>
-                </a:solidFill>
+                <a:solidFill>val="FFFFFF"/&gt;</a:solidFill>
               </a:defRPr>
             </a:pPr>
             <a:r>
@@ -4259,25 +4415,64 @@
           <a:p>
             <a:pPr algn="ctr">
               <a:defRPr sz="1800" b="0">
+                <a:solidFill>val="DFE5EA"/&gt;</a:solidFill>
+              </a:defRPr>
+            </a:pPr>
+            <a:r>
+              <a:t>Dr. BELACEL Madani</a:t>
+            </a:r>
+            <a:br/>
+            <a:r>
+              <a:t>Maître de Conférences B</a:t>
+            </a:r>
+            <a:br/>
+            <a:r>
+              <a:t>Université de Mostaganem</a:t>
+            </a:r>
+            <a:br/>
+            <a:r>
+              <a:t>madani.belacel@univ-mosta.dz</a:t>
+            </a:r>
+          </a:p>
+        </p:txBody>
+      </p:sp>
+      <p:sp>
+        <p:nvSpPr>
+          <p:cNvPr id="990001" name="Pied de page FLE"/>
+          <p:cNvSpPr>
+            <a:spLocks noGrp="1"/>
+          </p:cNvSpPr>
+          <p:nvPr/>
+        </p:nvSpPr>
+        <p:spPr>
+          <a:xfrm>
+            <a:off x="2880360" y="457200"/>
+            <a:ext cx="4572000" cy="274320"/>
+          </a:xfrm>
+          <a:prstGeom prst="rect">
+            <a:avLst/>
+          </a:prstGeom>
+        </p:spPr>
+        <p:txBody>
+          <a:bodyPr anchor="b"/>
+          <a:lstStyle/>
+          <a:p>
+            <a:pPr algn="r">
+              <a:defRPr sz="900">
                 <a:solidFill>
-                  <a:srgbClr val="C5D9C7"/>
+                  <a:srgbClr val="9AA7B6"/>
                 </a:solidFill>
-              </a:defRPr>
-            </a:pPr>
-            <a:r>
-              <a:t>Dr. BELACEL Madani</a:t>
-            </a:r>
-            <a:br/>
-            <a:r>
-              <a:t>Maître de Conférences B</a:t>
-            </a:r>
-            <a:br/>
-            <a:r>
-              <a:t>Université de Mostaganem</a:t>
-            </a:r>
-            <a:br/>
-            <a:r>
-              <a:t>madani.belacel@univ-mosta.dz</a:t>
+                <a:latin typeface="Poppins"/>
+              </a:defRPr>
+            </a:pPr>
+            <a:r>
+              <a:rPr lang="fr-FR" sz="900">
+                <a:solidFill>
+                  <a:srgbClr val="9AA7B6"/>
+                </a:solidFill>
+                <a:latin typeface="Poppins"/>
+              </a:rPr>
+              <a:t>Université de Mostaganem — Dr. Madani BELACEL</a:t>
             </a:r>
           </a:p>
         </p:txBody>
@@ -4295,9 +4490,7 @@
   <p:cSld>
     <p:bg>
       <p:bgPr>
-        <a:solidFill>
-          <a:srgbClr val="FFFFFF"/>
-        </a:solidFill>
+        <a:solidFill>val="FFFFFF"/&gt;</a:solidFill>
         <a:effectLst/>
       </p:bgPr>
     </p:bg>
@@ -4332,9 +4525,7 @@
           <a:p>
             <a:pPr algn="l">
               <a:defRPr sz="2600" b="1">
-                <a:solidFill>
-                  <a:srgbClr val="1A5C33"/>
-                </a:solidFill>
+                <a:solidFill>val="006847"/&gt;</a:solidFill>
               </a:defRPr>
             </a:pPr>
             <a:r>
@@ -4370,9 +4561,7 @@
                 <a:spcPts val="600"/>
               </a:spcAft>
               <a:defRPr sz="1500">
-                <a:solidFill>
-                  <a:srgbClr val="222222"/>
-                </a:solidFill>
+                <a:solidFill>val="22344A"/&gt;</a:solidFill>
               </a:defRPr>
             </a:pPr>
             <a:r>
@@ -4393,9 +4582,7 @@
                 <a:spcPts val="600"/>
               </a:spcAft>
               <a:defRPr sz="1500">
-                <a:solidFill>
-                  <a:srgbClr val="222222"/>
-                </a:solidFill>
+                <a:solidFill>val="22344A"/&gt;</a:solidFill>
               </a:defRPr>
             </a:pPr>
             <a:r>
@@ -4420,9 +4607,7 @@
                 <a:spcPts val="600"/>
               </a:spcAft>
               <a:defRPr sz="1500">
-                <a:solidFill>
-                  <a:srgbClr val="222222"/>
-                </a:solidFill>
+                <a:solidFill>val="22344A"/&gt;</a:solidFill>
               </a:defRPr>
             </a:pPr>
             <a:r>
@@ -4439,13 +4624,52 @@
                 <a:spcPts val="600"/>
               </a:spcAft>
               <a:defRPr sz="1500">
+                <a:solidFill>val="22344A"/&gt;</a:solidFill>
+              </a:defRPr>
+            </a:pPr>
+            <a:r>
+              <a:t>• Mode d'évaluation :TD 20 % + Présentation orale (simulation soutenance) 50 % + QCM 30 %</a:t>
+            </a:r>
+          </a:p>
+        </p:txBody>
+      </p:sp>
+      <p:sp>
+        <p:nvSpPr>
+          <p:cNvPr id="990001" name="Pied de page FLE"/>
+          <p:cNvSpPr>
+            <a:spLocks noGrp="1"/>
+          </p:cNvSpPr>
+          <p:nvPr/>
+        </p:nvSpPr>
+        <p:spPr>
+          <a:xfrm>
+            <a:off x="2971800" y="182880"/>
+            <a:ext cx="4572000" cy="274320"/>
+          </a:xfrm>
+          <a:prstGeom prst="rect">
+            <a:avLst/>
+          </a:prstGeom>
+        </p:spPr>
+        <p:txBody>
+          <a:bodyPr anchor="b"/>
+          <a:lstStyle/>
+          <a:p>
+            <a:pPr algn="r">
+              <a:defRPr sz="900">
                 <a:solidFill>
-                  <a:srgbClr val="222222"/>
+                  <a:srgbClr val="9AA7B6"/>
                 </a:solidFill>
-              </a:defRPr>
-            </a:pPr>
-            <a:r>
-              <a:t>• Mode d'évaluation :TD 20 % + Présentation orale (simulation soutenance) 50 % + QCM 30 %</a:t>
+                <a:latin typeface="Poppins"/>
+              </a:defRPr>
+            </a:pPr>
+            <a:r>
+              <a:rPr lang="fr-FR" sz="900">
+                <a:solidFill>
+                  <a:srgbClr val="9AA7B6"/>
+                </a:solidFill>
+                <a:latin typeface="Poppins"/>
+              </a:rPr>
+              <a:t>Université de Mostaganem — Dr. Madani BELACEL</a:t>
             </a:r>
           </a:p>
         </p:txBody>
@@ -4463,9 +4687,7 @@
   <p:cSld>
     <p:bg>
       <p:bgPr>
-        <a:solidFill>
-          <a:srgbClr val="FFFFFF"/>
-        </a:solidFill>
+        <a:solidFill>val="FFFFFF"/&gt;</a:solidFill>
         <a:effectLst/>
       </p:bgPr>
     </p:bg>
@@ -4500,9 +4722,7 @@
           <a:p>
             <a:pPr algn="l">
               <a:defRPr sz="2600" b="1">
-                <a:solidFill>
-                  <a:srgbClr val="1A5C33"/>
-                </a:solidFill>
+                <a:solidFill>val="006847"/&gt;</a:solidFill>
               </a:defRPr>
             </a:pPr>
             <a:r>
@@ -4538,9 +4758,7 @@
                 <a:spcPts val="600"/>
               </a:spcAft>
               <a:defRPr sz="1600">
-                <a:solidFill>
-                  <a:srgbClr val="222222"/>
-                </a:solidFill>
+                <a:solidFill>val="22344A"/&gt;</a:solidFill>
               </a:defRPr>
             </a:pPr>
             <a:r>
@@ -4553,9 +4771,7 @@
                 <a:spcPts val="600"/>
               </a:spcAft>
               <a:defRPr sz="1600">
-                <a:solidFill>
-                  <a:srgbClr val="222222"/>
-                </a:solidFill>
+                <a:solidFill>val="22344A"/&gt;</a:solidFill>
               </a:defRPr>
             </a:pPr>
             <a:r>
@@ -4568,9 +4784,7 @@
                 <a:spcPts val="600"/>
               </a:spcAft>
               <a:defRPr sz="1600">
-                <a:solidFill>
-                  <a:srgbClr val="222222"/>
-                </a:solidFill>
+                <a:solidFill>val="22344A"/&gt;</a:solidFill>
               </a:defRPr>
             </a:pPr>
             <a:r>
@@ -4583,9 +4797,7 @@
                 <a:spcPts val="600"/>
               </a:spcAft>
               <a:defRPr sz="1600">
-                <a:solidFill>
-                  <a:srgbClr val="222222"/>
-                </a:solidFill>
+                <a:solidFill>val="22344A"/&gt;</a:solidFill>
               </a:defRPr>
             </a:pPr>
             <a:r>
@@ -4598,9 +4810,7 @@
                 <a:spcPts val="600"/>
               </a:spcAft>
               <a:defRPr sz="1600">
-                <a:solidFill>
-                  <a:srgbClr val="222222"/>
-                </a:solidFill>
+                <a:solidFill>val="22344A"/&gt;</a:solidFill>
               </a:defRPr>
             </a:pPr>
             <a:r>
@@ -4613,9 +4823,7 @@
                 <a:spcPts val="600"/>
               </a:spcAft>
               <a:defRPr sz="1600">
-                <a:solidFill>
-                  <a:srgbClr val="222222"/>
-                </a:solidFill>
+                <a:solidFill>val="22344A"/&gt;</a:solidFill>
               </a:defRPr>
             </a:pPr>
             <a:r>
@@ -4628,9 +4836,7 @@
                 <a:spcPts val="600"/>
               </a:spcAft>
               <a:defRPr sz="1600">
-                <a:solidFill>
-                  <a:srgbClr val="222222"/>
-                </a:solidFill>
+                <a:solidFill>val="22344A"/&gt;</a:solidFill>
               </a:defRPr>
             </a:pPr>
             <a:r>
@@ -4643,9 +4849,7 @@
                 <a:spcPts val="600"/>
               </a:spcAft>
               <a:defRPr sz="1600">
-                <a:solidFill>
-                  <a:srgbClr val="222222"/>
-                </a:solidFill>
+                <a:solidFill>val="22344A"/&gt;</a:solidFill>
               </a:defRPr>
             </a:pPr>
             <a:r>
@@ -4658,9 +4862,7 @@
                 <a:spcPts val="600"/>
               </a:spcAft>
               <a:defRPr sz="1600">
-                <a:solidFill>
-                  <a:srgbClr val="222222"/>
-                </a:solidFill>
+                <a:solidFill>val="22344A"/&gt;</a:solidFill>
               </a:defRPr>
             </a:pPr>
             <a:r>
@@ -4673,13 +4875,52 @@
                 <a:spcPts val="600"/>
               </a:spcAft>
               <a:defRPr sz="1600">
+                <a:solidFill>val="22344A"/&gt;</a:solidFill>
+              </a:defRPr>
+            </a:pPr>
+            <a:r>
+              <a:t>• Architecture d'une communication scientifique (12–15 slides)(15 min)</a:t>
+            </a:r>
+          </a:p>
+        </p:txBody>
+      </p:sp>
+      <p:sp>
+        <p:nvSpPr>
+          <p:cNvPr id="990001" name="Pied de page FLE"/>
+          <p:cNvSpPr>
+            <a:spLocks noGrp="1"/>
+          </p:cNvSpPr>
+          <p:nvPr/>
+        </p:nvSpPr>
+        <p:spPr>
+          <a:xfrm>
+            <a:off x="2971800" y="182880"/>
+            <a:ext cx="4572000" cy="274320"/>
+          </a:xfrm>
+          <a:prstGeom prst="rect">
+            <a:avLst/>
+          </a:prstGeom>
+        </p:spPr>
+        <p:txBody>
+          <a:bodyPr anchor="b"/>
+          <a:lstStyle/>
+          <a:p>
+            <a:pPr algn="r">
+              <a:defRPr sz="900">
                 <a:solidFill>
-                  <a:srgbClr val="222222"/>
+                  <a:srgbClr val="9AA7B6"/>
                 </a:solidFill>
-              </a:defRPr>
-            </a:pPr>
-            <a:r>
-              <a:t>• Architecture d'une communication scientifique (12–15 slides)(15 min)</a:t>
+                <a:latin typeface="Poppins"/>
+              </a:defRPr>
+            </a:pPr>
+            <a:r>
+              <a:rPr lang="fr-FR" sz="900">
+                <a:solidFill>
+                  <a:srgbClr val="9AA7B6"/>
+                </a:solidFill>
+                <a:latin typeface="Poppins"/>
+              </a:rPr>
+              <a:t>Université de Mostaganem — Dr. Madani BELACEL</a:t>
             </a:r>
           </a:p>
         </p:txBody>
@@ -4697,9 +4938,7 @@
   <p:cSld>
     <p:bg>
       <p:bgPr>
-        <a:solidFill>
-          <a:srgbClr val="FFFFFF"/>
-        </a:solidFill>
+        <a:solidFill>val="FFFFFF"/&gt;</a:solidFill>
         <a:effectLst/>
       </p:bgPr>
     </p:bg>
@@ -4724,9 +4963,7 @@
           <a:prstGeom prst="rect">
             <a:avLst/>
           </a:prstGeom>
-          <a:solidFill>
-            <a:srgbClr val="2C6E49"/>
-          </a:solidFill>
+          <a:solidFill>val="00875B"/&gt;</a:solidFill>
           <a:ln>
             <a:noFill/>
           </a:ln>
@@ -4777,9 +5014,7 @@
           <a:p>
             <a:pPr algn="l">
               <a:defRPr sz="2200" b="1">
-                <a:solidFill>
-                  <a:srgbClr val="1A5C33"/>
-                </a:solidFill>
+                <a:solidFill>val="006847"/&gt;</a:solidFill>
               </a:defRPr>
             </a:pPr>
             <a:r>
@@ -4815,9 +5050,7 @@
                 <a:spcPts val="600"/>
               </a:spcAft>
               <a:defRPr sz="1400">
-                <a:solidFill>
-                  <a:srgbClr val="222222"/>
-                </a:solidFill>
+                <a:solidFill>val="22344A"/&gt;</a:solidFill>
               </a:defRPr>
             </a:pPr>
             <a:r>
@@ -4830,9 +5063,7 @@
                 <a:spcPts val="600"/>
               </a:spcAft>
               <a:defRPr sz="1400">
-                <a:solidFill>
-                  <a:srgbClr val="222222"/>
-                </a:solidFill>
+                <a:solidFill>val="22344A"/&gt;</a:solidFill>
               </a:defRPr>
             </a:pPr>
             <a:r>
@@ -4845,13 +5076,52 @@
                 <a:spcPts val="600"/>
               </a:spcAft>
               <a:defRPr sz="1400">
+                <a:solidFill>val="22344A"/&gt;</a:solidFill>
+              </a:defRPr>
+            </a:pPr>
+            <a:r>
+              <a:t>• Compétences pré-requises :TIC 04–05 ; maîtrise de base de Word et Excel ; capacité à synthétiser une recherche</a:t>
+            </a:r>
+          </a:p>
+        </p:txBody>
+      </p:sp>
+      <p:sp>
+        <p:nvSpPr>
+          <p:cNvPr id="990001" name="Pied de page FLE"/>
+          <p:cNvSpPr>
+            <a:spLocks noGrp="1"/>
+          </p:cNvSpPr>
+          <p:nvPr/>
+        </p:nvSpPr>
+        <p:spPr>
+          <a:xfrm>
+            <a:off x="-228600" y="6400800"/>
+            <a:ext cx="109728" cy="274320"/>
+          </a:xfrm>
+          <a:prstGeom prst="rect">
+            <a:avLst/>
+          </a:prstGeom>
+        </p:spPr>
+        <p:txBody>
+          <a:bodyPr anchor="b"/>
+          <a:lstStyle/>
+          <a:p>
+            <a:pPr algn="r">
+              <a:defRPr sz="900">
                 <a:solidFill>
-                  <a:srgbClr val="222222"/>
+                  <a:srgbClr val="9AA7B6"/>
                 </a:solidFill>
-              </a:defRPr>
-            </a:pPr>
-            <a:r>
-              <a:t>• Compétences pré-requises :TIC 04–05 ; maîtrise de base de Word et Excel ; capacité à synthétiser une recherche</a:t>
+                <a:latin typeface="Poppins"/>
+              </a:defRPr>
+            </a:pPr>
+            <a:r>
+              <a:rPr lang="fr-FR" sz="900">
+                <a:solidFill>
+                  <a:srgbClr val="9AA7B6"/>
+                </a:solidFill>
+                <a:latin typeface="Poppins"/>
+              </a:rPr>
+              <a:t>Université de Mostaganem — Dr. Madani BELACEL</a:t>
             </a:r>
           </a:p>
         </p:txBody>
@@ -4869,9 +5139,7 @@
   <p:cSld>
     <p:bg>
       <p:bgPr>
-        <a:solidFill>
-          <a:srgbClr val="FFFFFF"/>
-        </a:solidFill>
+        <a:solidFill>val="FFFFFF"/&gt;</a:solidFill>
         <a:effectLst/>
       </p:bgPr>
     </p:bg>
@@ -4896,9 +5164,7 @@
           <a:prstGeom prst="rect">
             <a:avLst/>
           </a:prstGeom>
-          <a:solidFill>
-            <a:srgbClr val="2C6E49"/>
-          </a:solidFill>
+          <a:solidFill>val="00875B"/&gt;</a:solidFill>
           <a:ln>
             <a:noFill/>
           </a:ln>
@@ -4949,9 +5215,7 @@
           <a:p>
             <a:pPr algn="l">
               <a:defRPr sz="2200" b="1">
-                <a:solidFill>
-                  <a:srgbClr val="1A5C33"/>
-                </a:solidFill>
+                <a:solidFill>val="006847"/&gt;</a:solidFill>
               </a:defRPr>
             </a:pPr>
             <a:r>
@@ -4987,9 +5251,7 @@
                 <a:spcPts val="600"/>
               </a:spcAft>
               <a:defRPr sz="1400">
-                <a:solidFill>
-                  <a:srgbClr val="222222"/>
-                </a:solidFill>
+                <a:solidFill>val="22344A"/&gt;</a:solidFill>
               </a:defRPr>
             </a:pPr>
             <a:r>
@@ -5010,9 +5272,7 @@
                 <a:spcPts val="600"/>
               </a:spcAft>
               <a:defRPr sz="1400">
-                <a:solidFill>
-                  <a:srgbClr val="222222"/>
-                </a:solidFill>
+                <a:solidFill>val="22344A"/&gt;</a:solidFill>
               </a:defRPr>
             </a:pPr>
             <a:r>
@@ -5037,9 +5297,7 @@
                 <a:spcPts val="600"/>
               </a:spcAft>
               <a:defRPr sz="1400">
-                <a:solidFill>
-                  <a:srgbClr val="222222"/>
-                </a:solidFill>
+                <a:solidFill>val="22344A"/&gt;</a:solidFill>
               </a:defRPr>
             </a:pPr>
             <a:r>
@@ -5056,13 +5314,52 @@
                 <a:spcPts val="600"/>
               </a:spcAft>
               <a:defRPr sz="1400">
+                <a:solidFill>val="22344A"/&gt;</a:solidFill>
+              </a:defRPr>
+            </a:pPr>
+            <a:r>
+              <a:t>• Mode d'évaluation :TD 20 % + Présentation orale (simulation soutenance) 50 % + QCM 30 %</a:t>
+            </a:r>
+          </a:p>
+        </p:txBody>
+      </p:sp>
+      <p:sp>
+        <p:nvSpPr>
+          <p:cNvPr id="990001" name="Pied de page FLE"/>
+          <p:cNvSpPr>
+            <a:spLocks noGrp="1"/>
+          </p:cNvSpPr>
+          <p:nvPr/>
+        </p:nvSpPr>
+        <p:spPr>
+          <a:xfrm>
+            <a:off x="-228600" y="6400800"/>
+            <a:ext cx="109728" cy="274320"/>
+          </a:xfrm>
+          <a:prstGeom prst="rect">
+            <a:avLst/>
+          </a:prstGeom>
+        </p:spPr>
+        <p:txBody>
+          <a:bodyPr anchor="b"/>
+          <a:lstStyle/>
+          <a:p>
+            <a:pPr algn="r">
+              <a:defRPr sz="900">
                 <a:solidFill>
-                  <a:srgbClr val="222222"/>
+                  <a:srgbClr val="9AA7B6"/>
                 </a:solidFill>
-              </a:defRPr>
-            </a:pPr>
-            <a:r>
-              <a:t>• Mode d'évaluation :TD 20 % + Présentation orale (simulation soutenance) 50 % + QCM 30 %</a:t>
+                <a:latin typeface="Poppins"/>
+              </a:defRPr>
+            </a:pPr>
+            <a:r>
+              <a:rPr lang="fr-FR" sz="900">
+                <a:solidFill>
+                  <a:srgbClr val="9AA7B6"/>
+                </a:solidFill>
+                <a:latin typeface="Poppins"/>
+              </a:rPr>
+              <a:t>Université de Mostaganem — Dr. Madani BELACEL</a:t>
             </a:r>
           </a:p>
         </p:txBody>
@@ -5080,9 +5377,7 @@
   <p:cSld>
     <p:bg>
       <p:bgPr>
-        <a:solidFill>
-          <a:srgbClr val="FFFFFF"/>
-        </a:solidFill>
+        <a:solidFill>val="FFFFFF"/&gt;</a:solidFill>
         <a:effectLst/>
       </p:bgPr>
     </p:bg>
@@ -5107,9 +5402,7 @@
           <a:prstGeom prst="rect">
             <a:avLst/>
           </a:prstGeom>
-          <a:solidFill>
-            <a:srgbClr val="2C6E49"/>
-          </a:solidFill>
+          <a:solidFill>val="00875B"/&gt;</a:solidFill>
           <a:ln>
             <a:noFill/>
           </a:ln>
@@ -5160,9 +5453,7 @@
           <a:p>
             <a:pPr algn="l">
               <a:defRPr sz="2200" b="1">
-                <a:solidFill>
-                  <a:srgbClr val="1A5C33"/>
-                </a:solidFill>
+                <a:solidFill>val="006847"/&gt;</a:solidFill>
               </a:defRPr>
             </a:pPr>
             <a:r>
@@ -5198,9 +5489,7 @@
                 <a:spcPts val="600"/>
               </a:spcAft>
               <a:defRPr sz="1400">
-                <a:solidFill>
-                  <a:srgbClr val="222222"/>
-                </a:solidFill>
+                <a:solidFill>val="22344A"/&gt;</a:solidFill>
               </a:defRPr>
             </a:pPr>
             <a:r>
@@ -5213,13 +5502,52 @@
                 <a:spcPts val="600"/>
               </a:spcAft>
               <a:defRPr sz="1400">
+                <a:solidFill>val="22344A"/&gt;</a:solidFill>
+              </a:defRPr>
+            </a:pPr>
+            <a:r>
+              <a:t>• Exercice de data visualisation (transformer un tableau brut en infographie)</a:t>
+            </a:r>
+          </a:p>
+        </p:txBody>
+      </p:sp>
+      <p:sp>
+        <p:nvSpPr>
+          <p:cNvPr id="990001" name="Pied de page FLE"/>
+          <p:cNvSpPr>
+            <a:spLocks noGrp="1"/>
+          </p:cNvSpPr>
+          <p:nvPr/>
+        </p:nvSpPr>
+        <p:spPr>
+          <a:xfrm>
+            <a:off x="-228600" y="6400800"/>
+            <a:ext cx="109728" cy="274320"/>
+          </a:xfrm>
+          <a:prstGeom prst="rect">
+            <a:avLst/>
+          </a:prstGeom>
+        </p:spPr>
+        <p:txBody>
+          <a:bodyPr anchor="b"/>
+          <a:lstStyle/>
+          <a:p>
+            <a:pPr algn="r">
+              <a:defRPr sz="900">
                 <a:solidFill>
-                  <a:srgbClr val="222222"/>
+                  <a:srgbClr val="9AA7B6"/>
                 </a:solidFill>
-              </a:defRPr>
-            </a:pPr>
-            <a:r>
-              <a:t>• Exercice de data visualisation (transformer un tableau brut en infographie)</a:t>
+                <a:latin typeface="Poppins"/>
+              </a:defRPr>
+            </a:pPr>
+            <a:r>
+              <a:rPr lang="fr-FR" sz="900">
+                <a:solidFill>
+                  <a:srgbClr val="9AA7B6"/>
+                </a:solidFill>
+                <a:latin typeface="Poppins"/>
+              </a:rPr>
+              <a:t>Université de Mostaganem — Dr. Madani BELACEL</a:t>
             </a:r>
           </a:p>
         </p:txBody>
@@ -5237,9 +5565,7 @@
   <p:cSld>
     <p:bg>
       <p:bgPr>
-        <a:solidFill>
-          <a:srgbClr val="FFFFFF"/>
-        </a:solidFill>
+        <a:solidFill>val="FFFFFF"/&gt;</a:solidFill>
         <a:effectLst/>
       </p:bgPr>
     </p:bg>
@@ -5264,9 +5590,7 @@
           <a:prstGeom prst="rect">
             <a:avLst/>
           </a:prstGeom>
-          <a:solidFill>
-            <a:srgbClr val="2C6E49"/>
-          </a:solidFill>
+          <a:solidFill>val="00875B"/&gt;</a:solidFill>
           <a:ln>
             <a:noFill/>
           </a:ln>
@@ -5317,9 +5641,7 @@
           <a:p>
             <a:pPr algn="l">
               <a:defRPr sz="2200" b="1">
-                <a:solidFill>
-                  <a:srgbClr val="1A5C33"/>
-                </a:solidFill>
+                <a:solidFill>val="006847"/&gt;</a:solidFill>
               </a:defRPr>
             </a:pPr>
             <a:r>
@@ -5355,9 +5677,7 @@
                 <a:spcPts val="600"/>
               </a:spcAft>
               <a:defRPr sz="1400">
-                <a:solidFill>
-                  <a:srgbClr val="222222"/>
-                </a:solidFill>
+                <a:solidFill>val="22344A"/&gt;</a:solidFill>
               </a:defRPr>
             </a:pPr>
             <a:r>
@@ -5370,13 +5690,52 @@
                 <a:spcPts val="600"/>
               </a:spcAft>
               <a:defRPr sz="1400">
+                <a:solidFill>val="22344A"/&gt;</a:solidFill>
+              </a:defRPr>
+            </a:pPr>
+            <a:r>
+              <a:t>• Grille d'évaluation critériée (contenu, design, oral, gestion du temps)</a:t>
+            </a:r>
+          </a:p>
+        </p:txBody>
+      </p:sp>
+      <p:sp>
+        <p:nvSpPr>
+          <p:cNvPr id="990001" name="Pied de page FLE"/>
+          <p:cNvSpPr>
+            <a:spLocks noGrp="1"/>
+          </p:cNvSpPr>
+          <p:nvPr/>
+        </p:nvSpPr>
+        <p:spPr>
+          <a:xfrm>
+            <a:off x="-228600" y="6400800"/>
+            <a:ext cx="109728" cy="274320"/>
+          </a:xfrm>
+          <a:prstGeom prst="rect">
+            <a:avLst/>
+          </a:prstGeom>
+        </p:spPr>
+        <p:txBody>
+          <a:bodyPr anchor="b"/>
+          <a:lstStyle/>
+          <a:p>
+            <a:pPr algn="r">
+              <a:defRPr sz="900">
                 <a:solidFill>
-                  <a:srgbClr val="222222"/>
+                  <a:srgbClr val="9AA7B6"/>
                 </a:solidFill>
-              </a:defRPr>
-            </a:pPr>
-            <a:r>
-              <a:t>• Grille d'évaluation critériée (contenu, design, oral, gestion du temps)</a:t>
+                <a:latin typeface="Poppins"/>
+              </a:defRPr>
+            </a:pPr>
+            <a:r>
+              <a:rPr lang="fr-FR" sz="900">
+                <a:solidFill>
+                  <a:srgbClr val="9AA7B6"/>
+                </a:solidFill>
+                <a:latin typeface="Poppins"/>
+              </a:rPr>
+              <a:t>Université de Mostaganem — Dr. Madani BELACEL</a:t>
             </a:r>
           </a:p>
         </p:txBody>
@@ -5394,9 +5753,7 @@
   <p:cSld>
     <p:bg>
       <p:bgPr>
-        <a:solidFill>
-          <a:srgbClr val="FFFFFF"/>
-        </a:solidFill>
+        <a:solidFill>val="FFFFFF"/&gt;</a:solidFill>
         <a:effectLst/>
       </p:bgPr>
     </p:bg>
@@ -5421,9 +5778,7 @@
           <a:prstGeom prst="rect">
             <a:avLst/>
           </a:prstGeom>
-          <a:solidFill>
-            <a:srgbClr val="2C6E49"/>
-          </a:solidFill>
+          <a:solidFill>val="00875B"/&gt;</a:solidFill>
           <a:ln>
             <a:noFill/>
           </a:ln>
@@ -5474,9 +5829,7 @@
           <a:p>
             <a:pPr algn="l">
               <a:defRPr sz="2200" b="1">
-                <a:solidFill>
-                  <a:srgbClr val="1A5C33"/>
-                </a:solidFill>
+                <a:solidFill>val="006847"/&gt;</a:solidFill>
               </a:defRPr>
             </a:pPr>
             <a:r>
@@ -5512,9 +5865,7 @@
                 <a:spcPts val="600"/>
               </a:spcAft>
               <a:defRPr sz="1400">
-                <a:solidFill>
-                  <a:srgbClr val="222222"/>
-                </a:solidFill>
+                <a:solidFill>val="22344A"/&gt;</a:solidFill>
               </a:defRPr>
             </a:pPr>
             <a:r>
@@ -5527,9 +5878,7 @@
                 <a:spcPts val="600"/>
               </a:spcAft>
               <a:defRPr sz="1400">
-                <a:solidFill>
-                  <a:srgbClr val="222222"/>
-                </a:solidFill>
+                <a:solidFill>val="22344A"/&gt;</a:solidFill>
               </a:defRPr>
             </a:pPr>
             <a:r>
@@ -5542,9 +5891,7 @@
                 <a:spcPts val="600"/>
               </a:spcAft>
               <a:defRPr sz="1400">
-                <a:solidFill>
-                  <a:srgbClr val="222222"/>
-                </a:solidFill>
+                <a:solidFill>val="22344A"/&gt;</a:solidFill>
               </a:defRPr>
             </a:pPr>
             <a:r>
@@ -5557,9 +5904,7 @@
                 <a:spcPts val="600"/>
               </a:spcAft>
               <a:defRPr sz="1400">
-                <a:solidFill>
-                  <a:srgbClr val="222222"/>
-                </a:solidFill>
+                <a:solidFill>val="22344A"/&gt;</a:solidFill>
               </a:defRPr>
             </a:pPr>
             <a:r>
@@ -5572,9 +5917,7 @@
                 <a:spcPts val="600"/>
               </a:spcAft>
               <a:defRPr sz="1400">
-                <a:solidFill>
-                  <a:srgbClr val="222222"/>
-                </a:solidFill>
+                <a:solidFill>val="22344A"/&gt;</a:solidFill>
               </a:defRPr>
             </a:pPr>
             <a:r>
@@ -5587,13 +5930,52 @@
                 <a:spcPts val="600"/>
               </a:spcAft>
               <a:defRPr sz="1400">
+                <a:solidFill>val="22344A"/&gt;</a:solidFill>
+              </a:defRPr>
+            </a:pPr>
+            <a:r>
+              <a:t>• Contact enseignant :BELACEL Madani —madani.belacel@univ-mosta.dz</a:t>
+            </a:r>
+          </a:p>
+        </p:txBody>
+      </p:sp>
+      <p:sp>
+        <p:nvSpPr>
+          <p:cNvPr id="990001" name="Pied de page FLE"/>
+          <p:cNvSpPr>
+            <a:spLocks noGrp="1"/>
+          </p:cNvSpPr>
+          <p:nvPr/>
+        </p:nvSpPr>
+        <p:spPr>
+          <a:xfrm>
+            <a:off x="-228600" y="6400800"/>
+            <a:ext cx="109728" cy="274320"/>
+          </a:xfrm>
+          <a:prstGeom prst="rect">
+            <a:avLst/>
+          </a:prstGeom>
+        </p:spPr>
+        <p:txBody>
+          <a:bodyPr anchor="b"/>
+          <a:lstStyle/>
+          <a:p>
+            <a:pPr algn="r">
+              <a:defRPr sz="900">
                 <a:solidFill>
-                  <a:srgbClr val="222222"/>
+                  <a:srgbClr val="9AA7B6"/>
                 </a:solidFill>
-              </a:defRPr>
-            </a:pPr>
-            <a:r>
-              <a:t>• Contact enseignant :BELACEL Madani —madani.belacel@univ-mosta.dz</a:t>
+                <a:latin typeface="Poppins"/>
+              </a:defRPr>
+            </a:pPr>
+            <a:r>
+              <a:rPr lang="fr-FR" sz="900">
+                <a:solidFill>
+                  <a:srgbClr val="9AA7B6"/>
+                </a:solidFill>
+                <a:latin typeface="Poppins"/>
+              </a:rPr>
+              <a:t>Université de Mostaganem — Dr. Madani BELACEL</a:t>
             </a:r>
           </a:p>
         </p:txBody>
@@ -5611,9 +5993,7 @@
   <p:cSld>
     <p:bg>
       <p:bgPr>
-        <a:solidFill>
-          <a:srgbClr val="FFFFFF"/>
-        </a:solidFill>
+        <a:solidFill>val="FFFFFF"/&gt;</a:solidFill>
         <a:effectLst/>
       </p:bgPr>
     </p:bg>
@@ -5638,9 +6018,7 @@
           <a:prstGeom prst="rect">
             <a:avLst/>
           </a:prstGeom>
-          <a:solidFill>
-            <a:srgbClr val="2C6E49"/>
-          </a:solidFill>
+          <a:solidFill>val="00875B"/&gt;</a:solidFill>
           <a:ln>
             <a:noFill/>
           </a:ln>
@@ -5691,9 +6069,7 @@
           <a:p>
             <a:pPr algn="l">
               <a:defRPr sz="2200" b="1">
-                <a:solidFill>
-                  <a:srgbClr val="1A5C33"/>
-                </a:solidFill>
+                <a:solidFill>val="006847"/&gt;</a:solidFill>
               </a:defRPr>
             </a:pPr>
             <a:r>
@@ -5729,9 +6105,7 @@
                 <a:spcPts val="600"/>
               </a:spcAft>
               <a:defRPr sz="1400">
-                <a:solidFill>
-                  <a:srgbClr val="222222"/>
-                </a:solidFill>
+                <a:solidFill>val="22344A"/&gt;</a:solidFill>
               </a:defRPr>
             </a:pPr>
             <a:r>
@@ -5744,13 +6118,52 @@
                 <a:spcPts val="600"/>
               </a:spcAft>
               <a:defRPr sz="1400">
+                <a:solidFill>val="22344A"/&gt;</a:solidFill>
+              </a:defRPr>
+            </a:pPr>
+            <a:r>
+              <a:t>• Recommandations CNREN(Comité National de Réforme de l'Enseignement Supérieur) : les étudiants de Master doivent maîtriser les outils de présentation scientifique pour les journées d'étude, colloques et séminaires. Le recours aux TIC dans la recherche est un critère d'évaluation des établissements (AAC – Auto-évaluation et Audit de Conformité).</a:t>
+            </a:r>
+          </a:p>
+        </p:txBody>
+      </p:sp>
+      <p:sp>
+        <p:nvSpPr>
+          <p:cNvPr id="990001" name="Pied de page FLE"/>
+          <p:cNvSpPr>
+            <a:spLocks noGrp="1"/>
+          </p:cNvSpPr>
+          <p:nvPr/>
+        </p:nvSpPr>
+        <p:spPr>
+          <a:xfrm>
+            <a:off x="-228600" y="6400800"/>
+            <a:ext cx="109728" cy="274320"/>
+          </a:xfrm>
+          <a:prstGeom prst="rect">
+            <a:avLst/>
+          </a:prstGeom>
+        </p:spPr>
+        <p:txBody>
+          <a:bodyPr anchor="b"/>
+          <a:lstStyle/>
+          <a:p>
+            <a:pPr algn="r">
+              <a:defRPr sz="900">
                 <a:solidFill>
-                  <a:srgbClr val="222222"/>
+                  <a:srgbClr val="9AA7B6"/>
                 </a:solidFill>
-              </a:defRPr>
-            </a:pPr>
-            <a:r>
-              <a:t>• Recommandations CNREN(Comité National de Réforme de l'Enseignement Supérieur) : les étudiants de Master doivent maîtriser les outils de présentation scientifique pour les journées d'étude, colloques et séminaires. Le recours aux TIC dans la recherche est un critère d'évaluation des établissements (AAC – Auto-évaluation et Audit de Conformité).</a:t>
+                <a:latin typeface="Poppins"/>
+              </a:defRPr>
+            </a:pPr>
+            <a:r>
+              <a:rPr lang="fr-FR" sz="900">
+                <a:solidFill>
+                  <a:srgbClr val="9AA7B6"/>
+                </a:solidFill>
+                <a:latin typeface="Poppins"/>
+              </a:rPr>
+              <a:t>Université de Mostaganem — Dr. Madani BELACEL</a:t>
             </a:r>
           </a:p>
         </p:txBody>
@@ -5806,7 +6219,7 @@
     </a:clrScheme>
     <a:fontScheme name="Office">
       <a:majorFont>
-        <a:latin typeface="Calibri"/>
+        <a:latin typeface="Poppins"/>
         <a:ea typeface=""/>
         <a:cs typeface=""/>
         <a:font script="Jpan" typeface="ＭＳ Ｐゴシック"/>
@@ -5841,7 +6254,7 @@
         <a:font script="Geor" typeface="Sylfaen"/>
       </a:majorFont>
       <a:minorFont>
-        <a:latin typeface="Calibri"/>
+        <a:latin typeface="Poppins"/>
         <a:ea typeface=""/>
         <a:cs typeface=""/>
         <a:font script="Jpan" typeface="ＭＳ Ｐゴシック"/>
